--- a/lecons/F2T/28_S22_L6_P3_Africa_Vegetation_Drainage.pptx
+++ b/lecons/F2T/28_S22_L6_P3_Africa_Vegetation_Drainage.pptx
@@ -57,9 +57,10 @@
     <p:sldId id="305" r:id="rId51"/>
     <p:sldId id="306" r:id="rId52"/>
     <p:sldId id="307" r:id="rId53"/>
+    <p:sldId id="308" r:id="rId54"/>
   </p:sldIdLst>
   <p:notesMasterIdLst>
-    <p:notesMasterId r:id="rId54"/>
+    <p:notesMasterId r:id="rId55"/>
   </p:notesMasterIdLst>
   <p:sldSz cx="12192000" cy="6858000"/>
   <p:notesSz cx="6858000" cy="12192000"/>
@@ -641,7 +642,7 @@
           <a:p>
             <a:r>
               <a:rPr lang="en-US" dirty="0"/>
-              <a:t>Listen carefully to this situation from real life. Lake Chad, north of Cameroon, is much smaller today than sixty years ago. Many fishermen and farmers who lived near it have lost their work. Mariam wonders why the lake is shrinking. Think about it, because I am going to ask you some questions.</a:t>
+              <a:t>Listen carefully to this situation from real life. Lake Chad, north of Cameroon, is much smaller today than sixty years ago, and many fishermen and farmers have lost their work. Mariam asks: "What are the vegetation, the rivers and the lakes of Africa, and why is Lake Chad shrinking?" Think about it, because I am going to ask you some questions.</a:t>
             </a:r>
             <a:endParaRPr lang="en-US" dirty="0"/>
           </a:p>
@@ -817,7 +818,7 @@
           <a:p>
             <a:r>
               <a:rPr lang="en-US" dirty="0"/>
-              <a:t>Good. Lake Chad is getting smaller.</a:t>
+              <a:t>Good. Mariam does not know the vegetation and drainage of Africa and why Lake Chad is shrinking.</a:t>
             </a:r>
             <a:endParaRPr lang="en-US" dirty="0"/>
           </a:p>
@@ -905,7 +906,7 @@
           <a:p>
             <a:r>
               <a:rPr lang="en-US" dirty="0"/>
-              <a:t>Question 2: Who suffers from this problem? Think for a moment, then raise your hand to answer.</a:t>
+              <a:t>Question 2: What happened to Lake Chad? Think for a moment, then raise your hand to answer.</a:t>
             </a:r>
             <a:endParaRPr lang="en-US" dirty="0"/>
           </a:p>
@@ -993,7 +994,7 @@
           <a:p>
             <a:r>
               <a:rPr lang="en-US" dirty="0"/>
-              <a:t>Good. Fishermen and farmers near the lake.</a:t>
+              <a:t>Good. It has become much smaller.</a:t>
             </a:r>
             <a:endParaRPr lang="en-US" dirty="0"/>
           </a:p>
@@ -1081,7 +1082,7 @@
           <a:p>
             <a:r>
               <a:rPr lang="en-US" dirty="0"/>
-              <a:t>Question 3: Why is the lake shrinking? Think for a moment, then raise your hand to answer.</a:t>
+              <a:t>Question 3: Who lost their work? Think for a moment, then raise your hand to answer.</a:t>
             </a:r>
             <a:endParaRPr lang="en-US" dirty="0"/>
           </a:p>
@@ -1169,7 +1170,7 @@
           <a:p>
             <a:r>
               <a:rPr lang="en-US" dirty="0"/>
-              <a:t>Good. Less rain and too much water taken for farms.</a:t>
+              <a:t>Good. Fishermen and farmers.</a:t>
             </a:r>
             <a:endParaRPr lang="en-US" dirty="0"/>
           </a:p>
@@ -1609,7 +1610,7 @@
           <a:p>
             <a:r>
               <a:rPr lang="en-US" dirty="0"/>
-              <a:t>Here is the question for Activity 1: Which vegetation covers the Congo Basin? Which covers most of Africa? Take one minute to think and write your answer in your rough notebook.</a:t>
+              <a:t>Here is the question for Activity 1: Which vegetation covers most of Africa? Take one minute to think and write your answer in your rough notebook.</a:t>
             </a:r>
             <a:endParaRPr lang="en-US" dirty="0"/>
           </a:p>
@@ -1697,7 +1698,7 @@
           <a:p>
             <a:r>
               <a:rPr lang="en-US" dirty="0"/>
-              <a:t>Let us check the answer together. Rainforest in the Congo Basin; savanna in most of Africa.</a:t>
+              <a:t>Let us check the answer together. The savanna.</a:t>
             </a:r>
             <a:endParaRPr lang="en-US" dirty="0"/>
           </a:p>
@@ -1785,7 +1786,7 @@
           <a:p>
             <a:r>
               <a:rPr lang="en-US" dirty="0"/>
-              <a:t>Activity 2. Look carefully at this picture: the rainforest seen from the sky. Observe every detail before I ask the question.</a:t>
+              <a:t>Activity 2. Look carefully at this picture: a thick forest. Observe every detail before I ask the question.</a:t>
             </a:r>
             <a:endParaRPr lang="en-US" dirty="0"/>
           </a:p>
@@ -1873,7 +1874,7 @@
           <a:p>
             <a:r>
               <a:rPr lang="en-US" dirty="0"/>
-              <a:t>Here is the question for Activity 2: Why is the forest so thick here? Take one minute to think and write your answer in your rough notebook.</a:t>
+              <a:t>Here is the question for Activity 2: Why is the forest so thick near the Equator? Take one minute to think and write your answer in your rough notebook.</a:t>
             </a:r>
             <a:endParaRPr lang="en-US" dirty="0"/>
           </a:p>
@@ -1961,7 +1962,7 @@
           <a:p>
             <a:r>
               <a:rPr lang="en-US" dirty="0"/>
-              <a:t>Let us check the answer together. It is hot and wet all year near the Equator.</a:t>
+              <a:t>Let us check the answer together. It is hot and wet all year.</a:t>
             </a:r>
             <a:endParaRPr lang="en-US" dirty="0"/>
           </a:p>
@@ -2049,7 +2050,7 @@
           <a:p>
             <a:r>
               <a:rPr lang="en-US" dirty="0"/>
-              <a:t>Activity 3. Look carefully at this diagram: the main rivers and lakes of Africa. Observe every detail before I ask the question.</a:t>
+              <a:t>Activity 3. Look carefully at this diagram: the rivers and lakes of Africa. Observe every detail before I ask the question.</a:t>
             </a:r>
             <a:endParaRPr lang="en-US" dirty="0"/>
           </a:p>
@@ -2137,7 +2138,7 @@
           <a:p>
             <a:r>
               <a:rPr lang="en-US" dirty="0"/>
-              <a:t>Here is the question for Activity 3: Name four big rivers of Africa. Take one minute to think and write your answer in your rough notebook.</a:t>
+              <a:t>Here is the question for Activity 3: Name two big rivers of Africa. Take one minute to think and write your answer in your rough notebook.</a:t>
             </a:r>
             <a:endParaRPr lang="en-US" dirty="0"/>
           </a:p>
@@ -2225,7 +2226,7 @@
           <a:p>
             <a:r>
               <a:rPr lang="en-US" dirty="0"/>
-              <a:t>Let us check the answer together. The Nile, the Congo, the Niger and the Zambezi.</a:t>
+              <a:t>Let us check the answer together. The Nile and the Congo (also the Niger and the Zambezi).</a:t>
             </a:r>
             <a:endParaRPr lang="en-US" dirty="0"/>
           </a:p>
@@ -2313,7 +2314,7 @@
           <a:p>
             <a:r>
               <a:rPr lang="en-US" dirty="0"/>
-              <a:t>Activity 4. Look carefully at this picture: a big river of West Africa in the dry season. Observe every detail before I ask the question.</a:t>
+              <a:t>Activity 4. Look carefully at this picture: the Benue. Observe every detail before I ask the question.</a:t>
             </a:r>
             <a:endParaRPr lang="en-US" dirty="0"/>
           </a:p>
@@ -2401,7 +2402,7 @@
           <a:p>
             <a:r>
               <a:rPr lang="en-US" dirty="0"/>
-              <a:t>Here is the question for Activity 4: The Benue flows through Garoua. It joins which big river? Take one minute to think and write your answer in your rough notebook.</a:t>
+              <a:t>Here is the question for Activity 4: The Benue flows through Garoua. Which big river does it join? Take one minute to think and write your answer in your rough notebook.</a:t>
             </a:r>
             <a:endParaRPr lang="en-US" dirty="0"/>
           </a:p>
@@ -2577,7 +2578,7 @@
           <a:p>
             <a:r>
               <a:rPr lang="en-US" dirty="0"/>
-              <a:t>Let us check the answer together. The River Niger.</a:t>
+              <a:t>Let us check the answer together. The Niger.</a:t>
             </a:r>
             <a:endParaRPr lang="en-US" dirty="0"/>
           </a:p>
@@ -2665,7 +2666,7 @@
           <a:p>
             <a:r>
               <a:rPr lang="en-US" dirty="0"/>
-              <a:t>Activity 5. Look carefully at this picture: lake Chad from 1963 to 2007 (maps made from satellite images). Observe every detail before I ask the question.</a:t>
+              <a:t>Activity 5. Look carefully at this picture: lake Chad. Observe every detail before I ask the question.</a:t>
             </a:r>
             <a:endParaRPr lang="en-US" dirty="0"/>
           </a:p>
@@ -2753,7 +2754,7 @@
           <a:p>
             <a:r>
               <a:rPr lang="en-US" dirty="0"/>
-              <a:t>Here is the question for Activity 5: What has happened to Lake Chad? Take one minute to think and write your answer in your rough notebook.</a:t>
+              <a:t>Here is the question for Activity 5: Give one reason why Lake Chad is shrinking. Take one minute to think and write your answer in your rough notebook.</a:t>
             </a:r>
             <a:endParaRPr lang="en-US" dirty="0"/>
           </a:p>
@@ -2841,7 +2842,7 @@
           <a:p>
             <a:r>
               <a:rPr lang="en-US" dirty="0"/>
-              <a:t>Let us check the answer together. It has become much smaller.</a:t>
+              <a:t>Let us check the answer together. Less rain (drought) and too much water taken for irrigation.</a:t>
             </a:r>
             <a:endParaRPr lang="en-US" dirty="0"/>
           </a:p>
@@ -3017,7 +3018,7 @@
           <a:p>
             <a:r>
               <a:rPr lang="en-US" dirty="0"/>
-              <a:t>Let us copy the definitions. The key terms of this lesson are defined as follows. On this slide we have Vegetation and Drainage. Write each point on a new line, with the key term first, and explain it in your own words when we revise. When you finish, we go to the next slide.</a:t>
+              <a:t>Let us copy the definitions. The key terms of this lesson are defined as follows. On this slide we have Vegetation and Drainage. Write each point on a new line, with the key term first, and explain it in your own words when we revise.</a:t>
             </a:r>
             <a:endParaRPr lang="en-US" dirty="0"/>
           </a:p>
@@ -3105,7 +3106,7 @@
           <a:p>
             <a:r>
               <a:rPr lang="en-US" dirty="0"/>
-              <a:t>We continue with the definitions. On this slide we have Tributary. Write each point on a new line, with the key term first, and explain it in your own words when we revise.</a:t>
+              <a:t>Let us copy Vegetation. Africa has the following vegetation zones. Copy the point on Equatorial forest on the left, then draw the diagram on the right: the vegetation of Africa. Give it a title and label it clearly.</a:t>
             </a:r>
             <a:endParaRPr lang="en-US" dirty="0"/>
           </a:p>
@@ -3193,7 +3194,7 @@
           <a:p>
             <a:r>
               <a:rPr lang="en-US" dirty="0"/>
-              <a:t>Let us copy Vegetation. Africa has the following main types of vegetation. On this slide we have Rainforest and Savanna. Write each point on a new line, with the key term first, and explain it in your own words when we revise. When you finish, we go to the next slide.</a:t>
+              <a:t>We continue with Vegetation. On this slide we have Savanna, Desert vegetation and Mediterranean vegetation. Write each point on a new line, with the key term first, and explain it in your own words when we revise. When you finish, we go to the next slide.</a:t>
             </a:r>
             <a:endParaRPr lang="en-US" dirty="0"/>
           </a:p>
@@ -3281,7 +3282,7 @@
           <a:p>
             <a:r>
               <a:rPr lang="en-US" dirty="0"/>
-              <a:t>We continue with Vegetation. On this slide we have Semi-desert and desert and Mediterranean vegetation. Write each point on a new line, with the key term first, and explain it in your own words when we revise.</a:t>
+              <a:t>We continue with Vegetation. On this slide we have Mountain vegetation. Write each point on a new line, with the key term first, and explain it in your own words when we revise.</a:t>
             </a:r>
             <a:endParaRPr lang="en-US" dirty="0"/>
           </a:p>
@@ -3369,7 +3370,7 @@
           <a:p>
             <a:r>
               <a:rPr lang="en-US" dirty="0"/>
-              <a:t>Now draw this illustration in your notebook: vegetation of Africa. Give it a title and label it clearly.</a:t>
+              <a:t>Let us copy Drainage. Africa has the following main rivers and lakes. Copy the point on The Nile on the left, then draw the diagram on the right: the rivers and lakes of Africa. Give it a title and label it clearly.</a:t>
             </a:r>
             <a:endParaRPr lang="en-US" dirty="0"/>
           </a:p>
@@ -3545,7 +3546,7 @@
           <a:p>
             <a:r>
               <a:rPr lang="en-US" dirty="0"/>
-              <a:t>Let us copy Drainage. The main rivers and lakes of Africa are the following. On this slide we have The Nile and The Congo. Write each point on a new line, with the key term first, and explain it in your own words when we revise. When you finish, we go to the next slide.</a:t>
+              <a:t>We continue with Drainage. On this slide we have The Congo, The Niger and The Zambezi. Write each point on a new line, with the key term first, and explain it in your own words when we revise.</a:t>
             </a:r>
             <a:endParaRPr lang="en-US" dirty="0"/>
           </a:p>
@@ -3633,7 +3634,7 @@
           <a:p>
             <a:r>
               <a:rPr lang="en-US" dirty="0"/>
-              <a:t>We continue with Drainage. On this slide we have The Niger, Lakes and Uses. Write each point on a new line, with the key term first, and explain it in your own words when we revise.</a:t>
+              <a:t>Copy the point on Lakes on the left, then draw the diagram on the right: lake Chad. Give it a title and label it clearly.</a:t>
             </a:r>
             <a:endParaRPr lang="en-US" dirty="0"/>
           </a:p>
@@ -3721,7 +3722,7 @@
           <a:p>
             <a:r>
               <a:rPr lang="en-US" dirty="0"/>
-              <a:t>Now let us check what you have understood. Question 1: Which vegetation covers most of Africa? Answer in your exercise book.</a:t>
+              <a:t>We continue with Drainage. On this slide we have Importance. Write each point on a new line, with the key term first, and explain it in your own words when we revise.</a:t>
             </a:r>
             <a:endParaRPr lang="en-US" dirty="0"/>
           </a:p>
@@ -3809,7 +3810,7 @@
           <a:p>
             <a:r>
               <a:rPr lang="en-US" dirty="0"/>
-              <a:t>The expected answer is: the savanna. If you got it right, well done.</a:t>
+              <a:t>Now let us check what you have understood. Question 1: Which vegetation covers most of Africa? Answer in your exercise book.</a:t>
             </a:r>
             <a:endParaRPr lang="en-US" dirty="0"/>
           </a:p>
@@ -3897,7 +3898,7 @@
           <a:p>
             <a:r>
               <a:rPr lang="en-US" dirty="0"/>
-              <a:t>Now let us check what you have understood. Question 2: The Benue is a tributary of which river? Answer in your exercise book.</a:t>
+              <a:t>The expected answer is: the savanna. If you got it right, well done.</a:t>
             </a:r>
             <a:endParaRPr lang="en-US" dirty="0"/>
           </a:p>
@@ -3985,7 +3986,7 @@
           <a:p>
             <a:r>
               <a:rPr lang="en-US" dirty="0"/>
-              <a:t>The expected answer is: the Niger. If you got it right, well done.</a:t>
+              <a:t>Now let us check what you have understood. Question 2: The Benue is a tributary of which river? Answer in your exercise book.</a:t>
             </a:r>
             <a:endParaRPr lang="en-US" dirty="0"/>
           </a:p>
@@ -4073,7 +4074,7 @@
           <a:p>
             <a:r>
               <a:rPr lang="en-US" dirty="0"/>
-              <a:t>For those who need more practice, fill in the blanks in your exercise book. The answers are: number 1, Nile; number 2, tributary; number 3, Chad.</a:t>
+              <a:t>The expected answer is: the Niger. If you got it right, well done.</a:t>
             </a:r>
             <a:endParaRPr lang="en-US" dirty="0"/>
           </a:p>
@@ -4161,7 +4162,7 @@
           <a:p>
             <a:r>
               <a:rPr lang="en-US" dirty="0"/>
-              <a:t>For your homework: Revise Lesson 6 on Africa. Draw a simple map of Africa and mark the Equator, the Nile, the Congo, the Niger, Lake Victoria and Cameroon. We shall correct it at the beginning of our next lesson.</a:t>
+              <a:t>For those who need more practice, fill in the blanks in your exercise book. The answers are: number 1, Nile; number 2, tributary; number 3, Chad.</a:t>
             </a:r>
             <a:endParaRPr lang="en-US" dirty="0"/>
           </a:p>
@@ -4249,7 +4250,7 @@
           <a:p>
             <a:r>
               <a:rPr lang="en-US" dirty="0"/>
-              <a:t>Let us play the bilingual game. I say a word in English, and you give me the French word. Then we do the reverse.</a:t>
+              <a:t>For your homework: Revise Lesson 6 on Africa. Draw a simple map of Africa and mark the Equator, the Nile, the Congo, the Niger, Lake Victoria and Cameroon. We shall correct it at the beginning of our next lesson.</a:t>
             </a:r>
             <a:endParaRPr lang="en-US" dirty="0"/>
           </a:p>
@@ -4337,7 +4338,7 @@
           <a:p>
             <a:r>
               <a:rPr lang="en-US" dirty="0"/>
-              <a:t>I record this information in the official logbook of the class after the lesson.</a:t>
+              <a:t>Let us play the bilingual game. I say a word in English, and you give me the French word. Then we do the reverse.</a:t>
             </a:r>
             <a:endParaRPr lang="en-US" dirty="0"/>
           </a:p>
@@ -4513,7 +4514,7 @@
           <a:p>
             <a:r>
               <a:rPr lang="en-US" dirty="0"/>
-              <a:t>I complete the second page of the logbook: the matter taught, the evaluation, the homework and the attendance.</a:t>
+              <a:t>I record this information in the official logbook of the class after the lesson.</a:t>
             </a:r>
             <a:endParaRPr lang="en-US" dirty="0"/>
           </a:p>
@@ -4601,7 +4602,7 @@
           <a:p>
             <a:r>
               <a:rPr lang="en-US" dirty="0"/>
-              <a:t>This slide is for me, the teacher: it gives the timing of the lesson and what to do if the projector is not available.</a:t>
+              <a:t>I complete the second page of the logbook: the matter taught, the evaluation, the homework and the attendance.</a:t>
             </a:r>
             <a:endParaRPr lang="en-US" dirty="0"/>
           </a:p>
@@ -4689,7 +4690,7 @@
           <a:p>
             <a:r>
               <a:rPr lang="en-US" dirty="0"/>
-              <a:t>These are the references and picture credits used to prepare this lesson.</a:t>
+              <a:t>This slide is for me, the teacher: it gives the timing of the lesson and what to do if the projector is not available.</a:t>
             </a:r>
             <a:endParaRPr lang="en-US" dirty="0"/>
           </a:p>
@@ -4713,6 +4714,94 @@
             <a:fld id="{F7021451-1387-4CA6-816F-3879F97B5CBC}" type="slidenum">
               <a:rPr lang="en-US"/>
               <a:t>52</a:t>
+            </a:fld>
+            <a:endParaRPr lang="en-US"/>
+          </a:p>
+        </p:txBody>
+      </p:sp>
+    </p:spTree>
+    <p:extLst>
+      <p:ext uri="{BB962C8B-B14F-4D97-AF65-F5344CB8AC3E}">
+        <p14:creationId xmlns:p14="http://schemas.microsoft.com/office/powerpoint/2010/main" val="1024086991"/>
+      </p:ext>
+    </p:extLst>
+  </p:cSld>
+  <p:clrMapOvr>
+    <a:masterClrMapping/>
+  </p:clrMapOvr>
+</p:notes>
+</file>
+
+<file path=ppt/notesSlides/notesSlide53.xml><?xml version="1.0" encoding="utf-8"?>
+<p:notes xmlns:a="http://schemas.openxmlformats.org/drawingml/2006/main" xmlns:r="http://schemas.openxmlformats.org/officeDocument/2006/relationships" xmlns:p="http://schemas.openxmlformats.org/presentationml/2006/main">
+  <p:cSld>
+    <p:spTree>
+      <p:nvGrpSpPr>
+        <p:cNvPr id="1" name=""/>
+        <p:cNvGrpSpPr/>
+        <p:nvPr/>
+      </p:nvGrpSpPr>
+      <p:grpSpPr>
+        <a:xfrm>
+          <a:off x="0" y="0"/>
+          <a:ext cx="0" cy="0"/>
+          <a:chOff x="0" y="0"/>
+          <a:chExt cx="0" cy="0"/>
+        </a:xfrm>
+      </p:grpSpPr>
+      <p:sp>
+        <p:nvSpPr>
+          <p:cNvPr id="2" name="Slide Image Placeholder 1"/>
+          <p:cNvSpPr>
+            <a:spLocks noGrp="1" noRot="1" noChangeAspect="1"/>
+          </p:cNvSpPr>
+          <p:nvPr>
+            <p:ph type="sldImg"/>
+          </p:nvPr>
+        </p:nvSpPr>
+        <p:spPr/>
+      </p:sp>
+      <p:sp>
+        <p:nvSpPr>
+          <p:cNvPr id="3" name="Notes Placeholder 2"/>
+          <p:cNvSpPr>
+            <a:spLocks noGrp="1"/>
+          </p:cNvSpPr>
+          <p:nvPr>
+            <p:ph type="body" idx="1"/>
+          </p:nvPr>
+        </p:nvSpPr>
+        <p:spPr/>
+        <p:txBody>
+          <a:bodyPr/>
+          <a:lstStyle/>
+          <a:p>
+            <a:r>
+              <a:rPr lang="en-US" dirty="0"/>
+              <a:t>These are the references and picture credits used to prepare this lesson.</a:t>
+            </a:r>
+            <a:endParaRPr lang="en-US" dirty="0"/>
+          </a:p>
+        </p:txBody>
+      </p:sp>
+      <p:sp>
+        <p:nvSpPr>
+          <p:cNvPr id="4" name="Slide Number Placeholder 3"/>
+          <p:cNvSpPr>
+            <a:spLocks noGrp="1"/>
+          </p:cNvSpPr>
+          <p:nvPr>
+            <p:ph type="sldNum" sz="quarter" idx="10"/>
+          </p:nvPr>
+        </p:nvSpPr>
+        <p:spPr/>
+        <p:txBody>
+          <a:bodyPr/>
+          <a:lstStyle/>
+          <a:p>
+            <a:fld id="{F7021451-1387-4CA6-816F-3879F97B5CBC}" type="slidenum">
+              <a:rPr lang="en-US"/>
+              <a:t>53</a:t>
             </a:fld>
             <a:endParaRPr lang="en-US"/>
           </a:p>
@@ -6421,7 +6510,7 @@
         <p:spPr>
           <a:xfrm>
             <a:off x="0" y="658368"/>
-            <a:ext cx="5120640" cy="5833872"/>
+            <a:ext cx="2468880" cy="5833872"/>
           </a:xfrm>
           <a:prstGeom prst="rect">
             <a:avLst/>
@@ -6436,8 +6525,8 @@
         </p:nvSpPr>
         <p:spPr>
           <a:xfrm>
-            <a:off x="5349240" y="1005840"/>
-            <a:ext cx="6522415" cy="731520"/>
+            <a:off x="2697480" y="1005840"/>
+            <a:ext cx="9174175" cy="731520"/>
           </a:xfrm>
           <a:prstGeom prst="rect">
             <a:avLst/>
@@ -6477,8 +6566,8 @@
         </p:nvSpPr>
         <p:spPr>
           <a:xfrm>
-            <a:off x="5349240" y="1783080"/>
-            <a:ext cx="6522415" cy="4663440"/>
+            <a:off x="2697480" y="1783080"/>
+            <a:ext cx="9174175" cy="4663440"/>
           </a:xfrm>
           <a:prstGeom prst="rect">
             <a:avLst/>
@@ -6505,7 +6594,7 @@
                 <a:ea typeface="Times New Roman" pitchFamily="34" charset="-122"/>
                 <a:cs typeface="Times New Roman" pitchFamily="34" charset="-120"/>
               </a:rPr>
-              <a:t>Lake Chad, north of Cameroon, is much smaller today than sixty years ago. Many fishermen and farmers who lived near it have lost their work. Mariam wonders why the lake is shrinking.</a:t>
+              <a:t>Lake Chad, north of Cameroon, is much smaller today than sixty years ago, and many fishermen and farmers have lost their work. Mariam asks: "What are the vegetation, the rivers and the lakes of Africa, and why is Lake Chad shrinking?"</a:t>
             </a:r>
             <a:endParaRPr lang="en-US" sz="4000" dirty="0"/>
           </a:p>
@@ -6943,7 +7032,7 @@
                 <a:ea typeface="Times New Roman" pitchFamily="34" charset="-122"/>
                 <a:cs typeface="Times New Roman" pitchFamily="34" charset="-120"/>
               </a:rPr>
-              <a:t>Lake Chad is getting smaller.</a:t>
+              <a:t>Mariam does not know the vegetation and drainage of Africa and why Lake Chad is shrinking.</a:t>
             </a:r>
             <a:endParaRPr lang="en-US" sz="4000" dirty="0"/>
           </a:p>
@@ -7162,7 +7251,7 @@
                 <a:ea typeface="Times New Roman" pitchFamily="34" charset="-122"/>
                 <a:cs typeface="Times New Roman" pitchFamily="34" charset="-120"/>
               </a:rPr>
-              <a:t>Who suffers from this problem?</a:t>
+              <a:t>What happened to Lake Chad?</a:t>
             </a:r>
             <a:endParaRPr lang="en-US" sz="4000" dirty="0"/>
           </a:p>
@@ -7381,7 +7470,7 @@
                 <a:ea typeface="Times New Roman" pitchFamily="34" charset="-122"/>
                 <a:cs typeface="Times New Roman" pitchFamily="34" charset="-120"/>
               </a:rPr>
-              <a:t>Fishermen and farmers near the lake.</a:t>
+              <a:t>It has become much smaller.</a:t>
             </a:r>
             <a:endParaRPr lang="en-US" sz="4000" dirty="0"/>
           </a:p>
@@ -7600,7 +7689,7 @@
                 <a:ea typeface="Times New Roman" pitchFamily="34" charset="-122"/>
                 <a:cs typeface="Times New Roman" pitchFamily="34" charset="-120"/>
               </a:rPr>
-              <a:t>Why is the lake shrinking?</a:t>
+              <a:t>Who lost their work?</a:t>
             </a:r>
             <a:endParaRPr lang="en-US" sz="4000" dirty="0"/>
           </a:p>
@@ -7819,7 +7908,7 @@
                 <a:ea typeface="Times New Roman" pitchFamily="34" charset="-122"/>
                 <a:cs typeface="Times New Roman" pitchFamily="34" charset="-120"/>
               </a:rPr>
-              <a:t>Less rain and too much water taken for farms.</a:t>
+              <a:t>Fishermen and farmers.</a:t>
             </a:r>
             <a:endParaRPr lang="en-US" sz="4000" dirty="0"/>
           </a:p>
@@ -9285,7 +9374,7 @@
                 <a:ea typeface="Times New Roman" pitchFamily="34" charset="-122"/>
                 <a:cs typeface="Times New Roman" pitchFamily="34" charset="-120"/>
               </a:rPr>
-              <a:t>Which vegetation covers the Congo Basin? Which covers most of Africa?</a:t>
+              <a:t>Which vegetation covers most of Africa?</a:t>
             </a:r>
             <a:endParaRPr lang="en-US" sz="4000" dirty="0"/>
           </a:p>
@@ -9504,7 +9593,7 @@
                 <a:ea typeface="Times New Roman" pitchFamily="34" charset="-122"/>
                 <a:cs typeface="Times New Roman" pitchFamily="34" charset="-120"/>
               </a:rPr>
-              <a:t>Rainforest in the Congo Basin; savanna in most of Africa.</a:t>
+              <a:t>The savanna.</a:t>
             </a:r>
             <a:endParaRPr lang="en-US" sz="4000" dirty="0"/>
           </a:p>
@@ -9718,7 +9807,7 @@
                 <a:ea typeface="Times New Roman" pitchFamily="34" charset="-122"/>
                 <a:cs typeface="Times New Roman" pitchFamily="34" charset="-120"/>
               </a:rPr>
-              <a:t>The rainforest seen from the sky.</a:t>
+              <a:t>A thick forest.</a:t>
             </a:r>
             <a:endParaRPr lang="en-US" sz="1800" dirty="0"/>
           </a:p>
@@ -9937,7 +10026,7 @@
                 <a:ea typeface="Times New Roman" pitchFamily="34" charset="-122"/>
                 <a:cs typeface="Times New Roman" pitchFamily="34" charset="-120"/>
               </a:rPr>
-              <a:t>Why is the forest so thick here?</a:t>
+              <a:t>Why is the forest so thick near the Equator?</a:t>
             </a:r>
             <a:endParaRPr lang="en-US" sz="4000" dirty="0"/>
           </a:p>
@@ -10156,7 +10245,7 @@
                 <a:ea typeface="Times New Roman" pitchFamily="34" charset="-122"/>
                 <a:cs typeface="Times New Roman" pitchFamily="34" charset="-120"/>
               </a:rPr>
-              <a:t>It is hot and wet all year near the Equator.</a:t>
+              <a:t>It is hot and wet all year.</a:t>
             </a:r>
             <a:endParaRPr lang="en-US" sz="4000" dirty="0"/>
           </a:p>
@@ -10370,7 +10459,7 @@
                 <a:ea typeface="Times New Roman" pitchFamily="34" charset="-122"/>
                 <a:cs typeface="Times New Roman" pitchFamily="34" charset="-120"/>
               </a:rPr>
-              <a:t>The main rivers and lakes of Africa.</a:t>
+              <a:t>The rivers and lakes of Africa.</a:t>
             </a:r>
             <a:endParaRPr lang="en-US" sz="1800" dirty="0"/>
           </a:p>
@@ -10589,7 +10678,7 @@
                 <a:ea typeface="Times New Roman" pitchFamily="34" charset="-122"/>
                 <a:cs typeface="Times New Roman" pitchFamily="34" charset="-120"/>
               </a:rPr>
-              <a:t>Name four big rivers of Africa.</a:t>
+              <a:t>Name two big rivers of Africa.</a:t>
             </a:r>
             <a:endParaRPr lang="en-US" sz="4000" dirty="0"/>
           </a:p>
@@ -10808,7 +10897,7 @@
                 <a:ea typeface="Times New Roman" pitchFamily="34" charset="-122"/>
                 <a:cs typeface="Times New Roman" pitchFamily="34" charset="-120"/>
               </a:rPr>
-              <a:t>The Nile, the Congo, the Niger and the Zambezi.</a:t>
+              <a:t>The Nile and the Congo (also the Niger and the Zambezi).</a:t>
             </a:r>
             <a:endParaRPr lang="en-US" sz="4000" dirty="0"/>
           </a:p>
@@ -11022,7 +11111,7 @@
                 <a:ea typeface="Times New Roman" pitchFamily="34" charset="-122"/>
                 <a:cs typeface="Times New Roman" pitchFamily="34" charset="-120"/>
               </a:rPr>
-              <a:t>A big river of West Africa in the dry season.</a:t>
+              <a:t>The Benue.</a:t>
             </a:r>
             <a:endParaRPr lang="en-US" sz="1800" dirty="0"/>
           </a:p>
@@ -11241,7 +11330,7 @@
                 <a:ea typeface="Times New Roman" pitchFamily="34" charset="-122"/>
                 <a:cs typeface="Times New Roman" pitchFamily="34" charset="-120"/>
               </a:rPr>
-              <a:t>The Benue flows through Garoua. It joins which big river?</a:t>
+              <a:t>The Benue flows through Garoua. Which big river does it join?</a:t>
             </a:r>
             <a:endParaRPr lang="en-US" sz="4000" dirty="0"/>
           </a:p>
@@ -12469,7 +12558,7 @@
                 <a:ea typeface="Times New Roman" pitchFamily="34" charset="-122"/>
                 <a:cs typeface="Times New Roman" pitchFamily="34" charset="-120"/>
               </a:rPr>
-              <a:t>The River Niger.</a:t>
+              <a:t>The Niger.</a:t>
             </a:r>
             <a:endParaRPr lang="en-US" sz="4000" dirty="0"/>
           </a:p>
@@ -12683,7 +12772,7 @@
                 <a:ea typeface="Times New Roman" pitchFamily="34" charset="-122"/>
                 <a:cs typeface="Times New Roman" pitchFamily="34" charset="-120"/>
               </a:rPr>
-              <a:t>Lake Chad from 1963 to 2007 (maps made from satellite images).</a:t>
+              <a:t>Lake Chad.</a:t>
             </a:r>
             <a:endParaRPr lang="en-US" sz="1800" dirty="0"/>
           </a:p>
@@ -12902,7 +12991,7 @@
                 <a:ea typeface="Times New Roman" pitchFamily="34" charset="-122"/>
                 <a:cs typeface="Times New Roman" pitchFamily="34" charset="-120"/>
               </a:rPr>
-              <a:t>What has happened to Lake Chad?</a:t>
+              <a:t>Give one reason why Lake Chad is shrinking.</a:t>
             </a:r>
             <a:endParaRPr lang="en-US" sz="4000" dirty="0"/>
           </a:p>
@@ -13121,7 +13210,7 @@
                 <a:ea typeface="Times New Roman" pitchFamily="34" charset="-122"/>
                 <a:cs typeface="Times New Roman" pitchFamily="34" charset="-120"/>
               </a:rPr>
-              <a:t>It has become much smaller.</a:t>
+              <a:t>Less rain (drought) and too much water taken for irrigation.</a:t>
             </a:r>
             <a:endParaRPr lang="en-US" sz="4000" dirty="0"/>
           </a:p>
@@ -13604,11 +13693,12 @@
             <a:endParaRPr lang="en-US" sz="4000" dirty="0"/>
           </a:p>
           <a:p>
-            <a:pPr algn="l" indent="0" marL="0">
+            <a:pPr algn="l" marL="342900" indent="-342900">
               <a:spcAft>
                 <a:spcPts val="800"/>
               </a:spcAft>
-              <a:buNone/>
+              <a:buSzPct val="100000"/>
+              <a:buChar char="•"/>
             </a:pPr>
             <a:r>
               <a:rPr lang="en-US" sz="4000" b="1" dirty="0">
@@ -13621,11 +13711,12 @@
               </a:rPr>
               <a:t>Vegetation: </a:t>
             </a:r>
-            <a:pPr algn="l" indent="0" marL="0">
+            <a:pPr algn="l" marL="342900" indent="-342900">
               <a:spcAft>
                 <a:spcPts val="800"/>
               </a:spcAft>
-              <a:buNone/>
+              <a:buSzPct val="100000"/>
+              <a:buChar char="•"/>
             </a:pPr>
             <a:r>
               <a:rPr lang="en-US" sz="4000" dirty="0">
@@ -13636,16 +13727,17 @@
                 <a:ea typeface="Times New Roman" pitchFamily="34" charset="-122"/>
                 <a:cs typeface="Times New Roman" pitchFamily="34" charset="-120"/>
               </a:rPr>
-              <a:t>It is all the plants of a place.</a:t>
+              <a:t>It is the plants that grow naturally in an area.</a:t>
             </a:r>
             <a:endParaRPr lang="en-US" sz="4000" dirty="0"/>
           </a:p>
           <a:p>
-            <a:pPr algn="l" indent="0" marL="0">
+            <a:pPr algn="l" marL="342900" indent="-342900">
               <a:spcAft>
                 <a:spcPts val="800"/>
               </a:spcAft>
-              <a:buNone/>
+              <a:buSzPct val="100000"/>
+              <a:buChar char="•"/>
             </a:pPr>
             <a:r>
               <a:rPr lang="en-US" sz="4000" b="1" dirty="0">
@@ -13658,11 +13750,12 @@
               </a:rPr>
               <a:t>Drainage: </a:t>
             </a:r>
-            <a:pPr algn="l" indent="0" marL="0">
+            <a:pPr algn="l" marL="342900" indent="-342900">
               <a:spcAft>
                 <a:spcPts val="800"/>
               </a:spcAft>
-              <a:buNone/>
+              <a:buSzPct val="100000"/>
+              <a:buChar char="•"/>
             </a:pPr>
             <a:r>
               <a:rPr lang="en-US" sz="4000" dirty="0">
@@ -13673,7 +13766,7 @@
                 <a:ea typeface="Times New Roman" pitchFamily="34" charset="-122"/>
                 <a:cs typeface="Times New Roman" pitchFamily="34" charset="-120"/>
               </a:rPr>
-              <a:t>It is all the rivers and lakes of a place.</a:t>
+              <a:t>It is the rivers and lakes of an area.</a:t>
             </a:r>
             <a:endParaRPr lang="en-US" sz="4000" dirty="0"/>
           </a:p>
@@ -13791,9 +13884,131 @@
           </a:p>
         </p:txBody>
       </p:sp>
+      <p:sp>
+        <p:nvSpPr>
+          <p:cNvPr id="3" name="Text 1"/>
+          <p:cNvSpPr/>
+          <p:nvPr/>
+        </p:nvSpPr>
+        <p:spPr>
+          <a:xfrm>
+            <a:off x="365760" y="1005840"/>
+            <a:ext cx="11460175" cy="731520"/>
+          </a:xfrm>
+          <a:prstGeom prst="rect">
+            <a:avLst/>
+          </a:prstGeom>
+          <a:noFill/>
+          <a:ln/>
+        </p:spPr>
+        <p:txBody>
+          <a:bodyPr wrap="square" lIns="0" tIns="0" rIns="0" bIns="0" rtlCol="0" anchor="ctr">
+            <a:normAutofit/>
+          </a:bodyPr>
+          <a:lstStyle/>
+          <a:p>
+            <a:pPr algn="ctr" indent="0" marL="0">
+              <a:buNone/>
+            </a:pPr>
+            <a:r>
+              <a:rPr lang="en-US" sz="3600" b="1" dirty="0">
+                <a:solidFill>
+                  <a:srgbClr val="990011"/>
+                </a:solidFill>
+                <a:latin typeface="Times New Roman" pitchFamily="34" charset="0"/>
+                <a:ea typeface="Times New Roman" pitchFamily="34" charset="-122"/>
+                <a:cs typeface="Times New Roman" pitchFamily="34" charset="-120"/>
+              </a:rPr>
+              <a:t>1. Vegetation</a:t>
+            </a:r>
+            <a:endParaRPr lang="en-US" sz="3600" dirty="0"/>
+          </a:p>
+        </p:txBody>
+      </p:sp>
+      <p:sp>
+        <p:nvSpPr>
+          <p:cNvPr id="4" name="Text 2"/>
+          <p:cNvSpPr/>
+          <p:nvPr/>
+        </p:nvSpPr>
+        <p:spPr>
+          <a:xfrm>
+            <a:off x="365760" y="1783080"/>
+            <a:ext cx="4846320" cy="4617720"/>
+          </a:xfrm>
+          <a:prstGeom prst="rect">
+            <a:avLst/>
+          </a:prstGeom>
+          <a:noFill/>
+          <a:ln/>
+        </p:spPr>
+        <p:txBody>
+          <a:bodyPr wrap="square" lIns="0" tIns="0" rIns="0" bIns="0" rtlCol="0" anchor="t"/>
+          <a:lstStyle/>
+          <a:p>
+            <a:pPr algn="l" indent="0" marL="0">
+              <a:spcAft>
+                <a:spcPts val="800"/>
+              </a:spcAft>
+              <a:buNone/>
+            </a:pPr>
+            <a:r>
+              <a:rPr lang="en-US" sz="3600" i="1" dirty="0">
+                <a:solidFill>
+                  <a:srgbClr val="111111"/>
+                </a:solidFill>
+                <a:latin typeface="Times New Roman" pitchFamily="34" charset="0"/>
+                <a:ea typeface="Times New Roman" pitchFamily="34" charset="-122"/>
+                <a:cs typeface="Times New Roman" pitchFamily="34" charset="-120"/>
+              </a:rPr>
+              <a:t>Africa has the following vegetation zones:</a:t>
+            </a:r>
+            <a:endParaRPr lang="en-US" sz="3600" dirty="0"/>
+          </a:p>
+          <a:p>
+            <a:pPr algn="l" marL="342900" indent="-342900">
+              <a:spcAft>
+                <a:spcPts val="800"/>
+              </a:spcAft>
+              <a:buSzPct val="100000"/>
+              <a:buChar char="•"/>
+            </a:pPr>
+            <a:r>
+              <a:rPr lang="en-US" sz="3600" b="1" dirty="0">
+                <a:solidFill>
+                  <a:srgbClr val="111111"/>
+                </a:solidFill>
+                <a:latin typeface="Times New Roman" pitchFamily="34" charset="0"/>
+                <a:ea typeface="Times New Roman" pitchFamily="34" charset="-122"/>
+                <a:cs typeface="Times New Roman" pitchFamily="34" charset="-120"/>
+              </a:rPr>
+              <a:t>Equatorial forest: </a:t>
+            </a:r>
+            <a:pPr algn="l" marL="342900" indent="-342900">
+              <a:spcAft>
+                <a:spcPts val="800"/>
+              </a:spcAft>
+              <a:buSzPct val="100000"/>
+              <a:buChar char="•"/>
+            </a:pPr>
+            <a:r>
+              <a:rPr lang="en-US" sz="3600" dirty="0">
+                <a:solidFill>
+                  <a:srgbClr val="111111"/>
+                </a:solidFill>
+                <a:latin typeface="Times New Roman" pitchFamily="34" charset="0"/>
+                <a:ea typeface="Times New Roman" pitchFamily="34" charset="-122"/>
+                <a:cs typeface="Times New Roman" pitchFamily="34" charset="-120"/>
+              </a:rPr>
+              <a:t>Thick evergreen forest in the Congo Basin.</a:t>
+            </a:r>
+            <a:endParaRPr lang="en-US" sz="3600" dirty="0"/>
+          </a:p>
+        </p:txBody>
+      </p:sp>
       <p:pic>
         <p:nvPicPr>
-          <p:cNvPr id="3" name="Image 0" descr="/home/claude/f4/img/minesec_sheet.png">    </p:cNvPr>
+          <p:cNvPr id="5" name="Image 0" descr="/home/claude/f4/img/v2/africa_vegetation_big.png">    </p:cNvPr>
           <p:cNvPicPr>
             <a:picLocks noChangeAspect="1"/>
           </p:cNvPicPr>
@@ -13807,8 +14022,8 @@
         </p:blipFill>
         <p:spPr>
           <a:xfrm>
-            <a:off x="0" y="658368"/>
-            <a:ext cx="5120640" cy="5833872"/>
+            <a:off x="5349240" y="2045198"/>
+            <a:ext cx="6659575" cy="3746011"/>
           </a:xfrm>
           <a:prstGeom prst="rect">
             <a:avLst/>
@@ -13817,14 +14032,14 @@
       </p:pic>
       <p:sp>
         <p:nvSpPr>
-          <p:cNvPr id="4" name="Text 1"/>
+          <p:cNvPr id="6" name="Text 3"/>
           <p:cNvSpPr/>
           <p:nvPr/>
         </p:nvSpPr>
         <p:spPr>
           <a:xfrm>
-            <a:off x="5349240" y="1005840"/>
-            <a:ext cx="6522415" cy="731520"/>
+            <a:off x="5349240" y="6089904"/>
+            <a:ext cx="6659575" cy="347472"/>
           </a:xfrm>
           <a:prstGeom prst="rect">
             <a:avLst/>
@@ -13833,85 +14048,24 @@
           <a:ln/>
         </p:spPr>
         <p:txBody>
-          <a:bodyPr wrap="square" lIns="0" tIns="0" rIns="0" bIns="0" rtlCol="0" anchor="ctr">
-            <a:normAutofit/>
-          </a:bodyPr>
+          <a:bodyPr wrap="square" lIns="0" tIns="0" rIns="0" bIns="0" rtlCol="0" anchor="ctr"/>
           <a:lstStyle/>
           <a:p>
             <a:pPr algn="ctr" indent="0" marL="0">
               <a:buNone/>
             </a:pPr>
             <a:r>
-              <a:rPr lang="en-US" sz="3600" b="1" dirty="0">
-                <a:solidFill>
-                  <a:srgbClr val="990011"/>
+              <a:rPr lang="en-US" sz="1600" i="1" dirty="0">
+                <a:solidFill>
+                  <a:srgbClr val="555555"/>
                 </a:solidFill>
                 <a:latin typeface="Times New Roman" pitchFamily="34" charset="0"/>
                 <a:ea typeface="Times New Roman" pitchFamily="34" charset="-122"/>
                 <a:cs typeface="Times New Roman" pitchFamily="34" charset="-120"/>
               </a:rPr>
-              <a:t>DEFINITIONS (continued)</a:t>
-            </a:r>
-            <a:endParaRPr lang="en-US" sz="3600" dirty="0"/>
-          </a:p>
-        </p:txBody>
-      </p:sp>
-      <p:sp>
-        <p:nvSpPr>
-          <p:cNvPr id="5" name="Text 2"/>
-          <p:cNvSpPr/>
-          <p:nvPr/>
-        </p:nvSpPr>
-        <p:spPr>
-          <a:xfrm>
-            <a:off x="5349240" y="1783080"/>
-            <a:ext cx="6522415" cy="4663440"/>
-          </a:xfrm>
-          <a:prstGeom prst="rect">
-            <a:avLst/>
-          </a:prstGeom>
-          <a:noFill/>
-          <a:ln/>
-        </p:spPr>
-        <p:txBody>
-          <a:bodyPr wrap="square" lIns="0" tIns="0" rIns="0" bIns="0" rtlCol="0" anchor="t"/>
-          <a:lstStyle/>
-          <a:p>
-            <a:pPr algn="l" indent="0" marL="0">
-              <a:spcAft>
-                <a:spcPts val="800"/>
-              </a:spcAft>
-              <a:buNone/>
-            </a:pPr>
-            <a:r>
-              <a:rPr lang="en-US" sz="4000" b="1" dirty="0">
-                <a:solidFill>
-                  <a:srgbClr val="111111"/>
-                </a:solidFill>
-                <a:latin typeface="Times New Roman" pitchFamily="34" charset="0"/>
-                <a:ea typeface="Times New Roman" pitchFamily="34" charset="-122"/>
-                <a:cs typeface="Times New Roman" pitchFamily="34" charset="-120"/>
-              </a:rPr>
-              <a:t>Tributary: </a:t>
-            </a:r>
-            <a:pPr algn="l" indent="0" marL="0">
-              <a:spcAft>
-                <a:spcPts val="800"/>
-              </a:spcAft>
-              <a:buNone/>
-            </a:pPr>
-            <a:r>
-              <a:rPr lang="en-US" sz="4000" dirty="0">
-                <a:solidFill>
-                  <a:srgbClr val="111111"/>
-                </a:solidFill>
-                <a:latin typeface="Times New Roman" pitchFamily="34" charset="0"/>
-                <a:ea typeface="Times New Roman" pitchFamily="34" charset="-122"/>
-                <a:cs typeface="Times New Roman" pitchFamily="34" charset="-120"/>
-              </a:rPr>
-              <a:t>It is a river that joins a bigger river.</a:t>
-            </a:r>
-            <a:endParaRPr lang="en-US" sz="4000" dirty="0"/>
+              <a:t>Illustration: the vegetation of Africa</a:t>
+            </a:r>
+            <a:endParaRPr lang="en-US" sz="1600" dirty="0"/>
           </a:p>
         </p:txBody>
       </p:sp>
@@ -14044,7 +14198,7 @@
         <p:spPr>
           <a:xfrm>
             <a:off x="0" y="658368"/>
-            <a:ext cx="3840480" cy="5833872"/>
+            <a:ext cx="2468880" cy="5833872"/>
           </a:xfrm>
           <a:prstGeom prst="rect">
             <a:avLst/>
@@ -14059,8 +14213,8 @@
         </p:nvSpPr>
         <p:spPr>
           <a:xfrm>
-            <a:off x="4069080" y="1005840"/>
-            <a:ext cx="7802575" cy="731520"/>
+            <a:off x="2697480" y="1005840"/>
+            <a:ext cx="9174175" cy="731520"/>
           </a:xfrm>
           <a:prstGeom prst="rect">
             <a:avLst/>
@@ -14100,8 +14254,8 @@
         </p:nvSpPr>
         <p:spPr>
           <a:xfrm>
-            <a:off x="4069080" y="1783080"/>
-            <a:ext cx="7802575" cy="4663440"/>
+            <a:off x="2697480" y="1783080"/>
+            <a:ext cx="9174175" cy="4663440"/>
           </a:xfrm>
           <a:prstGeom prst="rect">
             <a:avLst/>
@@ -14113,68 +14267,12 @@
           <a:bodyPr wrap="square" lIns="0" tIns="0" rIns="0" bIns="0" rtlCol="0" anchor="t"/>
           <a:lstStyle/>
           <a:p>
-            <a:pPr algn="l" indent="0" marL="0">
+            <a:pPr algn="l" marL="342900" indent="-342900">
               <a:spcAft>
                 <a:spcPts val="800"/>
               </a:spcAft>
-              <a:buNone/>
-            </a:pPr>
-            <a:r>
-              <a:rPr lang="en-US" sz="4000" i="1" dirty="0">
-                <a:solidFill>
-                  <a:srgbClr val="111111"/>
-                </a:solidFill>
-                <a:latin typeface="Times New Roman" pitchFamily="34" charset="0"/>
-                <a:ea typeface="Times New Roman" pitchFamily="34" charset="-122"/>
-                <a:cs typeface="Times New Roman" pitchFamily="34" charset="-120"/>
-              </a:rPr>
-              <a:t>Africa has the following main types of vegetation:</a:t>
-            </a:r>
-            <a:endParaRPr lang="en-US" sz="4000" dirty="0"/>
-          </a:p>
-          <a:p>
-            <a:pPr algn="l" indent="0" marL="0">
-              <a:spcAft>
-                <a:spcPts val="800"/>
-              </a:spcAft>
-              <a:buNone/>
-            </a:pPr>
-            <a:r>
-              <a:rPr lang="en-US" sz="4000" b="1" dirty="0">
-                <a:solidFill>
-                  <a:srgbClr val="111111"/>
-                </a:solidFill>
-                <a:latin typeface="Times New Roman" pitchFamily="34" charset="0"/>
-                <a:ea typeface="Times New Roman" pitchFamily="34" charset="-122"/>
-                <a:cs typeface="Times New Roman" pitchFamily="34" charset="-120"/>
-              </a:rPr>
-              <a:t>Rainforest: </a:t>
-            </a:r>
-            <a:pPr algn="l" indent="0" marL="0">
-              <a:spcAft>
-                <a:spcPts val="800"/>
-              </a:spcAft>
-              <a:buNone/>
-            </a:pPr>
-            <a:r>
-              <a:rPr lang="en-US" sz="4000" dirty="0">
-                <a:solidFill>
-                  <a:srgbClr val="111111"/>
-                </a:solidFill>
-                <a:latin typeface="Times New Roman" pitchFamily="34" charset="0"/>
-                <a:ea typeface="Times New Roman" pitchFamily="34" charset="-122"/>
-                <a:cs typeface="Times New Roman" pitchFamily="34" charset="-120"/>
-              </a:rPr>
-              <a:t>Dense forest covers the Congo Basin and southern Cameroon.</a:t>
-            </a:r>
-            <a:endParaRPr lang="en-US" sz="4000" dirty="0"/>
-          </a:p>
-          <a:p>
-            <a:pPr algn="l" indent="0" marL="0">
-              <a:spcAft>
-                <a:spcPts val="800"/>
-              </a:spcAft>
-              <a:buNone/>
+              <a:buSzPct val="100000"/>
+              <a:buChar char="•"/>
             </a:pPr>
             <a:r>
               <a:rPr lang="en-US" sz="4000" b="1" dirty="0">
@@ -14187,11 +14285,12 @@
               </a:rPr>
               <a:t>Savanna: </a:t>
             </a:r>
-            <a:pPr algn="l" indent="0" marL="0">
+            <a:pPr algn="l" marL="342900" indent="-342900">
               <a:spcAft>
                 <a:spcPts val="800"/>
               </a:spcAft>
-              <a:buNone/>
+              <a:buSzPct val="100000"/>
+              <a:buChar char="•"/>
             </a:pPr>
             <a:r>
               <a:rPr lang="en-US" sz="4000" dirty="0">
@@ -14202,7 +14301,85 @@
                 <a:ea typeface="Times New Roman" pitchFamily="34" charset="-122"/>
                 <a:cs typeface="Times New Roman" pitchFamily="34" charset="-120"/>
               </a:rPr>
-              <a:t>Grass with scattered trees covers most of Africa.</a:t>
+              <a:t>Grass and scattered trees, covering most of Africa.</a:t>
+            </a:r>
+            <a:endParaRPr lang="en-US" sz="4000" dirty="0"/>
+          </a:p>
+          <a:p>
+            <a:pPr algn="l" marL="342900" indent="-342900">
+              <a:spcAft>
+                <a:spcPts val="800"/>
+              </a:spcAft>
+              <a:buSzPct val="100000"/>
+              <a:buChar char="•"/>
+            </a:pPr>
+            <a:r>
+              <a:rPr lang="en-US" sz="4000" b="1" dirty="0">
+                <a:solidFill>
+                  <a:srgbClr val="111111"/>
+                </a:solidFill>
+                <a:latin typeface="Times New Roman" pitchFamily="34" charset="0"/>
+                <a:ea typeface="Times New Roman" pitchFamily="34" charset="-122"/>
+                <a:cs typeface="Times New Roman" pitchFamily="34" charset="-120"/>
+              </a:rPr>
+              <a:t>Desert vegetation: </a:t>
+            </a:r>
+            <a:pPr algn="l" marL="342900" indent="-342900">
+              <a:spcAft>
+                <a:spcPts val="800"/>
+              </a:spcAft>
+              <a:buSzPct val="100000"/>
+              <a:buChar char="•"/>
+            </a:pPr>
+            <a:r>
+              <a:rPr lang="en-US" sz="4000" dirty="0">
+                <a:solidFill>
+                  <a:srgbClr val="111111"/>
+                </a:solidFill>
+                <a:latin typeface="Times New Roman" pitchFamily="34" charset="0"/>
+                <a:ea typeface="Times New Roman" pitchFamily="34" charset="-122"/>
+                <a:cs typeface="Times New Roman" pitchFamily="34" charset="-120"/>
+              </a:rPr>
+              <a:t>Few scattered plants in the Sahara and the Kalahari.</a:t>
+            </a:r>
+            <a:endParaRPr lang="en-US" sz="4000" dirty="0"/>
+          </a:p>
+          <a:p>
+            <a:pPr algn="l" marL="342900" indent="-342900">
+              <a:spcAft>
+                <a:spcPts val="800"/>
+              </a:spcAft>
+              <a:buSzPct val="100000"/>
+              <a:buChar char="•"/>
+            </a:pPr>
+            <a:r>
+              <a:rPr lang="en-US" sz="4000" b="1" dirty="0">
+                <a:solidFill>
+                  <a:srgbClr val="111111"/>
+                </a:solidFill>
+                <a:latin typeface="Times New Roman" pitchFamily="34" charset="0"/>
+                <a:ea typeface="Times New Roman" pitchFamily="34" charset="-122"/>
+                <a:cs typeface="Times New Roman" pitchFamily="34" charset="-120"/>
+              </a:rPr>
+              <a:t>Mediterranean vegetation: </a:t>
+            </a:r>
+            <a:pPr algn="l" marL="342900" indent="-342900">
+              <a:spcAft>
+                <a:spcPts val="800"/>
+              </a:spcAft>
+              <a:buSzPct val="100000"/>
+              <a:buChar char="•"/>
+            </a:pPr>
+            <a:r>
+              <a:rPr lang="en-US" sz="4000" dirty="0">
+                <a:solidFill>
+                  <a:srgbClr val="111111"/>
+                </a:solidFill>
+                <a:latin typeface="Times New Roman" pitchFamily="34" charset="0"/>
+                <a:ea typeface="Times New Roman" pitchFamily="34" charset="-122"/>
+                <a:cs typeface="Times New Roman" pitchFamily="34" charset="-120"/>
+              </a:rPr>
+              <a:t>Olive trees and shrubs at the north and south tips.</a:t>
             </a:r>
             <a:endParaRPr lang="en-US" sz="4000" dirty="0"/>
           </a:p>
@@ -14337,7 +14514,7 @@
         <p:spPr>
           <a:xfrm>
             <a:off x="0" y="658368"/>
-            <a:ext cx="3840480" cy="5833872"/>
+            <a:ext cx="5120640" cy="5833872"/>
           </a:xfrm>
           <a:prstGeom prst="rect">
             <a:avLst/>
@@ -14352,8 +14529,8 @@
         </p:nvSpPr>
         <p:spPr>
           <a:xfrm>
-            <a:off x="4069080" y="1005840"/>
-            <a:ext cx="7802575" cy="731520"/>
+            <a:off x="5349240" y="1005840"/>
+            <a:ext cx="6522415" cy="731520"/>
           </a:xfrm>
           <a:prstGeom prst="rect">
             <a:avLst/>
@@ -14393,8 +14570,8 @@
         </p:nvSpPr>
         <p:spPr>
           <a:xfrm>
-            <a:off x="4069080" y="1783080"/>
-            <a:ext cx="7802575" cy="4663440"/>
+            <a:off x="5349240" y="1783080"/>
+            <a:ext cx="6522415" cy="4663440"/>
           </a:xfrm>
           <a:prstGeom prst="rect">
             <a:avLst/>
@@ -14406,11 +14583,12 @@
           <a:bodyPr wrap="square" lIns="0" tIns="0" rIns="0" bIns="0" rtlCol="0" anchor="t"/>
           <a:lstStyle/>
           <a:p>
-            <a:pPr algn="l" indent="0" marL="0">
+            <a:pPr algn="l" marL="342900" indent="-342900">
               <a:spcAft>
                 <a:spcPts val="800"/>
               </a:spcAft>
-              <a:buNone/>
+              <a:buSzPct val="100000"/>
+              <a:buChar char="•"/>
             </a:pPr>
             <a:r>
               <a:rPr lang="en-US" sz="4000" b="1" dirty="0">
@@ -14421,13 +14599,14 @@
                 <a:ea typeface="Times New Roman" pitchFamily="34" charset="-122"/>
                 <a:cs typeface="Times New Roman" pitchFamily="34" charset="-120"/>
               </a:rPr>
-              <a:t>Semi-desert and desert: </a:t>
-            </a:r>
-            <a:pPr algn="l" indent="0" marL="0">
+              <a:t>Mountain vegetation: </a:t>
+            </a:r>
+            <a:pPr algn="l" marL="342900" indent="-342900">
               <a:spcAft>
                 <a:spcPts val="800"/>
               </a:spcAft>
-              <a:buNone/>
+              <a:buSzPct val="100000"/>
+              <a:buChar char="•"/>
             </a:pPr>
             <a:r>
               <a:rPr lang="en-US" sz="4000" dirty="0">
@@ -14438,44 +14617,7 @@
                 <a:ea typeface="Times New Roman" pitchFamily="34" charset="-122"/>
                 <a:cs typeface="Times New Roman" pitchFamily="34" charset="-120"/>
               </a:rPr>
-              <a:t>Thorny bushes grow in semi-deserts, while deserts have almost no plants.</a:t>
-            </a:r>
-            <a:endParaRPr lang="en-US" sz="4000" dirty="0"/>
-          </a:p>
-          <a:p>
-            <a:pPr algn="l" indent="0" marL="0">
-              <a:spcAft>
-                <a:spcPts val="800"/>
-              </a:spcAft>
-              <a:buNone/>
-            </a:pPr>
-            <a:r>
-              <a:rPr lang="en-US" sz="4000" b="1" dirty="0">
-                <a:solidFill>
-                  <a:srgbClr val="111111"/>
-                </a:solidFill>
-                <a:latin typeface="Times New Roman" pitchFamily="34" charset="0"/>
-                <a:ea typeface="Times New Roman" pitchFamily="34" charset="-122"/>
-                <a:cs typeface="Times New Roman" pitchFamily="34" charset="-120"/>
-              </a:rPr>
-              <a:t>Mediterranean vegetation: </a:t>
-            </a:r>
-            <a:pPr algn="l" indent="0" marL="0">
-              <a:spcAft>
-                <a:spcPts val="800"/>
-              </a:spcAft>
-              <a:buNone/>
-            </a:pPr>
-            <a:r>
-              <a:rPr lang="en-US" sz="4000" dirty="0">
-                <a:solidFill>
-                  <a:srgbClr val="111111"/>
-                </a:solidFill>
-                <a:latin typeface="Times New Roman" pitchFamily="34" charset="0"/>
-                <a:ea typeface="Times New Roman" pitchFamily="34" charset="-122"/>
-                <a:cs typeface="Times New Roman" pitchFamily="34" charset="-120"/>
-              </a:rPr>
-              <a:t>Evergreen bushes grow in the far north and far south of Africa.</a:t>
+              <a:t>Forests and grass on high mountains.</a:t>
             </a:r>
             <a:endParaRPr lang="en-US" sz="4000" dirty="0"/>
           </a:p>
@@ -14601,8 +14743,8 @@
         </p:nvSpPr>
         <p:spPr>
           <a:xfrm>
-            <a:off x="457200" y="1005840"/>
-            <a:ext cx="11277295" cy="731520"/>
+            <a:off x="365760" y="1005840"/>
+            <a:ext cx="11460175" cy="731520"/>
           </a:xfrm>
           <a:prstGeom prst="rect">
             <a:avLst/>
@@ -14611,7 +14753,9 @@
           <a:ln/>
         </p:spPr>
         <p:txBody>
-          <a:bodyPr wrap="square" lIns="0" tIns="0" rIns="0" bIns="0" rtlCol="0" anchor="ctr"/>
+          <a:bodyPr wrap="square" lIns="0" tIns="0" rIns="0" bIns="0" rtlCol="0" anchor="ctr">
+            <a:normAutofit/>
+          </a:bodyPr>
           <a:lstStyle/>
           <a:p>
             <a:pPr algn="ctr" indent="0" marL="0">
@@ -14626,7 +14770,88 @@
                 <a:ea typeface="Times New Roman" pitchFamily="34" charset="-122"/>
                 <a:cs typeface="Times New Roman" pitchFamily="34" charset="-120"/>
               </a:rPr>
-              <a:t>1. Vegetation</a:t>
+              <a:t>2. Drainage</a:t>
+            </a:r>
+            <a:endParaRPr lang="en-US" sz="3600" dirty="0"/>
+          </a:p>
+        </p:txBody>
+      </p:sp>
+      <p:sp>
+        <p:nvSpPr>
+          <p:cNvPr id="4" name="Text 2"/>
+          <p:cNvSpPr/>
+          <p:nvPr/>
+        </p:nvSpPr>
+        <p:spPr>
+          <a:xfrm>
+            <a:off x="365760" y="1783080"/>
+            <a:ext cx="4846320" cy="4617720"/>
+          </a:xfrm>
+          <a:prstGeom prst="rect">
+            <a:avLst/>
+          </a:prstGeom>
+          <a:noFill/>
+          <a:ln/>
+        </p:spPr>
+        <p:txBody>
+          <a:bodyPr wrap="square" lIns="0" tIns="0" rIns="0" bIns="0" rtlCol="0" anchor="t"/>
+          <a:lstStyle/>
+          <a:p>
+            <a:pPr algn="l" indent="0" marL="0">
+              <a:spcAft>
+                <a:spcPts val="800"/>
+              </a:spcAft>
+              <a:buNone/>
+            </a:pPr>
+            <a:r>
+              <a:rPr lang="en-US" sz="3600" i="1" dirty="0">
+                <a:solidFill>
+                  <a:srgbClr val="111111"/>
+                </a:solidFill>
+                <a:latin typeface="Times New Roman" pitchFamily="34" charset="0"/>
+                <a:ea typeface="Times New Roman" pitchFamily="34" charset="-122"/>
+                <a:cs typeface="Times New Roman" pitchFamily="34" charset="-120"/>
+              </a:rPr>
+              <a:t>Africa has the following main rivers and lakes:</a:t>
+            </a:r>
+            <a:endParaRPr lang="en-US" sz="3600" dirty="0"/>
+          </a:p>
+          <a:p>
+            <a:pPr algn="l" marL="342900" indent="-342900">
+              <a:spcAft>
+                <a:spcPts val="800"/>
+              </a:spcAft>
+              <a:buSzPct val="100000"/>
+              <a:buChar char="•"/>
+            </a:pPr>
+            <a:r>
+              <a:rPr lang="en-US" sz="3600" b="1" dirty="0">
+                <a:solidFill>
+                  <a:srgbClr val="111111"/>
+                </a:solidFill>
+                <a:latin typeface="Times New Roman" pitchFamily="34" charset="0"/>
+                <a:ea typeface="Times New Roman" pitchFamily="34" charset="-122"/>
+                <a:cs typeface="Times New Roman" pitchFamily="34" charset="-120"/>
+              </a:rPr>
+              <a:t>The Nile: </a:t>
+            </a:r>
+            <a:pPr algn="l" marL="342900" indent="-342900">
+              <a:spcAft>
+                <a:spcPts val="800"/>
+              </a:spcAft>
+              <a:buSzPct val="100000"/>
+              <a:buChar char="•"/>
+            </a:pPr>
+            <a:r>
+              <a:rPr lang="en-US" sz="3600" dirty="0">
+                <a:solidFill>
+                  <a:srgbClr val="111111"/>
+                </a:solidFill>
+                <a:latin typeface="Times New Roman" pitchFamily="34" charset="0"/>
+                <a:ea typeface="Times New Roman" pitchFamily="34" charset="-122"/>
+                <a:cs typeface="Times New Roman" pitchFamily="34" charset="-120"/>
+              </a:rPr>
+              <a:t>The longest river, flowing into the Mediterranean Sea.</a:t>
             </a:r>
             <a:endParaRPr lang="en-US" sz="3600" dirty="0"/>
           </a:p>
@@ -14634,7 +14859,7 @@
       </p:sp>
       <p:pic>
         <p:nvPicPr>
-          <p:cNvPr id="4" name="Image 0" descr="/home/claude/f4/img/v2/africa_vegetation_big.png">    </p:cNvPr>
+          <p:cNvPr id="5" name="Image 0" descr="/home/claude/f4/img/v2/africa_drainage_big.png">    </p:cNvPr>
           <p:cNvPicPr>
             <a:picLocks noChangeAspect="1"/>
           </p:cNvPicPr>
@@ -14648,8 +14873,8 @@
         </p:blipFill>
         <p:spPr>
           <a:xfrm>
-            <a:off x="2300072" y="1783080"/>
-            <a:ext cx="7591552" cy="4270248"/>
+            <a:off x="5349240" y="2045198"/>
+            <a:ext cx="6659575" cy="3746011"/>
           </a:xfrm>
           <a:prstGeom prst="rect">
             <a:avLst/>
@@ -14658,14 +14883,14 @@
       </p:pic>
       <p:sp>
         <p:nvSpPr>
-          <p:cNvPr id="5" name="Text 2"/>
+          <p:cNvPr id="6" name="Text 3"/>
           <p:cNvSpPr/>
           <p:nvPr/>
         </p:nvSpPr>
         <p:spPr>
           <a:xfrm>
-            <a:off x="457200" y="6089904"/>
-            <a:ext cx="11277295" cy="347472"/>
+            <a:off x="5349240" y="6089904"/>
+            <a:ext cx="6659575" cy="347472"/>
           </a:xfrm>
           <a:prstGeom prst="rect">
             <a:avLst/>
@@ -14681,7 +14906,7 @@
               <a:buNone/>
             </a:pPr>
             <a:r>
-              <a:rPr lang="en-US" sz="1800" i="1" dirty="0">
+              <a:rPr lang="en-US" sz="1600" i="1" dirty="0">
                 <a:solidFill>
                   <a:srgbClr val="555555"/>
                 </a:solidFill>
@@ -14689,9 +14914,9 @@
                 <a:ea typeface="Times New Roman" pitchFamily="34" charset="-122"/>
                 <a:cs typeface="Times New Roman" pitchFamily="34" charset="-120"/>
               </a:rPr>
-              <a:t>Illustration: vegetation of Africa</a:t>
-            </a:r>
-            <a:endParaRPr lang="en-US" sz="1800" dirty="0"/>
+              <a:t>Illustration: the rivers and lakes of Africa</a:t>
+            </a:r>
+            <a:endParaRPr lang="en-US" sz="1600" dirty="0"/>
           </a:p>
         </p:txBody>
       </p:sp>
@@ -15132,68 +15357,12 @@
           <a:bodyPr wrap="square" lIns="0" tIns="0" rIns="0" bIns="0" rtlCol="0" anchor="t"/>
           <a:lstStyle/>
           <a:p>
-            <a:pPr algn="l" indent="0" marL="0">
+            <a:pPr algn="l" marL="342900" indent="-342900">
               <a:spcAft>
                 <a:spcPts val="800"/>
               </a:spcAft>
-              <a:buNone/>
-            </a:pPr>
-            <a:r>
-              <a:rPr lang="en-US" sz="4000" i="1" dirty="0">
-                <a:solidFill>
-                  <a:srgbClr val="111111"/>
-                </a:solidFill>
-                <a:latin typeface="Times New Roman" pitchFamily="34" charset="0"/>
-                <a:ea typeface="Times New Roman" pitchFamily="34" charset="-122"/>
-                <a:cs typeface="Times New Roman" pitchFamily="34" charset="-120"/>
-              </a:rPr>
-              <a:t>The main rivers and lakes of Africa are the following:</a:t>
-            </a:r>
-            <a:endParaRPr lang="en-US" sz="4000" dirty="0"/>
-          </a:p>
-          <a:p>
-            <a:pPr algn="l" indent="0" marL="0">
-              <a:spcAft>
-                <a:spcPts val="800"/>
-              </a:spcAft>
-              <a:buNone/>
-            </a:pPr>
-            <a:r>
-              <a:rPr lang="en-US" sz="4000" b="1" dirty="0">
-                <a:solidFill>
-                  <a:srgbClr val="111111"/>
-                </a:solidFill>
-                <a:latin typeface="Times New Roman" pitchFamily="34" charset="0"/>
-                <a:ea typeface="Times New Roman" pitchFamily="34" charset="-122"/>
-                <a:cs typeface="Times New Roman" pitchFamily="34" charset="-120"/>
-              </a:rPr>
-              <a:t>The Nile: </a:t>
-            </a:r>
-            <a:pPr algn="l" indent="0" marL="0">
-              <a:spcAft>
-                <a:spcPts val="800"/>
-              </a:spcAft>
-              <a:buNone/>
-            </a:pPr>
-            <a:r>
-              <a:rPr lang="en-US" sz="4000" dirty="0">
-                <a:solidFill>
-                  <a:srgbClr val="111111"/>
-                </a:solidFill>
-                <a:latin typeface="Times New Roman" pitchFamily="34" charset="0"/>
-                <a:ea typeface="Times New Roman" pitchFamily="34" charset="-122"/>
-                <a:cs typeface="Times New Roman" pitchFamily="34" charset="-120"/>
-              </a:rPr>
-              <a:t>It is the longest river in Africa and it flows into the Mediterranean Sea.</a:t>
-            </a:r>
-            <a:endParaRPr lang="en-US" sz="4000" dirty="0"/>
-          </a:p>
-          <a:p>
-            <a:pPr algn="l" indent="0" marL="0">
-              <a:spcAft>
-                <a:spcPts val="800"/>
-              </a:spcAft>
-              <a:buNone/>
+              <a:buSzPct val="100000"/>
+              <a:buChar char="•"/>
             </a:pPr>
             <a:r>
               <a:rPr lang="en-US" sz="4000" b="1" dirty="0">
@@ -15206,11 +15375,12 @@
               </a:rPr>
               <a:t>The Congo: </a:t>
             </a:r>
-            <a:pPr algn="l" indent="0" marL="0">
+            <a:pPr algn="l" marL="342900" indent="-342900">
               <a:spcAft>
                 <a:spcPts val="800"/>
               </a:spcAft>
-              <a:buNone/>
+              <a:buSzPct val="100000"/>
+              <a:buChar char="•"/>
             </a:pPr>
             <a:r>
               <a:rPr lang="en-US" sz="4000" dirty="0">
@@ -15221,7 +15391,85 @@
                 <a:ea typeface="Times New Roman" pitchFamily="34" charset="-122"/>
                 <a:cs typeface="Times New Roman" pitchFamily="34" charset="-120"/>
               </a:rPr>
-              <a:t>It carries the most water of all African rivers.</a:t>
+              <a:t>It carries the most water, into the Atlantic Ocean.</a:t>
+            </a:r>
+            <a:endParaRPr lang="en-US" sz="4000" dirty="0"/>
+          </a:p>
+          <a:p>
+            <a:pPr algn="l" marL="342900" indent="-342900">
+              <a:spcAft>
+                <a:spcPts val="800"/>
+              </a:spcAft>
+              <a:buSzPct val="100000"/>
+              <a:buChar char="•"/>
+            </a:pPr>
+            <a:r>
+              <a:rPr lang="en-US" sz="4000" b="1" dirty="0">
+                <a:solidFill>
+                  <a:srgbClr val="111111"/>
+                </a:solidFill>
+                <a:latin typeface="Times New Roman" pitchFamily="34" charset="0"/>
+                <a:ea typeface="Times New Roman" pitchFamily="34" charset="-122"/>
+                <a:cs typeface="Times New Roman" pitchFamily="34" charset="-120"/>
+              </a:rPr>
+              <a:t>The Niger: </a:t>
+            </a:r>
+            <a:pPr algn="l" marL="342900" indent="-342900">
+              <a:spcAft>
+                <a:spcPts val="800"/>
+              </a:spcAft>
+              <a:buSzPct val="100000"/>
+              <a:buChar char="•"/>
+            </a:pPr>
+            <a:r>
+              <a:rPr lang="en-US" sz="4000" dirty="0">
+                <a:solidFill>
+                  <a:srgbClr val="111111"/>
+                </a:solidFill>
+                <a:latin typeface="Times New Roman" pitchFamily="34" charset="0"/>
+                <a:ea typeface="Times New Roman" pitchFamily="34" charset="-122"/>
+                <a:cs typeface="Times New Roman" pitchFamily="34" charset="-120"/>
+              </a:rPr>
+              <a:t>It flows into the Gulf of Guinea, and the Benue joins it.</a:t>
+            </a:r>
+            <a:endParaRPr lang="en-US" sz="4000" dirty="0"/>
+          </a:p>
+          <a:p>
+            <a:pPr algn="l" marL="342900" indent="-342900">
+              <a:spcAft>
+                <a:spcPts val="800"/>
+              </a:spcAft>
+              <a:buSzPct val="100000"/>
+              <a:buChar char="•"/>
+            </a:pPr>
+            <a:r>
+              <a:rPr lang="en-US" sz="4000" b="1" dirty="0">
+                <a:solidFill>
+                  <a:srgbClr val="111111"/>
+                </a:solidFill>
+                <a:latin typeface="Times New Roman" pitchFamily="34" charset="0"/>
+                <a:ea typeface="Times New Roman" pitchFamily="34" charset="-122"/>
+                <a:cs typeface="Times New Roman" pitchFamily="34" charset="-120"/>
+              </a:rPr>
+              <a:t>The Zambezi: </a:t>
+            </a:r>
+            <a:pPr algn="l" marL="342900" indent="-342900">
+              <a:spcAft>
+                <a:spcPts val="800"/>
+              </a:spcAft>
+              <a:buSzPct val="100000"/>
+              <a:buChar char="•"/>
+            </a:pPr>
+            <a:r>
+              <a:rPr lang="en-US" sz="4000" dirty="0">
+                <a:solidFill>
+                  <a:srgbClr val="111111"/>
+                </a:solidFill>
+                <a:latin typeface="Times New Roman" pitchFamily="34" charset="0"/>
+                <a:ea typeface="Times New Roman" pitchFamily="34" charset="-122"/>
+                <a:cs typeface="Times New Roman" pitchFamily="34" charset="-120"/>
+              </a:rPr>
+              <a:t>It flows into the Indian Ocean.</a:t>
             </a:r>
             <a:endParaRPr lang="en-US" sz="4000" dirty="0"/>
           </a:p>
@@ -15339,9 +15587,111 @@
           </a:p>
         </p:txBody>
       </p:sp>
+      <p:sp>
+        <p:nvSpPr>
+          <p:cNvPr id="3" name="Text 1"/>
+          <p:cNvSpPr/>
+          <p:nvPr/>
+        </p:nvSpPr>
+        <p:spPr>
+          <a:xfrm>
+            <a:off x="365760" y="1005840"/>
+            <a:ext cx="11460175" cy="731520"/>
+          </a:xfrm>
+          <a:prstGeom prst="rect">
+            <a:avLst/>
+          </a:prstGeom>
+          <a:noFill/>
+          <a:ln/>
+        </p:spPr>
+        <p:txBody>
+          <a:bodyPr wrap="square" lIns="0" tIns="0" rIns="0" bIns="0" rtlCol="0" anchor="ctr">
+            <a:normAutofit/>
+          </a:bodyPr>
+          <a:lstStyle/>
+          <a:p>
+            <a:pPr algn="ctr" indent="0" marL="0">
+              <a:buNone/>
+            </a:pPr>
+            <a:r>
+              <a:rPr lang="en-US" sz="3600" b="1" dirty="0">
+                <a:solidFill>
+                  <a:srgbClr val="990011"/>
+                </a:solidFill>
+                <a:latin typeface="Times New Roman" pitchFamily="34" charset="0"/>
+                <a:ea typeface="Times New Roman" pitchFamily="34" charset="-122"/>
+                <a:cs typeface="Times New Roman" pitchFamily="34" charset="-120"/>
+              </a:rPr>
+              <a:t>2. Drainage</a:t>
+            </a:r>
+            <a:endParaRPr lang="en-US" sz="3600" dirty="0"/>
+          </a:p>
+        </p:txBody>
+      </p:sp>
+      <p:sp>
+        <p:nvSpPr>
+          <p:cNvPr id="4" name="Text 2"/>
+          <p:cNvSpPr/>
+          <p:nvPr/>
+        </p:nvSpPr>
+        <p:spPr>
+          <a:xfrm>
+            <a:off x="365760" y="1783080"/>
+            <a:ext cx="4846320" cy="4617720"/>
+          </a:xfrm>
+          <a:prstGeom prst="rect">
+            <a:avLst/>
+          </a:prstGeom>
+          <a:noFill/>
+          <a:ln/>
+        </p:spPr>
+        <p:txBody>
+          <a:bodyPr wrap="square" lIns="0" tIns="0" rIns="0" bIns="0" rtlCol="0" anchor="t"/>
+          <a:lstStyle/>
+          <a:p>
+            <a:pPr algn="l" marL="342900" indent="-342900">
+              <a:spcAft>
+                <a:spcPts val="800"/>
+              </a:spcAft>
+              <a:buSzPct val="100000"/>
+              <a:buChar char="•"/>
+            </a:pPr>
+            <a:r>
+              <a:rPr lang="en-US" sz="3600" b="1" dirty="0">
+                <a:solidFill>
+                  <a:srgbClr val="111111"/>
+                </a:solidFill>
+                <a:latin typeface="Times New Roman" pitchFamily="34" charset="0"/>
+                <a:ea typeface="Times New Roman" pitchFamily="34" charset="-122"/>
+                <a:cs typeface="Times New Roman" pitchFamily="34" charset="-120"/>
+              </a:rPr>
+              <a:t>Lakes: </a:t>
+            </a:r>
+            <a:pPr algn="l" marL="342900" indent="-342900">
+              <a:spcAft>
+                <a:spcPts val="800"/>
+              </a:spcAft>
+              <a:buSzPct val="100000"/>
+              <a:buChar char="•"/>
+            </a:pPr>
+            <a:r>
+              <a:rPr lang="en-US" sz="3600" dirty="0">
+                <a:solidFill>
+                  <a:srgbClr val="111111"/>
+                </a:solidFill>
+                <a:latin typeface="Times New Roman" pitchFamily="34" charset="0"/>
+                <a:ea typeface="Times New Roman" pitchFamily="34" charset="-122"/>
+                <a:cs typeface="Times New Roman" pitchFamily="34" charset="-120"/>
+              </a:rPr>
+              <a:t>Lake Victoria is the largest, and Lake Chad is shrinking.</a:t>
+            </a:r>
+            <a:endParaRPr lang="en-US" sz="3600" dirty="0"/>
+          </a:p>
+        </p:txBody>
+      </p:sp>
       <p:pic>
         <p:nvPicPr>
-          <p:cNvPr id="3" name="Image 0" descr="/home/claude/f4/img/minesec_sheet.png">    </p:cNvPr>
+          <p:cNvPr id="5" name="Image 0" descr="/home/claude/f4/img/v2/f2t_lake_chad.jpg">    </p:cNvPr>
           <p:cNvPicPr>
             <a:picLocks noChangeAspect="1"/>
           </p:cNvPicPr>
@@ -15355,8 +15705,8 @@
         </p:blipFill>
         <p:spPr>
           <a:xfrm>
-            <a:off x="0" y="658368"/>
-            <a:ext cx="2468880" cy="5833872"/>
+            <a:off x="5349240" y="2071212"/>
+            <a:ext cx="6659575" cy="3693983"/>
           </a:xfrm>
           <a:prstGeom prst="rect">
             <a:avLst/>
@@ -15365,14 +15715,14 @@
       </p:pic>
       <p:sp>
         <p:nvSpPr>
-          <p:cNvPr id="4" name="Text 1"/>
+          <p:cNvPr id="6" name="Text 3"/>
           <p:cNvSpPr/>
           <p:nvPr/>
         </p:nvSpPr>
         <p:spPr>
           <a:xfrm>
-            <a:off x="2697480" y="1005840"/>
-            <a:ext cx="9174175" cy="731520"/>
+            <a:off x="5349240" y="6089904"/>
+            <a:ext cx="6659575" cy="347472"/>
           </a:xfrm>
           <a:prstGeom prst="rect">
             <a:avLst/>
@@ -15381,159 +15731,24 @@
           <a:ln/>
         </p:spPr>
         <p:txBody>
-          <a:bodyPr wrap="square" lIns="0" tIns="0" rIns="0" bIns="0" rtlCol="0" anchor="ctr">
-            <a:normAutofit/>
-          </a:bodyPr>
+          <a:bodyPr wrap="square" lIns="0" tIns="0" rIns="0" bIns="0" rtlCol="0" anchor="ctr"/>
           <a:lstStyle/>
           <a:p>
             <a:pPr algn="ctr" indent="0" marL="0">
               <a:buNone/>
             </a:pPr>
             <a:r>
-              <a:rPr lang="en-US" sz="3600" b="1" dirty="0">
-                <a:solidFill>
-                  <a:srgbClr val="990011"/>
+              <a:rPr lang="en-US" sz="1600" i="1" dirty="0">
+                <a:solidFill>
+                  <a:srgbClr val="555555"/>
                 </a:solidFill>
                 <a:latin typeface="Times New Roman" pitchFamily="34" charset="0"/>
                 <a:ea typeface="Times New Roman" pitchFamily="34" charset="-122"/>
                 <a:cs typeface="Times New Roman" pitchFamily="34" charset="-120"/>
               </a:rPr>
-              <a:t>2. Drainage (continued)</a:t>
-            </a:r>
-            <a:endParaRPr lang="en-US" sz="3600" dirty="0"/>
-          </a:p>
-        </p:txBody>
-      </p:sp>
-      <p:sp>
-        <p:nvSpPr>
-          <p:cNvPr id="5" name="Text 2"/>
-          <p:cNvSpPr/>
-          <p:nvPr/>
-        </p:nvSpPr>
-        <p:spPr>
-          <a:xfrm>
-            <a:off x="2697480" y="1783080"/>
-            <a:ext cx="9174175" cy="4663440"/>
-          </a:xfrm>
-          <a:prstGeom prst="rect">
-            <a:avLst/>
-          </a:prstGeom>
-          <a:noFill/>
-          <a:ln/>
-        </p:spPr>
-        <p:txBody>
-          <a:bodyPr wrap="square" lIns="0" tIns="0" rIns="0" bIns="0" rtlCol="0" anchor="t"/>
-          <a:lstStyle/>
-          <a:p>
-            <a:pPr algn="l" indent="0" marL="0">
-              <a:spcAft>
-                <a:spcPts val="800"/>
-              </a:spcAft>
-              <a:buNone/>
-            </a:pPr>
-            <a:r>
-              <a:rPr lang="en-US" sz="4000" b="1" dirty="0">
-                <a:solidFill>
-                  <a:srgbClr val="111111"/>
-                </a:solidFill>
-                <a:latin typeface="Times New Roman" pitchFamily="34" charset="0"/>
-                <a:ea typeface="Times New Roman" pitchFamily="34" charset="-122"/>
-                <a:cs typeface="Times New Roman" pitchFamily="34" charset="-120"/>
-              </a:rPr>
-              <a:t>The Niger: </a:t>
-            </a:r>
-            <a:pPr algn="l" indent="0" marL="0">
-              <a:spcAft>
-                <a:spcPts val="800"/>
-              </a:spcAft>
-              <a:buNone/>
-            </a:pPr>
-            <a:r>
-              <a:rPr lang="en-US" sz="4000" dirty="0">
-                <a:solidFill>
-                  <a:srgbClr val="111111"/>
-                </a:solidFill>
-                <a:latin typeface="Times New Roman" pitchFamily="34" charset="0"/>
-                <a:ea typeface="Times New Roman" pitchFamily="34" charset="-122"/>
-                <a:cs typeface="Times New Roman" pitchFamily="34" charset="-120"/>
-              </a:rPr>
-              <a:t>It flows into the Gulf of Guinea, and the Benue is its main tributary.</a:t>
-            </a:r>
-            <a:endParaRPr lang="en-US" sz="4000" dirty="0"/>
-          </a:p>
-          <a:p>
-            <a:pPr algn="l" indent="0" marL="0">
-              <a:spcAft>
-                <a:spcPts val="800"/>
-              </a:spcAft>
-              <a:buNone/>
-            </a:pPr>
-            <a:r>
-              <a:rPr lang="en-US" sz="4000" b="1" dirty="0">
-                <a:solidFill>
-                  <a:srgbClr val="111111"/>
-                </a:solidFill>
-                <a:latin typeface="Times New Roman" pitchFamily="34" charset="0"/>
-                <a:ea typeface="Times New Roman" pitchFamily="34" charset="-122"/>
-                <a:cs typeface="Times New Roman" pitchFamily="34" charset="-120"/>
-              </a:rPr>
-              <a:t>Lakes: </a:t>
-            </a:r>
-            <a:pPr algn="l" indent="0" marL="0">
-              <a:spcAft>
-                <a:spcPts val="800"/>
-              </a:spcAft>
-              <a:buNone/>
-            </a:pPr>
-            <a:r>
-              <a:rPr lang="en-US" sz="4000" dirty="0">
-                <a:solidFill>
-                  <a:srgbClr val="111111"/>
-                </a:solidFill>
-                <a:latin typeface="Times New Roman" pitchFamily="34" charset="0"/>
-                <a:ea typeface="Times New Roman" pitchFamily="34" charset="-122"/>
-                <a:cs typeface="Times New Roman" pitchFamily="34" charset="-120"/>
-              </a:rPr>
-              <a:t>Lake Victoria is the largest lake, while Lake Chad is shrinking.</a:t>
-            </a:r>
-            <a:endParaRPr lang="en-US" sz="4000" dirty="0"/>
-          </a:p>
-          <a:p>
-            <a:pPr algn="l" indent="0" marL="0">
-              <a:spcAft>
-                <a:spcPts val="800"/>
-              </a:spcAft>
-              <a:buNone/>
-            </a:pPr>
-            <a:r>
-              <a:rPr lang="en-US" sz="4000" b="1" dirty="0">
-                <a:solidFill>
-                  <a:srgbClr val="111111"/>
-                </a:solidFill>
-                <a:latin typeface="Times New Roman" pitchFamily="34" charset="0"/>
-                <a:ea typeface="Times New Roman" pitchFamily="34" charset="-122"/>
-                <a:cs typeface="Times New Roman" pitchFamily="34" charset="-120"/>
-              </a:rPr>
-              <a:t>Uses: </a:t>
-            </a:r>
-            <a:pPr algn="l" indent="0" marL="0">
-              <a:spcAft>
-                <a:spcPts val="800"/>
-              </a:spcAft>
-              <a:buNone/>
-            </a:pPr>
-            <a:r>
-              <a:rPr lang="en-US" sz="4000" dirty="0">
-                <a:solidFill>
-                  <a:srgbClr val="111111"/>
-                </a:solidFill>
-                <a:latin typeface="Times New Roman" pitchFamily="34" charset="0"/>
-                <a:ea typeface="Times New Roman" pitchFamily="34" charset="-122"/>
-                <a:cs typeface="Times New Roman" pitchFamily="34" charset="-120"/>
-              </a:rPr>
-              <a:t>Rivers and lakes are used for fishing, irrigation and electricity.</a:t>
-            </a:r>
-            <a:endParaRPr lang="en-US" sz="4000" dirty="0"/>
+              <a:t>Illustration: Lake Chad</a:t>
+            </a:r>
+            <a:endParaRPr lang="en-US" sz="1600" dirty="0"/>
           </a:p>
         </p:txBody>
       </p:sp>
@@ -15643,7 +15858,7 @@
                 <a:ea typeface="Calibri" pitchFamily="34" charset="-122"/>
                 <a:cs typeface="Calibri" pitchFamily="34" charset="-120"/>
               </a:rPr>
-              <a:t>FORMATIVE EVALUATION</a:t>
+              <a:t>BOARD SUMMARY</a:t>
             </a:r>
             <a:endParaRPr lang="en-US" sz="1400" dirty="0"/>
           </a:p>
@@ -15708,7 +15923,7 @@
                 <a:ea typeface="Times New Roman" pitchFamily="34" charset="-122"/>
                 <a:cs typeface="Times New Roman" pitchFamily="34" charset="-120"/>
               </a:rPr>
-              <a:t>Evaluation 1</a:t>
+              <a:t>2. Drainage</a:t>
             </a:r>
             <a:endParaRPr lang="en-US" sz="3600" dirty="0"/>
           </a:p>
@@ -15735,14 +15950,15 @@
           <a:bodyPr wrap="square" lIns="0" tIns="0" rIns="0" bIns="0" rtlCol="0" anchor="t"/>
           <a:lstStyle/>
           <a:p>
-            <a:pPr algn="l" indent="0" marL="0">
+            <a:pPr algn="l" marL="342900" indent="-342900">
               <a:spcAft>
                 <a:spcPts val="800"/>
               </a:spcAft>
-              <a:buNone/>
+              <a:buSzPct val="100000"/>
+              <a:buChar char="•"/>
             </a:pPr>
             <a:r>
-              <a:rPr lang="en-US" sz="4000" dirty="0">
+              <a:rPr lang="en-US" sz="4000" b="1" dirty="0">
                 <a:solidFill>
                   <a:srgbClr val="111111"/>
                 </a:solidFill>
@@ -15750,7 +15966,25 @@
                 <a:ea typeface="Times New Roman" pitchFamily="34" charset="-122"/>
                 <a:cs typeface="Times New Roman" pitchFamily="34" charset="-120"/>
               </a:rPr>
-              <a:t>Which vegetation covers most of Africa?</a:t>
+              <a:t>Importance: </a:t>
+            </a:r>
+            <a:pPr algn="l" marL="342900" indent="-342900">
+              <a:spcAft>
+                <a:spcPts val="800"/>
+              </a:spcAft>
+              <a:buSzPct val="100000"/>
+              <a:buChar char="•"/>
+            </a:pPr>
+            <a:r>
+              <a:rPr lang="en-US" sz="4000" dirty="0">
+                <a:solidFill>
+                  <a:srgbClr val="111111"/>
+                </a:solidFill>
+                <a:latin typeface="Times New Roman" pitchFamily="34" charset="0"/>
+                <a:ea typeface="Times New Roman" pitchFamily="34" charset="-122"/>
+                <a:cs typeface="Times New Roman" pitchFamily="34" charset="-120"/>
+              </a:rPr>
+              <a:t>Water, fishing, transport, irrigation and electricity.</a:t>
             </a:r>
             <a:endParaRPr lang="en-US" sz="4000" dirty="0"/>
           </a:p>
@@ -15927,7 +16161,7 @@
                 <a:ea typeface="Times New Roman" pitchFamily="34" charset="-122"/>
                 <a:cs typeface="Times New Roman" pitchFamily="34" charset="-120"/>
               </a:rPr>
-              <a:t>Expected Answer</a:t>
+              <a:t>Evaluation 1</a:t>
             </a:r>
             <a:endParaRPr lang="en-US" sz="3600" dirty="0"/>
           </a:p>
@@ -15969,7 +16203,7 @@
                 <a:ea typeface="Times New Roman" pitchFamily="34" charset="-122"/>
                 <a:cs typeface="Times New Roman" pitchFamily="34" charset="-120"/>
               </a:rPr>
-              <a:t>The savanna.</a:t>
+              <a:t>Which vegetation covers most of Africa?</a:t>
             </a:r>
             <a:endParaRPr lang="en-US" sz="4000" dirty="0"/>
           </a:p>
@@ -16146,7 +16380,7 @@
                 <a:ea typeface="Times New Roman" pitchFamily="34" charset="-122"/>
                 <a:cs typeface="Times New Roman" pitchFamily="34" charset="-120"/>
               </a:rPr>
-              <a:t>Evaluation 2</a:t>
+              <a:t>Expected Answer</a:t>
             </a:r>
             <a:endParaRPr lang="en-US" sz="3600" dirty="0"/>
           </a:p>
@@ -16188,7 +16422,7 @@
                 <a:ea typeface="Times New Roman" pitchFamily="34" charset="-122"/>
                 <a:cs typeface="Times New Roman" pitchFamily="34" charset="-120"/>
               </a:rPr>
-              <a:t>The Benue is a tributary of which river?</a:t>
+              <a:t>The savanna.</a:t>
             </a:r>
             <a:endParaRPr lang="en-US" sz="4000" dirty="0"/>
           </a:p>
@@ -16365,7 +16599,7 @@
                 <a:ea typeface="Times New Roman" pitchFamily="34" charset="-122"/>
                 <a:cs typeface="Times New Roman" pitchFamily="34" charset="-120"/>
               </a:rPr>
-              <a:t>Expected Answer</a:t>
+              <a:t>Evaluation 2</a:t>
             </a:r>
             <a:endParaRPr lang="en-US" sz="3600" dirty="0"/>
           </a:p>
@@ -16407,7 +16641,7 @@
                 <a:ea typeface="Times New Roman" pitchFamily="34" charset="-122"/>
                 <a:cs typeface="Times New Roman" pitchFamily="34" charset="-120"/>
               </a:rPr>
-              <a:t>The Niger.</a:t>
+              <a:t>The Benue is a tributary of which river?</a:t>
             </a:r>
             <a:endParaRPr lang="en-US" sz="4000" dirty="0"/>
           </a:p>
@@ -16519,7 +16753,7 @@
                 <a:ea typeface="Calibri" pitchFamily="34" charset="-122"/>
                 <a:cs typeface="Calibri" pitchFamily="34" charset="-120"/>
               </a:rPr>
-              <a:t>REMEDIATION</a:t>
+              <a:t>FORMATIVE EVALUATION</a:t>
             </a:r>
             <a:endParaRPr lang="en-US" sz="1400" dirty="0"/>
           </a:p>
@@ -16542,7 +16776,7 @@
         <p:spPr>
           <a:xfrm>
             <a:off x="0" y="658368"/>
-            <a:ext cx="1463040" cy="5833872"/>
+            <a:ext cx="5120640" cy="5833872"/>
           </a:xfrm>
           <a:prstGeom prst="rect">
             <a:avLst/>
@@ -16557,8 +16791,8 @@
         </p:nvSpPr>
         <p:spPr>
           <a:xfrm>
-            <a:off x="1691640" y="1005840"/>
-            <a:ext cx="10180015" cy="731520"/>
+            <a:off x="5349240" y="1005840"/>
+            <a:ext cx="6522415" cy="731520"/>
           </a:xfrm>
           <a:prstGeom prst="rect">
             <a:avLst/>
@@ -16584,7 +16818,7 @@
                 <a:ea typeface="Times New Roman" pitchFamily="34" charset="-122"/>
                 <a:cs typeface="Times New Roman" pitchFamily="34" charset="-120"/>
               </a:rPr>
-              <a:t>Remediation</a:t>
+              <a:t>Expected Answer</a:t>
             </a:r>
             <a:endParaRPr lang="en-US" sz="3600" dirty="0"/>
           </a:p>
@@ -16598,8 +16832,8 @@
         </p:nvSpPr>
         <p:spPr>
           <a:xfrm>
-            <a:off x="1691640" y="1783080"/>
-            <a:ext cx="10180015" cy="4663440"/>
+            <a:off x="5349240" y="1783080"/>
+            <a:ext cx="6522415" cy="4663440"/>
           </a:xfrm>
           <a:prstGeom prst="rect">
             <a:avLst/>
@@ -16618,7 +16852,7 @@
               <a:buNone/>
             </a:pPr>
             <a:r>
-              <a:rPr lang="en-US" sz="4000" b="1" dirty="0">
+              <a:rPr lang="en-US" sz="4000" dirty="0">
                 <a:solidFill>
                   <a:srgbClr val="111111"/>
                 </a:solidFill>
@@ -16626,73 +16860,7 @@
                 <a:ea typeface="Times New Roman" pitchFamily="34" charset="-122"/>
                 <a:cs typeface="Times New Roman" pitchFamily="34" charset="-120"/>
               </a:rPr>
-              <a:t>Fill in the blanks:</a:t>
-            </a:r>
-            <a:endParaRPr lang="en-US" sz="4000" dirty="0"/>
-          </a:p>
-          <a:p>
-            <a:pPr algn="l" marL="342900" indent="-342900">
-              <a:spcAft>
-                <a:spcPts val="800"/>
-              </a:spcAft>
-              <a:buSzPct val="100000"/>
-              <a:buFont typeface="+mj-lt"/>
-              <a:buAutoNum type="arabicPeriod" startAt="1"/>
-            </a:pPr>
-            <a:r>
-              <a:rPr lang="en-US" sz="4000" dirty="0">
-                <a:solidFill>
-                  <a:srgbClr val="111111"/>
-                </a:solidFill>
-                <a:latin typeface="Times New Roman" pitchFamily="34" charset="0"/>
-                <a:ea typeface="Times New Roman" pitchFamily="34" charset="-122"/>
-                <a:cs typeface="Times New Roman" pitchFamily="34" charset="-120"/>
-              </a:rPr>
-              <a:t>The longest river of Africa is the ______.</a:t>
-            </a:r>
-            <a:endParaRPr lang="en-US" sz="4000" dirty="0"/>
-          </a:p>
-          <a:p>
-            <a:pPr algn="l" marL="342900" indent="-342900">
-              <a:spcAft>
-                <a:spcPts val="800"/>
-              </a:spcAft>
-              <a:buSzPct val="100000"/>
-              <a:buFont typeface="+mj-lt"/>
-              <a:buAutoNum type="arabicPeriod" startAt="1"/>
-            </a:pPr>
-            <a:r>
-              <a:rPr lang="en-US" sz="4000" dirty="0">
-                <a:solidFill>
-                  <a:srgbClr val="111111"/>
-                </a:solidFill>
-                <a:latin typeface="Times New Roman" pitchFamily="34" charset="0"/>
-                <a:ea typeface="Times New Roman" pitchFamily="34" charset="-122"/>
-                <a:cs typeface="Times New Roman" pitchFamily="34" charset="-120"/>
-              </a:rPr>
-              <a:t>A river that joins a bigger river is a ______.</a:t>
-            </a:r>
-            <a:endParaRPr lang="en-US" sz="4000" dirty="0"/>
-          </a:p>
-          <a:p>
-            <a:pPr algn="l" marL="342900" indent="-342900">
-              <a:spcAft>
-                <a:spcPts val="800"/>
-              </a:spcAft>
-              <a:buSzPct val="100000"/>
-              <a:buFont typeface="+mj-lt"/>
-              <a:buAutoNum type="arabicPeriod" startAt="1"/>
-            </a:pPr>
-            <a:r>
-              <a:rPr lang="en-US" sz="4000" dirty="0">
-                <a:solidFill>
-                  <a:srgbClr val="111111"/>
-                </a:solidFill>
-                <a:latin typeface="Times New Roman" pitchFamily="34" charset="0"/>
-                <a:ea typeface="Times New Roman" pitchFamily="34" charset="-122"/>
-                <a:cs typeface="Times New Roman" pitchFamily="34" charset="-120"/>
-              </a:rPr>
-              <a:t>The lake north of Cameroon that is shrinking is Lake ______.</a:t>
+              <a:t>The Niger.</a:t>
             </a:r>
             <a:endParaRPr lang="en-US" sz="4000" dirty="0"/>
           </a:p>
@@ -16804,7 +16972,7 @@
                 <a:ea typeface="Calibri" pitchFamily="34" charset="-122"/>
                 <a:cs typeface="Calibri" pitchFamily="34" charset="-120"/>
               </a:rPr>
-              <a:t>HOMEWORK</a:t>
+              <a:t>REMEDIATION</a:t>
             </a:r>
             <a:endParaRPr lang="en-US" sz="1400" dirty="0"/>
           </a:p>
@@ -16827,7 +16995,7 @@
         <p:spPr>
           <a:xfrm>
             <a:off x="0" y="658368"/>
-            <a:ext cx="5120640" cy="5833872"/>
+            <a:ext cx="1463040" cy="5833872"/>
           </a:xfrm>
           <a:prstGeom prst="rect">
             <a:avLst/>
@@ -16842,8 +17010,8 @@
         </p:nvSpPr>
         <p:spPr>
           <a:xfrm>
-            <a:off x="5349240" y="1005840"/>
-            <a:ext cx="6522415" cy="731520"/>
+            <a:off x="1691640" y="1005840"/>
+            <a:ext cx="10180015" cy="731520"/>
           </a:xfrm>
           <a:prstGeom prst="rect">
             <a:avLst/>
@@ -16869,7 +17037,7 @@
                 <a:ea typeface="Times New Roman" pitchFamily="34" charset="-122"/>
                 <a:cs typeface="Times New Roman" pitchFamily="34" charset="-120"/>
               </a:rPr>
-              <a:t>Homework</a:t>
+              <a:t>Remediation</a:t>
             </a:r>
             <a:endParaRPr lang="en-US" sz="3600" dirty="0"/>
           </a:p>
@@ -16883,8 +17051,8 @@
         </p:nvSpPr>
         <p:spPr>
           <a:xfrm>
-            <a:off x="5349240" y="1783080"/>
-            <a:ext cx="6522415" cy="4663440"/>
+            <a:off x="1691640" y="1783080"/>
+            <a:ext cx="10180015" cy="4663440"/>
           </a:xfrm>
           <a:prstGeom prst="rect">
             <a:avLst/>
@@ -16903,7 +17071,7 @@
               <a:buNone/>
             </a:pPr>
             <a:r>
-              <a:rPr lang="en-US" sz="4000" dirty="0">
+              <a:rPr lang="en-US" sz="4000" b="1" dirty="0">
                 <a:solidFill>
                   <a:srgbClr val="111111"/>
                 </a:solidFill>
@@ -16911,7 +17079,73 @@
                 <a:ea typeface="Times New Roman" pitchFamily="34" charset="-122"/>
                 <a:cs typeface="Times New Roman" pitchFamily="34" charset="-120"/>
               </a:rPr>
-              <a:t>Revise Lesson 6 on Africa. Draw a simple map of Africa and mark the Equator, the Nile, the Congo, the Niger, Lake Victoria and Cameroon.</a:t>
+              <a:t>Fill in the blanks:</a:t>
+            </a:r>
+            <a:endParaRPr lang="en-US" sz="4000" dirty="0"/>
+          </a:p>
+          <a:p>
+            <a:pPr algn="l" marL="342900" indent="-342900">
+              <a:spcAft>
+                <a:spcPts val="800"/>
+              </a:spcAft>
+              <a:buSzPct val="100000"/>
+              <a:buFont typeface="+mj-lt"/>
+              <a:buAutoNum type="arabicPeriod" startAt="1"/>
+            </a:pPr>
+            <a:r>
+              <a:rPr lang="en-US" sz="4000" dirty="0">
+                <a:solidFill>
+                  <a:srgbClr val="111111"/>
+                </a:solidFill>
+                <a:latin typeface="Times New Roman" pitchFamily="34" charset="0"/>
+                <a:ea typeface="Times New Roman" pitchFamily="34" charset="-122"/>
+                <a:cs typeface="Times New Roman" pitchFamily="34" charset="-120"/>
+              </a:rPr>
+              <a:t>The longest river of Africa is the ______.</a:t>
+            </a:r>
+            <a:endParaRPr lang="en-US" sz="4000" dirty="0"/>
+          </a:p>
+          <a:p>
+            <a:pPr algn="l" marL="342900" indent="-342900">
+              <a:spcAft>
+                <a:spcPts val="800"/>
+              </a:spcAft>
+              <a:buSzPct val="100000"/>
+              <a:buFont typeface="+mj-lt"/>
+              <a:buAutoNum type="arabicPeriod" startAt="1"/>
+            </a:pPr>
+            <a:r>
+              <a:rPr lang="en-US" sz="4000" dirty="0">
+                <a:solidFill>
+                  <a:srgbClr val="111111"/>
+                </a:solidFill>
+                <a:latin typeface="Times New Roman" pitchFamily="34" charset="0"/>
+                <a:ea typeface="Times New Roman" pitchFamily="34" charset="-122"/>
+                <a:cs typeface="Times New Roman" pitchFamily="34" charset="-120"/>
+              </a:rPr>
+              <a:t>A river that joins a bigger river is a ______.</a:t>
+            </a:r>
+            <a:endParaRPr lang="en-US" sz="4000" dirty="0"/>
+          </a:p>
+          <a:p>
+            <a:pPr algn="l" marL="342900" indent="-342900">
+              <a:spcAft>
+                <a:spcPts val="800"/>
+              </a:spcAft>
+              <a:buSzPct val="100000"/>
+              <a:buFont typeface="+mj-lt"/>
+              <a:buAutoNum type="arabicPeriod" startAt="1"/>
+            </a:pPr>
+            <a:r>
+              <a:rPr lang="en-US" sz="4000" dirty="0">
+                <a:solidFill>
+                  <a:srgbClr val="111111"/>
+                </a:solidFill>
+                <a:latin typeface="Times New Roman" pitchFamily="34" charset="0"/>
+                <a:ea typeface="Times New Roman" pitchFamily="34" charset="-122"/>
+                <a:cs typeface="Times New Roman" pitchFamily="34" charset="-120"/>
+              </a:rPr>
+              <a:t>The lake north of Cameroon that is shrinking is Lake ______.</a:t>
             </a:r>
             <a:endParaRPr lang="en-US" sz="4000" dirty="0"/>
           </a:p>
@@ -17023,6 +17257,225 @@
                 <a:ea typeface="Calibri" pitchFamily="34" charset="-122"/>
                 <a:cs typeface="Calibri" pitchFamily="34" charset="-120"/>
               </a:rPr>
+              <a:t>HOMEWORK</a:t>
+            </a:r>
+            <a:endParaRPr lang="en-US" sz="1400" dirty="0"/>
+          </a:p>
+        </p:txBody>
+      </p:sp>
+      <p:pic>
+        <p:nvPicPr>
+          <p:cNvPr id="3" name="Image 0" descr="/home/claude/f4/img/minesec_sheet.png">    </p:cNvPr>
+          <p:cNvPicPr>
+            <a:picLocks noChangeAspect="1"/>
+          </p:cNvPicPr>
+          <p:nvPr/>
+        </p:nvPicPr>
+        <p:blipFill>
+          <a:blip r:embed="rId1"/>
+          <a:stretch>
+            <a:fillRect/>
+          </a:stretch>
+        </p:blipFill>
+        <p:spPr>
+          <a:xfrm>
+            <a:off x="0" y="658368"/>
+            <a:ext cx="5120640" cy="5833872"/>
+          </a:xfrm>
+          <a:prstGeom prst="rect">
+            <a:avLst/>
+          </a:prstGeom>
+        </p:spPr>
+      </p:pic>
+      <p:sp>
+        <p:nvSpPr>
+          <p:cNvPr id="4" name="Text 1"/>
+          <p:cNvSpPr/>
+          <p:nvPr/>
+        </p:nvSpPr>
+        <p:spPr>
+          <a:xfrm>
+            <a:off x="5349240" y="1005840"/>
+            <a:ext cx="6522415" cy="731520"/>
+          </a:xfrm>
+          <a:prstGeom prst="rect">
+            <a:avLst/>
+          </a:prstGeom>
+          <a:noFill/>
+          <a:ln/>
+        </p:spPr>
+        <p:txBody>
+          <a:bodyPr wrap="square" lIns="0" tIns="0" rIns="0" bIns="0" rtlCol="0" anchor="ctr">
+            <a:normAutofit/>
+          </a:bodyPr>
+          <a:lstStyle/>
+          <a:p>
+            <a:pPr algn="ctr" indent="0" marL="0">
+              <a:buNone/>
+            </a:pPr>
+            <a:r>
+              <a:rPr lang="en-US" sz="3600" b="1" dirty="0">
+                <a:solidFill>
+                  <a:srgbClr val="990011"/>
+                </a:solidFill>
+                <a:latin typeface="Times New Roman" pitchFamily="34" charset="0"/>
+                <a:ea typeface="Times New Roman" pitchFamily="34" charset="-122"/>
+                <a:cs typeface="Times New Roman" pitchFamily="34" charset="-120"/>
+              </a:rPr>
+              <a:t>Homework</a:t>
+            </a:r>
+            <a:endParaRPr lang="en-US" sz="3600" dirty="0"/>
+          </a:p>
+        </p:txBody>
+      </p:sp>
+      <p:sp>
+        <p:nvSpPr>
+          <p:cNvPr id="5" name="Text 2"/>
+          <p:cNvSpPr/>
+          <p:nvPr/>
+        </p:nvSpPr>
+        <p:spPr>
+          <a:xfrm>
+            <a:off x="5349240" y="1783080"/>
+            <a:ext cx="6522415" cy="4663440"/>
+          </a:xfrm>
+          <a:prstGeom prst="rect">
+            <a:avLst/>
+          </a:prstGeom>
+          <a:noFill/>
+          <a:ln/>
+        </p:spPr>
+        <p:txBody>
+          <a:bodyPr wrap="square" lIns="0" tIns="0" rIns="0" bIns="0" rtlCol="0" anchor="t"/>
+          <a:lstStyle/>
+          <a:p>
+            <a:pPr algn="l" indent="0" marL="0">
+              <a:spcAft>
+                <a:spcPts val="800"/>
+              </a:spcAft>
+              <a:buNone/>
+            </a:pPr>
+            <a:r>
+              <a:rPr lang="en-US" sz="4000" dirty="0">
+                <a:solidFill>
+                  <a:srgbClr val="111111"/>
+                </a:solidFill>
+                <a:latin typeface="Times New Roman" pitchFamily="34" charset="0"/>
+                <a:ea typeface="Times New Roman" pitchFamily="34" charset="-122"/>
+                <a:cs typeface="Times New Roman" pitchFamily="34" charset="-120"/>
+              </a:rPr>
+              <a:t>Revise Lesson 6 on Africa. Draw a simple map of Africa and mark the Equator, the Nile, the Congo, the Niger, Lake Victoria and Cameroon.</a:t>
+            </a:r>
+            <a:endParaRPr lang="en-US" sz="4000" dirty="0"/>
+          </a:p>
+        </p:txBody>
+      </p:sp>
+      <p:sp>
+        <p:nvSpPr>
+          <p:cNvPr id="25" name="Slide Number Placeholder 0"/>
+          <p:cNvSpPr>
+            <a:spLocks noGrp="1"/>
+          </p:cNvSpPr>
+          <p:nvPr>
+            <p:ph type="sldNum" sz="quarter" idx="4294967295"/>
+          </p:nvPr>
+        </p:nvSpPr>
+        <p:spPr>
+          <a:xfrm>
+            <a:off x="27432" y="91440"/>
+            <a:ext cx="585216" cy="475488"/>
+          </a:xfrm>
+          <a:prstGeom prst="rect">
+            <a:avLst/>
+          </a:prstGeom>
+          <a:extLst>
+            <a:ext uri="{C572A759-6A51-4108-AA02-DFA0A04FC94B}">
+              <ma14:wrappingTextBoxFlag xmlns:ma14="http://schemas.microsoft.com/office/mac/drawingml/2011/main" val="0"/>
+            </a:ext>
+          </a:extLst>
+        </p:spPr>
+        <p:txBody>
+          <a:bodyPr/>
+          <a:lstStyle>
+            <a:lvl1pPr>
+              <a:defRPr sz="2000">
+                <a:solidFill>
+                  <a:srgbClr val="FFFFFF"/>
+                </a:solidFill>
+                <a:latin typeface="Calibri"/>
+                <a:ea typeface="Calibri"/>
+                <a:cs typeface="Calibri"/>
+              </a:defRPr>
+            </a:lvl1pPr>
+          </a:lstStyle>
+          <a:p>
+            <a:pPr algn="ctr"/>
+            <a:fld id="{F7021451-1387-4CA6-816F-3879F97B5CBC}" type="slidenum">
+              <a:rPr b="1" lang="en-US"/>
+              <a:t>48</a:t>
+            </a:fld>
+            <a:endParaRPr lang="en-US"/>
+          </a:p>
+        </p:txBody>
+      </p:sp>
+    </p:spTree>
+  </p:cSld>
+  <p:clrMapOvr>
+    <a:masterClrMapping/>
+  </p:clrMapOvr>
+</p:sld>
+</file>
+
+<file path=ppt/slides/slide49.xml><?xml version="1.0" encoding="utf-8"?>
+<p:sld xmlns:a="http://schemas.openxmlformats.org/drawingml/2006/main" xmlns:r="http://schemas.openxmlformats.org/officeDocument/2006/relationships" xmlns:p="http://schemas.openxmlformats.org/presentationml/2006/main">
+  <p:cSld name="Slide 49">
+    <p:spTree>
+      <p:nvGrpSpPr>
+        <p:cNvPr id="1" name=""/>
+        <p:cNvGrpSpPr/>
+        <p:nvPr/>
+      </p:nvGrpSpPr>
+      <p:grpSpPr>
+        <a:xfrm>
+          <a:off x="0" y="0"/>
+          <a:ext cx="0" cy="0"/>
+          <a:chOff x="0" y="0"/>
+          <a:chExt cx="0" cy="0"/>
+        </a:xfrm>
+      </p:grpSpPr>
+      <p:sp>
+        <p:nvSpPr>
+          <p:cNvPr id="2" name="Text 0"/>
+          <p:cNvSpPr/>
+          <p:nvPr/>
+        </p:nvSpPr>
+        <p:spPr>
+          <a:xfrm>
+            <a:off x="457200" y="713232"/>
+            <a:ext cx="11368735" cy="274320"/>
+          </a:xfrm>
+          <a:prstGeom prst="rect">
+            <a:avLst/>
+          </a:prstGeom>
+          <a:noFill/>
+          <a:ln/>
+        </p:spPr>
+        <p:txBody>
+          <a:bodyPr wrap="square" lIns="0" tIns="0" rIns="0" bIns="0" rtlCol="0" anchor="ctr"/>
+          <a:lstStyle/>
+          <a:p>
+            <a:pPr algn="r" indent="0" marL="0">
+              <a:buNone/>
+            </a:pPr>
+            <a:r>
+              <a:rPr lang="en-US" sz="1400" b="1" dirty="0">
+                <a:solidFill>
+                  <a:srgbClr val="1C3F6E"/>
+                </a:solidFill>
+                <a:latin typeface="Calibri" pitchFamily="34" charset="0"/>
+                <a:ea typeface="Calibri" pitchFamily="34" charset="-122"/>
+                <a:cs typeface="Calibri" pitchFamily="34" charset="-120"/>
+              </a:rPr>
               <a:t>BILINGUAL GAME</a:t>
             </a:r>
             <a:endParaRPr lang="en-US" sz="1400" dirty="0"/>
@@ -17070,7 +17523,7 @@
       </p:sp>
       <p:graphicFrame>
         <p:nvGraphicFramePr>
-          <p:cNvPr id="49" name="Table 0"/>
+          <p:cNvPr id="50" name="Table 0"/>
           <p:cNvGraphicFramePr>
             <a:graphicFrameLocks noGrp="1"/>
           </p:cNvGraphicFramePr>
@@ -18382,7 +18835,7 @@
             <a:pPr algn="ctr"/>
             <a:fld id="{F7021451-1387-4CA6-816F-3879F97B5CBC}" type="slidenum">
               <a:rPr b="1" lang="en-US"/>
-              <a:t>48</a:t>
+              <a:t>49</a:t>
             </a:fld>
             <a:endParaRPr lang="en-US"/>
           </a:p>
@@ -18396,9 +18849,9 @@
 </p:sld>
 </file>
 
-<file path=ppt/slides/slide49.xml><?xml version="1.0" encoding="utf-8"?>
+<file path=ppt/slides/slide5.xml><?xml version="1.0" encoding="utf-8"?>
 <p:sld xmlns:a="http://schemas.openxmlformats.org/drawingml/2006/main" xmlns:r="http://schemas.openxmlformats.org/officeDocument/2006/relationships" xmlns:p="http://schemas.openxmlformats.org/presentationml/2006/main">
-  <p:cSld name="Slide 49">
+  <p:cSld name="Slide 5">
     <p:spTree>
       <p:nvGrpSpPr>
         <p:cNvPr id="1" name=""/>
@@ -18446,6 +18899,225 @@
                 <a:ea typeface="Calibri" pitchFamily="34" charset="-122"/>
                 <a:cs typeface="Calibri" pitchFamily="34" charset="-120"/>
               </a:rPr>
+              <a:t>HOMEWORK CORRECTION</a:t>
+            </a:r>
+            <a:endParaRPr lang="en-US" sz="1400" dirty="0"/>
+          </a:p>
+        </p:txBody>
+      </p:sp>
+      <p:pic>
+        <p:nvPicPr>
+          <p:cNvPr id="3" name="Image 0" descr="/home/claude/f4/img/minesec_sheet.png">    </p:cNvPr>
+          <p:cNvPicPr>
+            <a:picLocks noChangeAspect="1"/>
+          </p:cNvPicPr>
+          <p:nvPr/>
+        </p:nvPicPr>
+        <p:blipFill>
+          <a:blip r:embed="rId1"/>
+          <a:stretch>
+            <a:fillRect/>
+          </a:stretch>
+        </p:blipFill>
+        <p:spPr>
+          <a:xfrm>
+            <a:off x="0" y="658368"/>
+            <a:ext cx="3840480" cy="5833872"/>
+          </a:xfrm>
+          <a:prstGeom prst="rect">
+            <a:avLst/>
+          </a:prstGeom>
+        </p:spPr>
+      </p:pic>
+      <p:sp>
+        <p:nvSpPr>
+          <p:cNvPr id="4" name="Text 1"/>
+          <p:cNvSpPr/>
+          <p:nvPr/>
+        </p:nvSpPr>
+        <p:spPr>
+          <a:xfrm>
+            <a:off x="4069080" y="1005840"/>
+            <a:ext cx="7802575" cy="731520"/>
+          </a:xfrm>
+          <a:prstGeom prst="rect">
+            <a:avLst/>
+          </a:prstGeom>
+          <a:noFill/>
+          <a:ln/>
+        </p:spPr>
+        <p:txBody>
+          <a:bodyPr wrap="square" lIns="0" tIns="0" rIns="0" bIns="0" rtlCol="0" anchor="ctr">
+            <a:normAutofit/>
+          </a:bodyPr>
+          <a:lstStyle/>
+          <a:p>
+            <a:pPr algn="ctr" indent="0" marL="0">
+              <a:buNone/>
+            </a:pPr>
+            <a:r>
+              <a:rPr lang="en-US" sz="3600" b="1" dirty="0">
+                <a:solidFill>
+                  <a:srgbClr val="990011"/>
+                </a:solidFill>
+                <a:latin typeface="Times New Roman" pitchFamily="34" charset="0"/>
+                <a:ea typeface="Times New Roman" pitchFamily="34" charset="-122"/>
+                <a:cs typeface="Times New Roman" pitchFamily="34" charset="-120"/>
+              </a:rPr>
+              <a:t>Correction: Possible Answer</a:t>
+            </a:r>
+            <a:endParaRPr lang="en-US" sz="3600" dirty="0"/>
+          </a:p>
+        </p:txBody>
+      </p:sp>
+      <p:sp>
+        <p:nvSpPr>
+          <p:cNvPr id="5" name="Text 2"/>
+          <p:cNvSpPr/>
+          <p:nvPr/>
+        </p:nvSpPr>
+        <p:spPr>
+          <a:xfrm>
+            <a:off x="4069080" y="1783080"/>
+            <a:ext cx="7802575" cy="4663440"/>
+          </a:xfrm>
+          <a:prstGeom prst="rect">
+            <a:avLst/>
+          </a:prstGeom>
+          <a:noFill/>
+          <a:ln/>
+        </p:spPr>
+        <p:txBody>
+          <a:bodyPr wrap="square" lIns="0" tIns="0" rIns="0" bIns="0" rtlCol="0" anchor="t"/>
+          <a:lstStyle/>
+          <a:p>
+            <a:pPr algn="l" indent="0" marL="0">
+              <a:spcAft>
+                <a:spcPts val="800"/>
+              </a:spcAft>
+              <a:buNone/>
+            </a:pPr>
+            <a:r>
+              <a:rPr lang="en-US" sz="4000" dirty="0">
+                <a:solidFill>
+                  <a:srgbClr val="111111"/>
+                </a:solidFill>
+                <a:latin typeface="Times New Roman" pitchFamily="34" charset="0"/>
+                <a:ea typeface="Times New Roman" pitchFamily="34" charset="-122"/>
+                <a:cs typeface="Times New Roman" pitchFamily="34" charset="-120"/>
+              </a:rPr>
+              <a:t>Examples: the Nile flows into the Mediterranean Sea; the Congo flows into the Atlantic Ocean; the Niger flows into the Atlantic Ocean (Gulf of Guinea); the Zambezi flows into the Indian Ocean.</a:t>
+            </a:r>
+            <a:endParaRPr lang="en-US" sz="4000" dirty="0"/>
+          </a:p>
+        </p:txBody>
+      </p:sp>
+      <p:sp>
+        <p:nvSpPr>
+          <p:cNvPr id="25" name="Slide Number Placeholder 0"/>
+          <p:cNvSpPr>
+            <a:spLocks noGrp="1"/>
+          </p:cNvSpPr>
+          <p:nvPr>
+            <p:ph type="sldNum" sz="quarter" idx="4294967295"/>
+          </p:nvPr>
+        </p:nvSpPr>
+        <p:spPr>
+          <a:xfrm>
+            <a:off x="27432" y="91440"/>
+            <a:ext cx="585216" cy="475488"/>
+          </a:xfrm>
+          <a:prstGeom prst="rect">
+            <a:avLst/>
+          </a:prstGeom>
+          <a:extLst>
+            <a:ext uri="{C572A759-6A51-4108-AA02-DFA0A04FC94B}">
+              <ma14:wrappingTextBoxFlag xmlns:ma14="http://schemas.microsoft.com/office/mac/drawingml/2011/main" val="0"/>
+            </a:ext>
+          </a:extLst>
+        </p:spPr>
+        <p:txBody>
+          <a:bodyPr/>
+          <a:lstStyle>
+            <a:lvl1pPr>
+              <a:defRPr sz="2000">
+                <a:solidFill>
+                  <a:srgbClr val="FFFFFF"/>
+                </a:solidFill>
+                <a:latin typeface="Calibri"/>
+                <a:ea typeface="Calibri"/>
+                <a:cs typeface="Calibri"/>
+              </a:defRPr>
+            </a:lvl1pPr>
+          </a:lstStyle>
+          <a:p>
+            <a:pPr algn="ctr"/>
+            <a:fld id="{F7021451-1387-4CA6-816F-3879F97B5CBC}" type="slidenum">
+              <a:rPr b="1" lang="en-US"/>
+              <a:t>5</a:t>
+            </a:fld>
+            <a:endParaRPr lang="en-US"/>
+          </a:p>
+        </p:txBody>
+      </p:sp>
+    </p:spTree>
+  </p:cSld>
+  <p:clrMapOvr>
+    <a:masterClrMapping/>
+  </p:clrMapOvr>
+</p:sld>
+</file>
+
+<file path=ppt/slides/slide50.xml><?xml version="1.0" encoding="utf-8"?>
+<p:sld xmlns:a="http://schemas.openxmlformats.org/drawingml/2006/main" xmlns:r="http://schemas.openxmlformats.org/officeDocument/2006/relationships" xmlns:p="http://schemas.openxmlformats.org/presentationml/2006/main">
+  <p:cSld name="Slide 50">
+    <p:spTree>
+      <p:nvGrpSpPr>
+        <p:cNvPr id="1" name=""/>
+        <p:cNvGrpSpPr/>
+        <p:nvPr/>
+      </p:nvGrpSpPr>
+      <p:grpSpPr>
+        <a:xfrm>
+          <a:off x="0" y="0"/>
+          <a:ext cx="0" cy="0"/>
+          <a:chOff x="0" y="0"/>
+          <a:chExt cx="0" cy="0"/>
+        </a:xfrm>
+      </p:grpSpPr>
+      <p:sp>
+        <p:nvSpPr>
+          <p:cNvPr id="2" name="Text 0"/>
+          <p:cNvSpPr/>
+          <p:nvPr/>
+        </p:nvSpPr>
+        <p:spPr>
+          <a:xfrm>
+            <a:off x="457200" y="713232"/>
+            <a:ext cx="11368735" cy="274320"/>
+          </a:xfrm>
+          <a:prstGeom prst="rect">
+            <a:avLst/>
+          </a:prstGeom>
+          <a:noFill/>
+          <a:ln/>
+        </p:spPr>
+        <p:txBody>
+          <a:bodyPr wrap="square" lIns="0" tIns="0" rIns="0" bIns="0" rtlCol="0" anchor="ctr"/>
+          <a:lstStyle/>
+          <a:p>
+            <a:pPr algn="r" indent="0" marL="0">
+              <a:buNone/>
+            </a:pPr>
+            <a:r>
+              <a:rPr lang="en-US" sz="1400" b="1" dirty="0">
+                <a:solidFill>
+                  <a:srgbClr val="1C3F6E"/>
+                </a:solidFill>
+                <a:latin typeface="Calibri" pitchFamily="34" charset="0"/>
+                <a:ea typeface="Calibri" pitchFamily="34" charset="-122"/>
+                <a:cs typeface="Calibri" pitchFamily="34" charset="-120"/>
+              </a:rPr>
               <a:t>LOGBOOK</a:t>
             </a:r>
             <a:endParaRPr lang="en-US" sz="1400" dirty="0"/>
@@ -18493,7 +19165,7 @@
       </p:sp>
       <p:graphicFrame>
         <p:nvGraphicFramePr>
-          <p:cNvPr id="50" name="Table 0"/>
+          <p:cNvPr id="51" name="Table 0"/>
           <p:cNvGraphicFramePr>
             <a:graphicFrameLocks noGrp="1"/>
           </p:cNvGraphicFramePr>
@@ -19115,7 +19787,7 @@
             <a:pPr algn="ctr"/>
             <a:fld id="{F7021451-1387-4CA6-816F-3879F97B5CBC}" type="slidenum">
               <a:rPr b="1" lang="en-US"/>
-              <a:t>49</a:t>
+              <a:t>50</a:t>
             </a:fld>
             <a:endParaRPr lang="en-US"/>
           </a:p>
@@ -19129,9 +19801,9 @@
 </p:sld>
 </file>
 
-<file path=ppt/slides/slide5.xml><?xml version="1.0" encoding="utf-8"?>
+<file path=ppt/slides/slide51.xml><?xml version="1.0" encoding="utf-8"?>
 <p:sld xmlns:a="http://schemas.openxmlformats.org/drawingml/2006/main" xmlns:r="http://schemas.openxmlformats.org/officeDocument/2006/relationships" xmlns:p="http://schemas.openxmlformats.org/presentationml/2006/main">
-  <p:cSld name="Slide 5">
+  <p:cSld name="Slide 51">
     <p:spTree>
       <p:nvGrpSpPr>
         <p:cNvPr id="1" name=""/>
@@ -19179,225 +19851,6 @@
                 <a:ea typeface="Calibri" pitchFamily="34" charset="-122"/>
                 <a:cs typeface="Calibri" pitchFamily="34" charset="-120"/>
               </a:rPr>
-              <a:t>HOMEWORK CORRECTION</a:t>
-            </a:r>
-            <a:endParaRPr lang="en-US" sz="1400" dirty="0"/>
-          </a:p>
-        </p:txBody>
-      </p:sp>
-      <p:pic>
-        <p:nvPicPr>
-          <p:cNvPr id="3" name="Image 0" descr="/home/claude/f4/img/minesec_sheet.png">    </p:cNvPr>
-          <p:cNvPicPr>
-            <a:picLocks noChangeAspect="1"/>
-          </p:cNvPicPr>
-          <p:nvPr/>
-        </p:nvPicPr>
-        <p:blipFill>
-          <a:blip r:embed="rId1"/>
-          <a:stretch>
-            <a:fillRect/>
-          </a:stretch>
-        </p:blipFill>
-        <p:spPr>
-          <a:xfrm>
-            <a:off x="0" y="658368"/>
-            <a:ext cx="3840480" cy="5833872"/>
-          </a:xfrm>
-          <a:prstGeom prst="rect">
-            <a:avLst/>
-          </a:prstGeom>
-        </p:spPr>
-      </p:pic>
-      <p:sp>
-        <p:nvSpPr>
-          <p:cNvPr id="4" name="Text 1"/>
-          <p:cNvSpPr/>
-          <p:nvPr/>
-        </p:nvSpPr>
-        <p:spPr>
-          <a:xfrm>
-            <a:off x="4069080" y="1005840"/>
-            <a:ext cx="7802575" cy="731520"/>
-          </a:xfrm>
-          <a:prstGeom prst="rect">
-            <a:avLst/>
-          </a:prstGeom>
-          <a:noFill/>
-          <a:ln/>
-        </p:spPr>
-        <p:txBody>
-          <a:bodyPr wrap="square" lIns="0" tIns="0" rIns="0" bIns="0" rtlCol="0" anchor="ctr">
-            <a:normAutofit/>
-          </a:bodyPr>
-          <a:lstStyle/>
-          <a:p>
-            <a:pPr algn="ctr" indent="0" marL="0">
-              <a:buNone/>
-            </a:pPr>
-            <a:r>
-              <a:rPr lang="en-US" sz="3600" b="1" dirty="0">
-                <a:solidFill>
-                  <a:srgbClr val="990011"/>
-                </a:solidFill>
-                <a:latin typeface="Times New Roman" pitchFamily="34" charset="0"/>
-                <a:ea typeface="Times New Roman" pitchFamily="34" charset="-122"/>
-                <a:cs typeface="Times New Roman" pitchFamily="34" charset="-120"/>
-              </a:rPr>
-              <a:t>Correction: Possible Answer</a:t>
-            </a:r>
-            <a:endParaRPr lang="en-US" sz="3600" dirty="0"/>
-          </a:p>
-        </p:txBody>
-      </p:sp>
-      <p:sp>
-        <p:nvSpPr>
-          <p:cNvPr id="5" name="Text 2"/>
-          <p:cNvSpPr/>
-          <p:nvPr/>
-        </p:nvSpPr>
-        <p:spPr>
-          <a:xfrm>
-            <a:off x="4069080" y="1783080"/>
-            <a:ext cx="7802575" cy="4663440"/>
-          </a:xfrm>
-          <a:prstGeom prst="rect">
-            <a:avLst/>
-          </a:prstGeom>
-          <a:noFill/>
-          <a:ln/>
-        </p:spPr>
-        <p:txBody>
-          <a:bodyPr wrap="square" lIns="0" tIns="0" rIns="0" bIns="0" rtlCol="0" anchor="t"/>
-          <a:lstStyle/>
-          <a:p>
-            <a:pPr algn="l" indent="0" marL="0">
-              <a:spcAft>
-                <a:spcPts val="800"/>
-              </a:spcAft>
-              <a:buNone/>
-            </a:pPr>
-            <a:r>
-              <a:rPr lang="en-US" sz="4000" dirty="0">
-                <a:solidFill>
-                  <a:srgbClr val="111111"/>
-                </a:solidFill>
-                <a:latin typeface="Times New Roman" pitchFamily="34" charset="0"/>
-                <a:ea typeface="Times New Roman" pitchFamily="34" charset="-122"/>
-                <a:cs typeface="Times New Roman" pitchFamily="34" charset="-120"/>
-              </a:rPr>
-              <a:t>Examples: the Nile flows into the Mediterranean Sea; the Congo flows into the Atlantic Ocean; the Niger flows into the Atlantic Ocean (Gulf of Guinea); the Zambezi flows into the Indian Ocean.</a:t>
-            </a:r>
-            <a:endParaRPr lang="en-US" sz="4000" dirty="0"/>
-          </a:p>
-        </p:txBody>
-      </p:sp>
-      <p:sp>
-        <p:nvSpPr>
-          <p:cNvPr id="25" name="Slide Number Placeholder 0"/>
-          <p:cNvSpPr>
-            <a:spLocks noGrp="1"/>
-          </p:cNvSpPr>
-          <p:nvPr>
-            <p:ph type="sldNum" sz="quarter" idx="4294967295"/>
-          </p:nvPr>
-        </p:nvSpPr>
-        <p:spPr>
-          <a:xfrm>
-            <a:off x="27432" y="91440"/>
-            <a:ext cx="585216" cy="475488"/>
-          </a:xfrm>
-          <a:prstGeom prst="rect">
-            <a:avLst/>
-          </a:prstGeom>
-          <a:extLst>
-            <a:ext uri="{C572A759-6A51-4108-AA02-DFA0A04FC94B}">
-              <ma14:wrappingTextBoxFlag xmlns:ma14="http://schemas.microsoft.com/office/mac/drawingml/2011/main" val="0"/>
-            </a:ext>
-          </a:extLst>
-        </p:spPr>
-        <p:txBody>
-          <a:bodyPr/>
-          <a:lstStyle>
-            <a:lvl1pPr>
-              <a:defRPr sz="2000">
-                <a:solidFill>
-                  <a:srgbClr val="FFFFFF"/>
-                </a:solidFill>
-                <a:latin typeface="Calibri"/>
-                <a:ea typeface="Calibri"/>
-                <a:cs typeface="Calibri"/>
-              </a:defRPr>
-            </a:lvl1pPr>
-          </a:lstStyle>
-          <a:p>
-            <a:pPr algn="ctr"/>
-            <a:fld id="{F7021451-1387-4CA6-816F-3879F97B5CBC}" type="slidenum">
-              <a:rPr b="1" lang="en-US"/>
-              <a:t>5</a:t>
-            </a:fld>
-            <a:endParaRPr lang="en-US"/>
-          </a:p>
-        </p:txBody>
-      </p:sp>
-    </p:spTree>
-  </p:cSld>
-  <p:clrMapOvr>
-    <a:masterClrMapping/>
-  </p:clrMapOvr>
-</p:sld>
-</file>
-
-<file path=ppt/slides/slide50.xml><?xml version="1.0" encoding="utf-8"?>
-<p:sld xmlns:a="http://schemas.openxmlformats.org/drawingml/2006/main" xmlns:r="http://schemas.openxmlformats.org/officeDocument/2006/relationships" xmlns:p="http://schemas.openxmlformats.org/presentationml/2006/main">
-  <p:cSld name="Slide 50">
-    <p:spTree>
-      <p:nvGrpSpPr>
-        <p:cNvPr id="1" name=""/>
-        <p:cNvGrpSpPr/>
-        <p:nvPr/>
-      </p:nvGrpSpPr>
-      <p:grpSpPr>
-        <a:xfrm>
-          <a:off x="0" y="0"/>
-          <a:ext cx="0" cy="0"/>
-          <a:chOff x="0" y="0"/>
-          <a:chExt cx="0" cy="0"/>
-        </a:xfrm>
-      </p:grpSpPr>
-      <p:sp>
-        <p:nvSpPr>
-          <p:cNvPr id="2" name="Text 0"/>
-          <p:cNvSpPr/>
-          <p:nvPr/>
-        </p:nvSpPr>
-        <p:spPr>
-          <a:xfrm>
-            <a:off x="457200" y="713232"/>
-            <a:ext cx="11368735" cy="274320"/>
-          </a:xfrm>
-          <a:prstGeom prst="rect">
-            <a:avLst/>
-          </a:prstGeom>
-          <a:noFill/>
-          <a:ln/>
-        </p:spPr>
-        <p:txBody>
-          <a:bodyPr wrap="square" lIns="0" tIns="0" rIns="0" bIns="0" rtlCol="0" anchor="ctr"/>
-          <a:lstStyle/>
-          <a:p>
-            <a:pPr algn="r" indent="0" marL="0">
-              <a:buNone/>
-            </a:pPr>
-            <a:r>
-              <a:rPr lang="en-US" sz="1400" b="1" dirty="0">
-                <a:solidFill>
-                  <a:srgbClr val="1C3F6E"/>
-                </a:solidFill>
-                <a:latin typeface="Calibri" pitchFamily="34" charset="0"/>
-                <a:ea typeface="Calibri" pitchFamily="34" charset="-122"/>
-                <a:cs typeface="Calibri" pitchFamily="34" charset="-120"/>
-              </a:rPr>
               <a:t>LOGBOOK</a:t>
             </a:r>
             <a:endParaRPr lang="en-US" sz="1400" dirty="0"/>
@@ -19445,7 +19898,7 @@
       </p:sp>
       <p:graphicFrame>
         <p:nvGraphicFramePr>
-          <p:cNvPr id="51" name="Table 0"/>
+          <p:cNvPr id="52" name="Table 0"/>
           <p:cNvGraphicFramePr>
             <a:graphicFrameLocks noGrp="1"/>
           </p:cNvGraphicFramePr>
@@ -20205,331 +20658,6 @@
             <a:pPr algn="ctr"/>
             <a:fld id="{F7021451-1387-4CA6-816F-3879F97B5CBC}" type="slidenum">
               <a:rPr b="1" lang="en-US"/>
-              <a:t>50</a:t>
-            </a:fld>
-            <a:endParaRPr lang="en-US"/>
-          </a:p>
-        </p:txBody>
-      </p:sp>
-    </p:spTree>
-  </p:cSld>
-  <p:clrMapOvr>
-    <a:masterClrMapping/>
-  </p:clrMapOvr>
-</p:sld>
-</file>
-
-<file path=ppt/slides/slide51.xml><?xml version="1.0" encoding="utf-8"?>
-<p:sld xmlns:a="http://schemas.openxmlformats.org/drawingml/2006/main" xmlns:r="http://schemas.openxmlformats.org/officeDocument/2006/relationships" xmlns:p="http://schemas.openxmlformats.org/presentationml/2006/main">
-  <p:cSld name="Slide 51">
-    <p:spTree>
-      <p:nvGrpSpPr>
-        <p:cNvPr id="1" name=""/>
-        <p:cNvGrpSpPr/>
-        <p:nvPr/>
-      </p:nvGrpSpPr>
-      <p:grpSpPr>
-        <a:xfrm>
-          <a:off x="0" y="0"/>
-          <a:ext cx="0" cy="0"/>
-          <a:chOff x="0" y="0"/>
-          <a:chExt cx="0" cy="0"/>
-        </a:xfrm>
-      </p:grpSpPr>
-      <p:sp>
-        <p:nvSpPr>
-          <p:cNvPr id="2" name="Text 0"/>
-          <p:cNvSpPr/>
-          <p:nvPr/>
-        </p:nvSpPr>
-        <p:spPr>
-          <a:xfrm>
-            <a:off x="457200" y="713232"/>
-            <a:ext cx="11368735" cy="274320"/>
-          </a:xfrm>
-          <a:prstGeom prst="rect">
-            <a:avLst/>
-          </a:prstGeom>
-          <a:noFill/>
-          <a:ln/>
-        </p:spPr>
-        <p:txBody>
-          <a:bodyPr wrap="square" lIns="0" tIns="0" rIns="0" bIns="0" rtlCol="0" anchor="ctr"/>
-          <a:lstStyle/>
-          <a:p>
-            <a:pPr algn="r" indent="0" marL="0">
-              <a:buNone/>
-            </a:pPr>
-            <a:r>
-              <a:rPr lang="en-US" sz="1400" b="1" dirty="0">
-                <a:solidFill>
-                  <a:srgbClr val="1C3F6E"/>
-                </a:solidFill>
-                <a:latin typeface="Calibri" pitchFamily="34" charset="0"/>
-                <a:ea typeface="Calibri" pitchFamily="34" charset="-122"/>
-                <a:cs typeface="Calibri" pitchFamily="34" charset="-120"/>
-              </a:rPr>
-              <a:t>TEACHER'S NOTE</a:t>
-            </a:r>
-            <a:endParaRPr lang="en-US" sz="1400" dirty="0"/>
-          </a:p>
-        </p:txBody>
-      </p:sp>
-      <p:pic>
-        <p:nvPicPr>
-          <p:cNvPr id="3" name="Image 0" descr="/home/claude/f4/img/minesec_sheet.png">    </p:cNvPr>
-          <p:cNvPicPr>
-            <a:picLocks noChangeAspect="1"/>
-          </p:cNvPicPr>
-          <p:nvPr/>
-        </p:nvPicPr>
-        <p:blipFill>
-          <a:blip r:embed="rId1"/>
-          <a:stretch>
-            <a:fillRect/>
-          </a:stretch>
-        </p:blipFill>
-        <p:spPr>
-          <a:xfrm>
-            <a:off x="0" y="658368"/>
-            <a:ext cx="2468880" cy="5833872"/>
-          </a:xfrm>
-          <a:prstGeom prst="rect">
-            <a:avLst/>
-          </a:prstGeom>
-        </p:spPr>
-      </p:pic>
-      <p:sp>
-        <p:nvSpPr>
-          <p:cNvPr id="4" name="Text 1"/>
-          <p:cNvSpPr/>
-          <p:nvPr/>
-        </p:nvSpPr>
-        <p:spPr>
-          <a:xfrm>
-            <a:off x="2697480" y="1005840"/>
-            <a:ext cx="9174175" cy="731520"/>
-          </a:xfrm>
-          <a:prstGeom prst="rect">
-            <a:avLst/>
-          </a:prstGeom>
-          <a:noFill/>
-          <a:ln/>
-        </p:spPr>
-        <p:txBody>
-          <a:bodyPr wrap="square" lIns="0" tIns="0" rIns="0" bIns="0" rtlCol="0" anchor="ctr">
-            <a:normAutofit/>
-          </a:bodyPr>
-          <a:lstStyle/>
-          <a:p>
-            <a:pPr algn="ctr" indent="0" marL="0">
-              <a:buNone/>
-            </a:pPr>
-            <a:r>
-              <a:rPr lang="en-US" sz="3600" b="1" dirty="0">
-                <a:solidFill>
-                  <a:srgbClr val="990011"/>
-                </a:solidFill>
-                <a:latin typeface="Times New Roman" pitchFamily="34" charset="0"/>
-                <a:ea typeface="Times New Roman" pitchFamily="34" charset="-122"/>
-                <a:cs typeface="Times New Roman" pitchFamily="34" charset="-120"/>
-              </a:rPr>
-              <a:t>Teacher's Note</a:t>
-            </a:r>
-            <a:endParaRPr lang="en-US" sz="3600" dirty="0"/>
-          </a:p>
-        </p:txBody>
-      </p:sp>
-      <p:sp>
-        <p:nvSpPr>
-          <p:cNvPr id="5" name="Text 2"/>
-          <p:cNvSpPr/>
-          <p:nvPr/>
-        </p:nvSpPr>
-        <p:spPr>
-          <a:xfrm>
-            <a:off x="2697480" y="1783080"/>
-            <a:ext cx="9174175" cy="4663440"/>
-          </a:xfrm>
-          <a:prstGeom prst="rect">
-            <a:avLst/>
-          </a:prstGeom>
-          <a:noFill/>
-          <a:ln/>
-        </p:spPr>
-        <p:txBody>
-          <a:bodyPr wrap="square" lIns="0" tIns="0" rIns="0" bIns="0" rtlCol="0" anchor="t"/>
-          <a:lstStyle/>
-          <a:p>
-            <a:pPr algn="l" marL="342900" indent="-342900">
-              <a:spcAft>
-                <a:spcPts val="800"/>
-              </a:spcAft>
-              <a:buSzPct val="100000"/>
-              <a:buChar char="•"/>
-            </a:pPr>
-            <a:r>
-              <a:rPr lang="en-US" sz="2000" dirty="0">
-                <a:solidFill>
-                  <a:srgbClr val="111111"/>
-                </a:solidFill>
-                <a:latin typeface="Calibri" pitchFamily="34" charset="0"/>
-                <a:ea typeface="Calibri" pitchFamily="34" charset="-122"/>
-                <a:cs typeface="Calibri" pitchFamily="34" charset="-120"/>
-              </a:rPr>
-              <a:t>Timing: Homework correction, plan, objectives 8 min | Recall, situation, action 10 min | 5 activities 30 min | Board summary (copying) 30 min | Evaluation, remediation 10 min | Homework, next lesson 5 min | Logbook 7 min</a:t>
-            </a:r>
-            <a:endParaRPr lang="en-US" sz="2000" dirty="0"/>
-          </a:p>
-          <a:p>
-            <a:pPr algn="l" marL="342900" indent="-342900">
-              <a:spcAft>
-                <a:spcPts val="800"/>
-              </a:spcAft>
-              <a:buSzPct val="100000"/>
-              <a:buChar char="•"/>
-            </a:pPr>
-            <a:r>
-              <a:rPr lang="en-US" sz="2000" dirty="0">
-                <a:solidFill>
-                  <a:srgbClr val="111111"/>
-                </a:solidFill>
-                <a:latin typeface="Calibri" pitchFamily="34" charset="0"/>
-                <a:ea typeface="Calibri" pitchFamily="34" charset="-122"/>
-                <a:cs typeface="Calibri" pitchFamily="34" charset="-120"/>
-              </a:rPr>
-              <a:t>Without the projector (Activity 1): draw the bands of vegetation on the board.</a:t>
-            </a:r>
-            <a:endParaRPr lang="en-US" sz="2000" dirty="0"/>
-          </a:p>
-          <a:p>
-            <a:pPr algn="l" marL="342900" indent="-342900">
-              <a:spcAft>
-                <a:spcPts val="800"/>
-              </a:spcAft>
-              <a:buSzPct val="100000"/>
-              <a:buChar char="•"/>
-            </a:pPr>
-            <a:r>
-              <a:rPr lang="en-US" sz="2000" dirty="0">
-                <a:solidFill>
-                  <a:srgbClr val="111111"/>
-                </a:solidFill>
-                <a:latin typeface="Calibri" pitchFamily="34" charset="0"/>
-                <a:ea typeface="Calibri" pitchFamily="34" charset="-122"/>
-                <a:cs typeface="Calibri" pitchFamily="34" charset="-120"/>
-              </a:rPr>
-              <a:t>Without the projector (Activity 2): compare the forest of the South with the savanna of Garoua.</a:t>
-            </a:r>
-            <a:endParaRPr lang="en-US" sz="2000" dirty="0"/>
-          </a:p>
-          <a:p>
-            <a:pPr algn="l" marL="342900" indent="-342900">
-              <a:spcAft>
-                <a:spcPts val="800"/>
-              </a:spcAft>
-              <a:buSzPct val="100000"/>
-              <a:buChar char="•"/>
-            </a:pPr>
-            <a:r>
-              <a:rPr lang="en-US" sz="2000" dirty="0">
-                <a:solidFill>
-                  <a:srgbClr val="111111"/>
-                </a:solidFill>
-                <a:latin typeface="Calibri" pitchFamily="34" charset="0"/>
-                <a:ea typeface="Calibri" pitchFamily="34" charset="-122"/>
-                <a:cs typeface="Calibri" pitchFamily="34" charset="-120"/>
-              </a:rPr>
-              <a:t>Without the projector (Activity 3): draw the four rivers on a sketch of Africa.</a:t>
-            </a:r>
-            <a:endParaRPr lang="en-US" sz="2000" dirty="0"/>
-          </a:p>
-          <a:p>
-            <a:pPr algn="l" marL="342900" indent="-342900">
-              <a:spcAft>
-                <a:spcPts val="800"/>
-              </a:spcAft>
-              <a:buSzPct val="100000"/>
-              <a:buChar char="•"/>
-            </a:pPr>
-            <a:r>
-              <a:rPr lang="en-US" sz="2000" dirty="0">
-                <a:solidFill>
-                  <a:srgbClr val="111111"/>
-                </a:solidFill>
-                <a:latin typeface="Calibri" pitchFamily="34" charset="0"/>
-                <a:ea typeface="Calibri" pitchFamily="34" charset="-122"/>
-                <a:cs typeface="Calibri" pitchFamily="34" charset="-120"/>
-              </a:rPr>
-              <a:t>Without the projector (Activity 4): ask learners where the Benue flows after Garoua.</a:t>
-            </a:r>
-            <a:endParaRPr lang="en-US" sz="2000" dirty="0"/>
-          </a:p>
-          <a:p>
-            <a:pPr algn="l" marL="342900" indent="-342900">
-              <a:spcAft>
-                <a:spcPts val="800"/>
-              </a:spcAft>
-              <a:buSzPct val="100000"/>
-              <a:buChar char="•"/>
-            </a:pPr>
-            <a:r>
-              <a:rPr lang="en-US" sz="2000" dirty="0">
-                <a:solidFill>
-                  <a:srgbClr val="111111"/>
-                </a:solidFill>
-                <a:latin typeface="Calibri" pitchFamily="34" charset="0"/>
-                <a:ea typeface="Calibri" pitchFamily="34" charset="-122"/>
-                <a:cs typeface="Calibri" pitchFamily="34" charset="-120"/>
-              </a:rPr>
-              <a:t>Without the projector (Activity 5): draw a big lake and a small lake on the board.</a:t>
-            </a:r>
-            <a:endParaRPr lang="en-US" sz="2000" dirty="0"/>
-          </a:p>
-        </p:txBody>
-      </p:sp>
-      <p:sp>
-        <p:nvSpPr>
-          <p:cNvPr id="25" name="Slide Number Placeholder 0"/>
-          <p:cNvSpPr>
-            <a:spLocks noGrp="1"/>
-          </p:cNvSpPr>
-          <p:nvPr>
-            <p:ph type="sldNum" sz="quarter" idx="4294967295"/>
-          </p:nvPr>
-        </p:nvSpPr>
-        <p:spPr>
-          <a:xfrm>
-            <a:off x="27432" y="91440"/>
-            <a:ext cx="585216" cy="475488"/>
-          </a:xfrm>
-          <a:prstGeom prst="rect">
-            <a:avLst/>
-          </a:prstGeom>
-          <a:extLst>
-            <a:ext uri="{C572A759-6A51-4108-AA02-DFA0A04FC94B}">
-              <ma14:wrappingTextBoxFlag xmlns:ma14="http://schemas.microsoft.com/office/mac/drawingml/2011/main" val="0"/>
-            </a:ext>
-          </a:extLst>
-        </p:spPr>
-        <p:txBody>
-          <a:bodyPr/>
-          <a:lstStyle>
-            <a:lvl1pPr>
-              <a:defRPr sz="2000">
-                <a:solidFill>
-                  <a:srgbClr val="FFFFFF"/>
-                </a:solidFill>
-                <a:latin typeface="Calibri"/>
-                <a:ea typeface="Calibri"/>
-                <a:cs typeface="Calibri"/>
-              </a:defRPr>
-            </a:lvl1pPr>
-          </a:lstStyle>
-          <a:p>
-            <a:pPr algn="ctr"/>
-            <a:fld id="{F7021451-1387-4CA6-816F-3879F97B5CBC}" type="slidenum">
-              <a:rPr b="1" lang="en-US"/>
               <a:t>51</a:t>
             </a:fld>
             <a:endParaRPr lang="en-US"/>
@@ -20594,7 +20722,7 @@
                 <a:ea typeface="Calibri" pitchFamily="34" charset="-122"/>
                 <a:cs typeface="Calibri" pitchFamily="34" charset="-120"/>
               </a:rPr>
-              <a:t>REFERENCES</a:t>
+              <a:t>TEACHER'S NOTE</a:t>
             </a:r>
             <a:endParaRPr lang="en-US" sz="1400" dirty="0"/>
           </a:p>
@@ -20617,7 +20745,7 @@
         <p:spPr>
           <a:xfrm>
             <a:off x="0" y="658368"/>
-            <a:ext cx="5120640" cy="5833872"/>
+            <a:ext cx="3840480" cy="5833872"/>
           </a:xfrm>
           <a:prstGeom prst="rect">
             <a:avLst/>
@@ -20632,8 +20760,8 @@
         </p:nvSpPr>
         <p:spPr>
           <a:xfrm>
-            <a:off x="5349240" y="1005840"/>
-            <a:ext cx="6522415" cy="731520"/>
+            <a:off x="4069080" y="1005840"/>
+            <a:ext cx="7802575" cy="731520"/>
           </a:xfrm>
           <a:prstGeom prst="rect">
             <a:avLst/>
@@ -20659,7 +20787,7 @@
                 <a:ea typeface="Times New Roman" pitchFamily="34" charset="-122"/>
                 <a:cs typeface="Times New Roman" pitchFamily="34" charset="-120"/>
               </a:rPr>
-              <a:t>References</a:t>
+              <a:t>Teacher's Note</a:t>
             </a:r>
             <a:endParaRPr lang="en-US" sz="3600" dirty="0"/>
           </a:p>
@@ -20673,8 +20801,8 @@
         </p:nvSpPr>
         <p:spPr>
           <a:xfrm>
-            <a:off x="5349240" y="1783080"/>
-            <a:ext cx="6522415" cy="4663440"/>
+            <a:off x="4069080" y="1783080"/>
+            <a:ext cx="7802575" cy="4663440"/>
           </a:xfrm>
           <a:prstGeom prst="rect">
             <a:avLst/>
@@ -20694,7 +20822,7 @@
               <a:buChar char="•"/>
             </a:pPr>
             <a:r>
-              <a:rPr lang="en-US" sz="1800" dirty="0">
+              <a:rPr lang="en-US" sz="2000" dirty="0">
                 <a:solidFill>
                   <a:srgbClr val="111111"/>
                 </a:solidFill>
@@ -20702,9 +20830,9 @@
                 <a:ea typeface="Calibri" pitchFamily="34" charset="-122"/>
                 <a:cs typeface="Calibri" pitchFamily="34" charset="-120"/>
               </a:rPr>
-              <a:t>Harmonised Progression Sheet, Economic Geography (5051), Form 2.</a:t>
-            </a:r>
-            <a:endParaRPr lang="en-US" sz="1800" dirty="0"/>
+              <a:t>Timing: Homework correction, plan, objectives 8 min | Recall, situation, action 10 min | 5 activities 30 min | Board summary (copying) 30 min | Evaluation, remediation 10 min | Homework, next lesson 5 min | Logbook 7 min</a:t>
+            </a:r>
+            <a:endParaRPr lang="en-US" sz="2000" dirty="0"/>
           </a:p>
           <a:p>
             <a:pPr algn="l" marL="342900" indent="-342900">
@@ -20715,7 +20843,7 @@
               <a:buChar char="•"/>
             </a:pPr>
             <a:r>
-              <a:rPr lang="en-US" sz="1800" dirty="0">
+              <a:rPr lang="en-US" sz="2000" dirty="0">
                 <a:solidFill>
                   <a:srgbClr val="111111"/>
                 </a:solidFill>
@@ -20723,9 +20851,9 @@
                 <a:ea typeface="Calibri" pitchFamily="34" charset="-122"/>
                 <a:cs typeface="Calibri" pitchFamily="34" charset="-120"/>
               </a:rPr>
-              <a:t>Photo, Activity 2: “Amazon 11” by CIAT International Center for Tropical Agriculture, CC BY-SA 2.0, via Flickr (https://www.flickr.com/photos/38476503@N08/5641587148)</a:t>
-            </a:r>
-            <a:endParaRPr lang="en-US" sz="1800" dirty="0"/>
+              <a:t>Without the projector (Activity 1): draw vegetation belts.</a:t>
+            </a:r>
+            <a:endParaRPr lang="en-US" sz="2000" dirty="0"/>
           </a:p>
           <a:p>
             <a:pPr algn="l" marL="342900" indent="-342900">
@@ -20736,7 +20864,7 @@
               <a:buChar char="•"/>
             </a:pPr>
             <a:r>
-              <a:rPr lang="en-US" sz="1800" dirty="0">
+              <a:rPr lang="en-US" sz="2000" dirty="0">
                 <a:solidFill>
                   <a:srgbClr val="111111"/>
                 </a:solidFill>
@@ -20744,9 +20872,9 @@
                 <a:ea typeface="Calibri" pitchFamily="34" charset="-122"/>
                 <a:cs typeface="Calibri" pitchFamily="34" charset="-120"/>
               </a:rPr>
-              <a:t>Photo, Activity 4: “Niamey, Niger” by LenDog64, CC BY-ND 2.0, via Flickr (https://www.flickr.com/photos/45968460@N03/4422209893)</a:t>
-            </a:r>
-            <a:endParaRPr lang="en-US" sz="1800" dirty="0"/>
+              <a:t>Without the projector (Activity 2): describe the forest of the South.</a:t>
+            </a:r>
+            <a:endParaRPr lang="en-US" sz="2000" dirty="0"/>
           </a:p>
           <a:p>
             <a:pPr algn="l" marL="342900" indent="-342900">
@@ -20757,7 +20885,7 @@
               <a:buChar char="•"/>
             </a:pPr>
             <a:r>
-              <a:rPr lang="en-US" sz="1800" dirty="0">
+              <a:rPr lang="en-US" sz="2000" dirty="0">
                 <a:solidFill>
                   <a:srgbClr val="111111"/>
                 </a:solidFill>
@@ -20765,9 +20893,9 @@
                 <a:ea typeface="Calibri" pitchFamily="34" charset="-122"/>
                 <a:cs typeface="Calibri" pitchFamily="34" charset="-120"/>
               </a:rPr>
-              <a:t>Photo, Activity 5: “Lake Chad: almost gone” by GRIDArendal, CC BY-NC-SA 2.0, via Flickr (https://www.flickr.com/photos/148768555@N05/32323646926)</a:t>
-            </a:r>
-            <a:endParaRPr lang="en-US" sz="1800" dirty="0"/>
+              <a:t>Without the projector (Activity 3): draw rivers on a map.</a:t>
+            </a:r>
+            <a:endParaRPr lang="en-US" sz="2000" dirty="0"/>
           </a:p>
           <a:p>
             <a:pPr algn="l" marL="342900" indent="-342900">
@@ -20778,7 +20906,7 @@
               <a:buChar char="•"/>
             </a:pPr>
             <a:r>
-              <a:rPr lang="en-US" sz="1800" dirty="0">
+              <a:rPr lang="en-US" sz="2000" dirty="0">
                 <a:solidFill>
                   <a:srgbClr val="111111"/>
                 </a:solidFill>
@@ -20786,9 +20914,30 @@
                 <a:ea typeface="Calibri" pitchFamily="34" charset="-122"/>
                 <a:cs typeface="Calibri" pitchFamily="34" charset="-120"/>
               </a:rPr>
-              <a:t>Diagrams and animations: drawn for this lesson (Geography Department).</a:t>
-            </a:r>
-            <a:endParaRPr lang="en-US" sz="1800" dirty="0"/>
+              <a:t>Without the projector (Activity 4): describe the Benue.</a:t>
+            </a:r>
+            <a:endParaRPr lang="en-US" sz="2000" dirty="0"/>
+          </a:p>
+          <a:p>
+            <a:pPr algn="l" marL="342900" indent="-342900">
+              <a:spcAft>
+                <a:spcPts val="800"/>
+              </a:spcAft>
+              <a:buSzPct val="100000"/>
+              <a:buChar char="•"/>
+            </a:pPr>
+            <a:r>
+              <a:rPr lang="en-US" sz="2000" dirty="0">
+                <a:solidFill>
+                  <a:srgbClr val="111111"/>
+                </a:solidFill>
+                <a:latin typeface="Calibri" pitchFamily="34" charset="0"/>
+                <a:ea typeface="Calibri" pitchFamily="34" charset="-122"/>
+                <a:cs typeface="Calibri" pitchFamily="34" charset="-120"/>
+              </a:rPr>
+              <a:t>Without the projector (Activity 5): show Lake Chad on a map.</a:t>
+            </a:r>
+            <a:endParaRPr lang="en-US" sz="2000" dirty="0"/>
           </a:p>
         </p:txBody>
       </p:sp>
@@ -20835,6 +20984,310 @@
             <a:fld id="{F7021451-1387-4CA6-816F-3879F97B5CBC}" type="slidenum">
               <a:rPr b="1" lang="en-US"/>
               <a:t>52</a:t>
+            </a:fld>
+            <a:endParaRPr lang="en-US"/>
+          </a:p>
+        </p:txBody>
+      </p:sp>
+    </p:spTree>
+  </p:cSld>
+  <p:clrMapOvr>
+    <a:masterClrMapping/>
+  </p:clrMapOvr>
+</p:sld>
+</file>
+
+<file path=ppt/slides/slide53.xml><?xml version="1.0" encoding="utf-8"?>
+<p:sld xmlns:a="http://schemas.openxmlformats.org/drawingml/2006/main" xmlns:r="http://schemas.openxmlformats.org/officeDocument/2006/relationships" xmlns:p="http://schemas.openxmlformats.org/presentationml/2006/main">
+  <p:cSld name="Slide 53">
+    <p:spTree>
+      <p:nvGrpSpPr>
+        <p:cNvPr id="1" name=""/>
+        <p:cNvGrpSpPr/>
+        <p:nvPr/>
+      </p:nvGrpSpPr>
+      <p:grpSpPr>
+        <a:xfrm>
+          <a:off x="0" y="0"/>
+          <a:ext cx="0" cy="0"/>
+          <a:chOff x="0" y="0"/>
+          <a:chExt cx="0" cy="0"/>
+        </a:xfrm>
+      </p:grpSpPr>
+      <p:sp>
+        <p:nvSpPr>
+          <p:cNvPr id="2" name="Text 0"/>
+          <p:cNvSpPr/>
+          <p:nvPr/>
+        </p:nvSpPr>
+        <p:spPr>
+          <a:xfrm>
+            <a:off x="457200" y="713232"/>
+            <a:ext cx="11368735" cy="274320"/>
+          </a:xfrm>
+          <a:prstGeom prst="rect">
+            <a:avLst/>
+          </a:prstGeom>
+          <a:noFill/>
+          <a:ln/>
+        </p:spPr>
+        <p:txBody>
+          <a:bodyPr wrap="square" lIns="0" tIns="0" rIns="0" bIns="0" rtlCol="0" anchor="ctr"/>
+          <a:lstStyle/>
+          <a:p>
+            <a:pPr algn="r" indent="0" marL="0">
+              <a:buNone/>
+            </a:pPr>
+            <a:r>
+              <a:rPr lang="en-US" sz="1400" b="1" dirty="0">
+                <a:solidFill>
+                  <a:srgbClr val="1C3F6E"/>
+                </a:solidFill>
+                <a:latin typeface="Calibri" pitchFamily="34" charset="0"/>
+                <a:ea typeface="Calibri" pitchFamily="34" charset="-122"/>
+                <a:cs typeface="Calibri" pitchFamily="34" charset="-120"/>
+              </a:rPr>
+              <a:t>REFERENCES</a:t>
+            </a:r>
+            <a:endParaRPr lang="en-US" sz="1400" dirty="0"/>
+          </a:p>
+        </p:txBody>
+      </p:sp>
+      <p:pic>
+        <p:nvPicPr>
+          <p:cNvPr id="3" name="Image 0" descr="/home/claude/f4/img/minesec_sheet.png">    </p:cNvPr>
+          <p:cNvPicPr>
+            <a:picLocks noChangeAspect="1"/>
+          </p:cNvPicPr>
+          <p:nvPr/>
+        </p:nvPicPr>
+        <p:blipFill>
+          <a:blip r:embed="rId1"/>
+          <a:stretch>
+            <a:fillRect/>
+          </a:stretch>
+        </p:blipFill>
+        <p:spPr>
+          <a:xfrm>
+            <a:off x="0" y="658368"/>
+            <a:ext cx="5120640" cy="5833872"/>
+          </a:xfrm>
+          <a:prstGeom prst="rect">
+            <a:avLst/>
+          </a:prstGeom>
+        </p:spPr>
+      </p:pic>
+      <p:sp>
+        <p:nvSpPr>
+          <p:cNvPr id="4" name="Text 1"/>
+          <p:cNvSpPr/>
+          <p:nvPr/>
+        </p:nvSpPr>
+        <p:spPr>
+          <a:xfrm>
+            <a:off x="5349240" y="1005840"/>
+            <a:ext cx="6522415" cy="731520"/>
+          </a:xfrm>
+          <a:prstGeom prst="rect">
+            <a:avLst/>
+          </a:prstGeom>
+          <a:noFill/>
+          <a:ln/>
+        </p:spPr>
+        <p:txBody>
+          <a:bodyPr wrap="square" lIns="0" tIns="0" rIns="0" bIns="0" rtlCol="0" anchor="ctr">
+            <a:normAutofit/>
+          </a:bodyPr>
+          <a:lstStyle/>
+          <a:p>
+            <a:pPr algn="ctr" indent="0" marL="0">
+              <a:buNone/>
+            </a:pPr>
+            <a:r>
+              <a:rPr lang="en-US" sz="3600" b="1" dirty="0">
+                <a:solidFill>
+                  <a:srgbClr val="990011"/>
+                </a:solidFill>
+                <a:latin typeface="Times New Roman" pitchFamily="34" charset="0"/>
+                <a:ea typeface="Times New Roman" pitchFamily="34" charset="-122"/>
+                <a:cs typeface="Times New Roman" pitchFamily="34" charset="-120"/>
+              </a:rPr>
+              <a:t>References</a:t>
+            </a:r>
+            <a:endParaRPr lang="en-US" sz="3600" dirty="0"/>
+          </a:p>
+        </p:txBody>
+      </p:sp>
+      <p:sp>
+        <p:nvSpPr>
+          <p:cNvPr id="5" name="Text 2"/>
+          <p:cNvSpPr/>
+          <p:nvPr/>
+        </p:nvSpPr>
+        <p:spPr>
+          <a:xfrm>
+            <a:off x="5349240" y="1783080"/>
+            <a:ext cx="6522415" cy="4663440"/>
+          </a:xfrm>
+          <a:prstGeom prst="rect">
+            <a:avLst/>
+          </a:prstGeom>
+          <a:noFill/>
+          <a:ln/>
+        </p:spPr>
+        <p:txBody>
+          <a:bodyPr wrap="square" lIns="0" tIns="0" rIns="0" bIns="0" rtlCol="0" anchor="t"/>
+          <a:lstStyle/>
+          <a:p>
+            <a:pPr algn="l" marL="342900" indent="-342900">
+              <a:spcAft>
+                <a:spcPts val="800"/>
+              </a:spcAft>
+              <a:buSzPct val="100000"/>
+              <a:buChar char="•"/>
+            </a:pPr>
+            <a:r>
+              <a:rPr lang="en-US" sz="1800" dirty="0">
+                <a:solidFill>
+                  <a:srgbClr val="111111"/>
+                </a:solidFill>
+                <a:latin typeface="Calibri" pitchFamily="34" charset="0"/>
+                <a:ea typeface="Calibri" pitchFamily="34" charset="-122"/>
+                <a:cs typeface="Calibri" pitchFamily="34" charset="-120"/>
+              </a:rPr>
+              <a:t>Harmonised Progression Sheet, Economic Geography (5051), Form 2.</a:t>
+            </a:r>
+            <a:endParaRPr lang="en-US" sz="1800" dirty="0"/>
+          </a:p>
+          <a:p>
+            <a:pPr algn="l" marL="342900" indent="-342900">
+              <a:spcAft>
+                <a:spcPts val="800"/>
+              </a:spcAft>
+              <a:buSzPct val="100000"/>
+              <a:buChar char="•"/>
+            </a:pPr>
+            <a:r>
+              <a:rPr lang="en-US" sz="1800" dirty="0">
+                <a:solidFill>
+                  <a:srgbClr val="111111"/>
+                </a:solidFill>
+                <a:latin typeface="Calibri" pitchFamily="34" charset="0"/>
+                <a:ea typeface="Calibri" pitchFamily="34" charset="-122"/>
+                <a:cs typeface="Calibri" pitchFamily="34" charset="-120"/>
+              </a:rPr>
+              <a:t>Photo, Activity 2: “Amazon 11” by CIAT International Center for Tropical Agriculture, CC BY-SA 2.0, via Flickr (https://www.flickr.com/photos/38476503@N08/5641587148)</a:t>
+            </a:r>
+            <a:endParaRPr lang="en-US" sz="1800" dirty="0"/>
+          </a:p>
+          <a:p>
+            <a:pPr algn="l" marL="342900" indent="-342900">
+              <a:spcAft>
+                <a:spcPts val="800"/>
+              </a:spcAft>
+              <a:buSzPct val="100000"/>
+              <a:buChar char="•"/>
+            </a:pPr>
+            <a:r>
+              <a:rPr lang="en-US" sz="1800" dirty="0">
+                <a:solidFill>
+                  <a:srgbClr val="111111"/>
+                </a:solidFill>
+                <a:latin typeface="Calibri" pitchFamily="34" charset="0"/>
+                <a:ea typeface="Calibri" pitchFamily="34" charset="-122"/>
+                <a:cs typeface="Calibri" pitchFamily="34" charset="-120"/>
+              </a:rPr>
+              <a:t>Photo, Activity 4: “Niamey, Niger” by LenDog64, CC BY-ND 2.0, via Flickr (https://www.flickr.com/photos/45968460@N03/4422209893)</a:t>
+            </a:r>
+            <a:endParaRPr lang="en-US" sz="1800" dirty="0"/>
+          </a:p>
+          <a:p>
+            <a:pPr algn="l" marL="342900" indent="-342900">
+              <a:spcAft>
+                <a:spcPts val="800"/>
+              </a:spcAft>
+              <a:buSzPct val="100000"/>
+              <a:buChar char="•"/>
+            </a:pPr>
+            <a:r>
+              <a:rPr lang="en-US" sz="1800" dirty="0">
+                <a:solidFill>
+                  <a:srgbClr val="111111"/>
+                </a:solidFill>
+                <a:latin typeface="Calibri" pitchFamily="34" charset="0"/>
+                <a:ea typeface="Calibri" pitchFamily="34" charset="-122"/>
+                <a:cs typeface="Calibri" pitchFamily="34" charset="-120"/>
+              </a:rPr>
+              <a:t>Photo, Activity 5: “Lake Chad: almost gone” by GRIDArendal, CC BY-NC-SA 2.0, via Flickr (https://www.flickr.com/photos/148768555@N05/32323646926)</a:t>
+            </a:r>
+            <a:endParaRPr lang="en-US" sz="1800" dirty="0"/>
+          </a:p>
+          <a:p>
+            <a:pPr algn="l" marL="342900" indent="-342900">
+              <a:spcAft>
+                <a:spcPts val="800"/>
+              </a:spcAft>
+              <a:buSzPct val="100000"/>
+              <a:buChar char="•"/>
+            </a:pPr>
+            <a:r>
+              <a:rPr lang="en-US" sz="1800" dirty="0">
+                <a:solidFill>
+                  <a:srgbClr val="111111"/>
+                </a:solidFill>
+                <a:latin typeface="Calibri" pitchFamily="34" charset="0"/>
+                <a:ea typeface="Calibri" pitchFamily="34" charset="-122"/>
+                <a:cs typeface="Calibri" pitchFamily="34" charset="-120"/>
+              </a:rPr>
+              <a:t>Diagrams and animations: drawn for this lesson (Geography Department).</a:t>
+            </a:r>
+            <a:endParaRPr lang="en-US" sz="1800" dirty="0"/>
+          </a:p>
+        </p:txBody>
+      </p:sp>
+      <p:sp>
+        <p:nvSpPr>
+          <p:cNvPr id="25" name="Slide Number Placeholder 0"/>
+          <p:cNvSpPr>
+            <a:spLocks noGrp="1"/>
+          </p:cNvSpPr>
+          <p:nvPr>
+            <p:ph type="sldNum" sz="quarter" idx="4294967295"/>
+          </p:nvPr>
+        </p:nvSpPr>
+        <p:spPr>
+          <a:xfrm>
+            <a:off x="27432" y="91440"/>
+            <a:ext cx="585216" cy="475488"/>
+          </a:xfrm>
+          <a:prstGeom prst="rect">
+            <a:avLst/>
+          </a:prstGeom>
+          <a:extLst>
+            <a:ext uri="{C572A759-6A51-4108-AA02-DFA0A04FC94B}">
+              <ma14:wrappingTextBoxFlag xmlns:ma14="http://schemas.microsoft.com/office/mac/drawingml/2011/main" val="0"/>
+            </a:ext>
+          </a:extLst>
+        </p:spPr>
+        <p:txBody>
+          <a:bodyPr/>
+          <a:lstStyle>
+            <a:lvl1pPr>
+              <a:defRPr sz="2000">
+                <a:solidFill>
+                  <a:srgbClr val="FFFFFF"/>
+                </a:solidFill>
+                <a:latin typeface="Calibri"/>
+                <a:ea typeface="Calibri"/>
+                <a:cs typeface="Calibri"/>
+              </a:defRPr>
+            </a:lvl1pPr>
+          </a:lstStyle>
+          <a:p>
+            <a:pPr algn="ctr"/>
+            <a:fld id="{F7021451-1387-4CA6-816F-3879F97B5CBC}" type="slidenum">
+              <a:rPr b="1" lang="en-US"/>
+              <a:t>53</a:t>
             </a:fld>
             <a:endParaRPr lang="en-US"/>
           </a:p>

--- a/lecons/F2T/28_S22_L6_P3_Africa_Vegetation_Drainage.pptx
+++ b/lecons/F2T/28_S22_L6_P3_Africa_Vegetation_Drainage.pptx
@@ -3370,7 +3370,7 @@
           <a:p>
             <a:r>
               <a:rPr lang="en-US" dirty="0"/>
-              <a:t>Let us copy Drainage. Africa has the following main rivers and lakes. Copy the point on The Nile on the left, then draw the diagram on the right: the rivers and lakes of Africa. Give it a title and label it clearly.</a:t>
+              <a:t>Let us copy Drainage. The main rivers and lakes of Africa and their importance are the following. Copy the point on The Nile on the left, then draw the diagram on the right: the rivers and lakes of Africa. Give it a title and label it clearly.</a:t>
             </a:r>
             <a:endParaRPr lang="en-US" dirty="0"/>
           </a:p>
@@ -14812,7 +14812,7 @@
                 <a:ea typeface="Times New Roman" pitchFamily="34" charset="-122"/>
                 <a:cs typeface="Times New Roman" pitchFamily="34" charset="-120"/>
               </a:rPr>
-              <a:t>Africa has the following main rivers and lakes:</a:t>
+              <a:t>The main rivers and lakes of Africa and their importance are the following:</a:t>
             </a:r>
             <a:endParaRPr lang="en-US" sz="3600" dirty="0"/>
           </a:p>

--- a/lecons/F2T/28_S22_L6_P3_Africa_Vegetation_Drainage.pptx
+++ b/lecons/F2T/28_S22_L6_P3_Africa_Vegetation_Drainage.pptx
@@ -3458,7 +3458,7 @@
           <a:p>
             <a:r>
               <a:rPr lang="en-US" dirty="0"/>
-              <a:t>Before we start the new lesson, let us correct the homework I gave you at the end of Lesson 6 (Part 2): Africa: Climate, Soils and Relief of Africa. The question was: Look at a map of Africa and write the names of three big rivers. Say into which ocean or sea each one flows. Take out your exercise books.</a:t>
+              <a:t>Before we start the new lesson, let us correct the homework I gave you at the end of Lesson 6 (Part 2): Africa: Climate, Soils and Relief of Africa. The question was: Name three big rivers of Africa. Take out your exercise books.</a:t>
             </a:r>
             <a:endParaRPr lang="en-US" dirty="0"/>
           </a:p>
@@ -4250,7 +4250,7 @@
           <a:p>
             <a:r>
               <a:rPr lang="en-US" dirty="0"/>
-              <a:t>For your homework: Revise Lesson 6 on Africa. Draw a simple map of Africa and mark the Equator, the Nile, the Congo, the Niger, Lake Victoria and Cameroon. We shall correct it at the beginning of our next lesson.</a:t>
+              <a:t>For your homework: Name the three vegetation zones of Africa that we studied. We shall correct it at the beginning of our next lesson.</a:t>
             </a:r>
             <a:endParaRPr lang="en-US" dirty="0"/>
           </a:p>
@@ -4426,7 +4426,7 @@
           <a:p>
             <a:r>
               <a:rPr lang="en-US" dirty="0"/>
-              <a:t>Here is a good answer. Examples: the Nile flows into the Mediterranean Sea; the Congo flows into the Atlantic Ocean; the Niger flows into the Atlantic Ocean (Gulf of Guinea); the Zambezi flows into the Indian Ocean. Compare it with your own answer and correct your work in red.</a:t>
+              <a:t>Here is a good answer. The Nile, the Congo and the Niger (also the Zambezi). Compare it with your own answer and correct your work in red.</a:t>
             </a:r>
             <a:endParaRPr lang="en-US" dirty="0"/>
           </a:p>
@@ -15153,7 +15153,7 @@
                 <a:ea typeface="Times New Roman" pitchFamily="34" charset="-122"/>
                 <a:cs typeface="Times New Roman" pitchFamily="34" charset="-120"/>
               </a:rPr>
-              <a:t>Look at a map of Africa and write the names of three big rivers. Say into which ocean or sea each one flows.</a:t>
+              <a:t>Name three big rivers of Africa.</a:t>
             </a:r>
             <a:endParaRPr lang="en-US" sz="4000" dirty="0"/>
           </a:p>
@@ -17364,7 +17364,7 @@
                 <a:ea typeface="Times New Roman" pitchFamily="34" charset="-122"/>
                 <a:cs typeface="Times New Roman" pitchFamily="34" charset="-120"/>
               </a:rPr>
-              <a:t>Revise Lesson 6 on Africa. Draw a simple map of Africa and mark the Equator, the Nile, the Congo, the Niger, Lake Victoria and Cameroon.</a:t>
+              <a:t>Name the three vegetation zones of Africa that we studied.</a:t>
             </a:r>
             <a:endParaRPr lang="en-US" sz="4000" dirty="0"/>
           </a:p>
@@ -18922,7 +18922,7 @@
         <p:spPr>
           <a:xfrm>
             <a:off x="0" y="658368"/>
-            <a:ext cx="3840480" cy="5833872"/>
+            <a:ext cx="5120640" cy="5833872"/>
           </a:xfrm>
           <a:prstGeom prst="rect">
             <a:avLst/>
@@ -18937,8 +18937,8 @@
         </p:nvSpPr>
         <p:spPr>
           <a:xfrm>
-            <a:off x="4069080" y="1005840"/>
-            <a:ext cx="7802575" cy="731520"/>
+            <a:off x="5349240" y="1005840"/>
+            <a:ext cx="6522415" cy="731520"/>
           </a:xfrm>
           <a:prstGeom prst="rect">
             <a:avLst/>
@@ -18978,8 +18978,8 @@
         </p:nvSpPr>
         <p:spPr>
           <a:xfrm>
-            <a:off x="4069080" y="1783080"/>
-            <a:ext cx="7802575" cy="4663440"/>
+            <a:off x="5349240" y="1783080"/>
+            <a:ext cx="6522415" cy="4663440"/>
           </a:xfrm>
           <a:prstGeom prst="rect">
             <a:avLst/>
@@ -19006,7 +19006,7 @@
                 <a:ea typeface="Times New Roman" pitchFamily="34" charset="-122"/>
                 <a:cs typeface="Times New Roman" pitchFamily="34" charset="-120"/>
               </a:rPr>
-              <a:t>Examples: the Nile flows into the Mediterranean Sea; the Congo flows into the Atlantic Ocean; the Niger flows into the Atlantic Ocean (Gulf of Guinea); the Zambezi flows into the Indian Ocean.</a:t>
+              <a:t>The Nile, the Congo and the Niger (also the Zambezi).</a:t>
             </a:r>
             <a:endParaRPr lang="en-US" sz="4000" dirty="0"/>
           </a:p>
@@ -20284,7 +20284,7 @@
                           <a:ea typeface="Calibri" pitchFamily="34" charset="-122"/>
                           <a:cs typeface="Calibri" pitchFamily="34" charset="-120"/>
                         </a:rPr>
-                        <a:t>Revise Lesson 6 on Africa. Draw a simple map of Africa and mark the Equator, the Nile, the Congo, the Niger, Lake Victoria and Cameroon.</a:t>
+                        <a:t>Name the three vegetation zones of Africa that we studied.</a:t>
                       </a:r>
                       <a:endParaRPr lang="en-US" sz="1600" dirty="0">
                         <a:latin typeface="Calibri" charset="0"/>

--- a/lecons/F2T/28_S22_L6_P3_Africa_Vegetation_Drainage.pptx
+++ b/lecons/F2T/28_S22_L6_P3_Africa_Vegetation_Drainage.pptx
@@ -58,9 +58,10 @@
     <p:sldId id="306" r:id="rId52"/>
     <p:sldId id="307" r:id="rId53"/>
     <p:sldId id="308" r:id="rId54"/>
+    <p:sldId id="309" r:id="rId55"/>
   </p:sldIdLst>
   <p:notesMasterIdLst>
-    <p:notesMasterId r:id="rId55"/>
+    <p:notesMasterId r:id="rId56"/>
   </p:notesMasterIdLst>
   <p:sldSz cx="12192000" cy="6858000"/>
   <p:notesSz cx="6858000" cy="12192000"/>
@@ -3370,7 +3371,7 @@
           <a:p>
             <a:r>
               <a:rPr lang="en-US" dirty="0"/>
-              <a:t>Let us copy Drainage. The main rivers and lakes of Africa and their importance are the following. Copy the point on The Nile on the left, then draw the diagram on the right: the rivers and lakes of Africa. Give it a title and label it clearly.</a:t>
+              <a:t>Let us copy Main Rivers and Lakes. The main rivers and lakes of Africa are the following. Copy the point on The Nile on the left, then draw the diagram on the right: the rivers and lakes of Africa. Give it a title and label it clearly.</a:t>
             </a:r>
             <a:endParaRPr lang="en-US" dirty="0"/>
           </a:p>
@@ -3546,7 +3547,7 @@
           <a:p>
             <a:r>
               <a:rPr lang="en-US" dirty="0"/>
-              <a:t>We continue with Drainage. On this slide we have The Congo, The Niger and The Zambezi. Write each point on a new line, with the key term first, and explain it in your own words when we revise.</a:t>
+              <a:t>We continue with Main Rivers and Lakes. On this slide we have The Congo and The Niger and the Zambezi. Write each point on a new line, with the key term first, and explain it in your own words when we revise.</a:t>
             </a:r>
             <a:endParaRPr lang="en-US" dirty="0"/>
           </a:p>
@@ -3722,7 +3723,7 @@
           <a:p>
             <a:r>
               <a:rPr lang="en-US" dirty="0"/>
-              <a:t>We continue with Drainage. On this slide we have Importance. Write each point on a new line, with the key term first, and explain it in your own words when we revise.</a:t>
+              <a:t>Let us copy Importance. Rivers and lakes are important for the following reasons. On this slide we have Water supply, Fishing and Transport. Write each point on a new line, with the key term first, and explain it in your own words when we revise. When you finish, we go to the next slide.</a:t>
             </a:r>
             <a:endParaRPr lang="en-US" dirty="0"/>
           </a:p>
@@ -3810,7 +3811,7 @@
           <a:p>
             <a:r>
               <a:rPr lang="en-US" dirty="0"/>
-              <a:t>Now let us check what you have understood. Question 1: Which vegetation covers most of Africa? Answer in your exercise book.</a:t>
+              <a:t>We continue with Importance. On this slide we have Irrigation and electricity. Write each point on a new line, with the key term first, and explain it in your own words when we revise.</a:t>
             </a:r>
             <a:endParaRPr lang="en-US" dirty="0"/>
           </a:p>
@@ -3898,7 +3899,7 @@
           <a:p>
             <a:r>
               <a:rPr lang="en-US" dirty="0"/>
-              <a:t>The expected answer is: the savanna. If you got it right, well done.</a:t>
+              <a:t>Now let us check what you have understood. Question 1: Which vegetation covers most of Africa? Answer in your exercise book.</a:t>
             </a:r>
             <a:endParaRPr lang="en-US" dirty="0"/>
           </a:p>
@@ -3986,7 +3987,7 @@
           <a:p>
             <a:r>
               <a:rPr lang="en-US" dirty="0"/>
-              <a:t>Now let us check what you have understood. Question 2: The Benue is a tributary of which river? Answer in your exercise book.</a:t>
+              <a:t>The expected answer is: the savanna. If you got it right, well done.</a:t>
             </a:r>
             <a:endParaRPr lang="en-US" dirty="0"/>
           </a:p>
@@ -4074,7 +4075,7 @@
           <a:p>
             <a:r>
               <a:rPr lang="en-US" dirty="0"/>
-              <a:t>The expected answer is: the Niger. If you got it right, well done.</a:t>
+              <a:t>Now let us check what you have understood. Question 2: The Benue is a tributary of which river? Answer in your exercise book.</a:t>
             </a:r>
             <a:endParaRPr lang="en-US" dirty="0"/>
           </a:p>
@@ -4162,7 +4163,7 @@
           <a:p>
             <a:r>
               <a:rPr lang="en-US" dirty="0"/>
-              <a:t>For those who need more practice, fill in the blanks in your exercise book. The answers are: number 1, Nile; number 2, tributary; number 3, Chad.</a:t>
+              <a:t>The expected answer is: the Niger. If you got it right, well done.</a:t>
             </a:r>
             <a:endParaRPr lang="en-US" dirty="0"/>
           </a:p>
@@ -4250,7 +4251,7 @@
           <a:p>
             <a:r>
               <a:rPr lang="en-US" dirty="0"/>
-              <a:t>For your homework: Name the three vegetation zones of Africa that we studied. We shall correct it at the beginning of our next lesson.</a:t>
+              <a:t>For those who need more practice, fill in the blanks in your exercise book. The answers are: number 1, Nile; number 2, tributary; number 3, Chad.</a:t>
             </a:r>
             <a:endParaRPr lang="en-US" dirty="0"/>
           </a:p>
@@ -4338,7 +4339,7 @@
           <a:p>
             <a:r>
               <a:rPr lang="en-US" dirty="0"/>
-              <a:t>Let us play the bilingual game. I say a word in English, and you give me the French word. Then we do the reverse.</a:t>
+              <a:t>For your homework: Name the three vegetation zones of Africa that we studied. We shall correct it at the beginning of our next lesson.</a:t>
             </a:r>
             <a:endParaRPr lang="en-US" dirty="0"/>
           </a:p>
@@ -4514,7 +4515,7 @@
           <a:p>
             <a:r>
               <a:rPr lang="en-US" dirty="0"/>
-              <a:t>I record this information in the official logbook of the class after the lesson.</a:t>
+              <a:t>Let us play the bilingual game. I say a word in English, and you give me the French word. Then we do the reverse.</a:t>
             </a:r>
             <a:endParaRPr lang="en-US" dirty="0"/>
           </a:p>
@@ -4602,7 +4603,7 @@
           <a:p>
             <a:r>
               <a:rPr lang="en-US" dirty="0"/>
-              <a:t>I complete the second page of the logbook: the matter taught, the evaluation, the homework and the attendance.</a:t>
+              <a:t>I record this information in the official logbook of the class after the lesson.</a:t>
             </a:r>
             <a:endParaRPr lang="en-US" dirty="0"/>
           </a:p>
@@ -4690,7 +4691,7 @@
           <a:p>
             <a:r>
               <a:rPr lang="en-US" dirty="0"/>
-              <a:t>This slide is for me, the teacher: it gives the timing of the lesson and what to do if the projector is not available.</a:t>
+              <a:t>I complete the second page of the logbook: the matter taught, the evaluation, the homework and the attendance.</a:t>
             </a:r>
             <a:endParaRPr lang="en-US" dirty="0"/>
           </a:p>
@@ -4778,7 +4779,7 @@
           <a:p>
             <a:r>
               <a:rPr lang="en-US" dirty="0"/>
-              <a:t>These are the references and picture credits used to prepare this lesson.</a:t>
+              <a:t>This slide is for me, the teacher: it gives the timing of the lesson and what to do if the projector is not available.</a:t>
             </a:r>
             <a:endParaRPr lang="en-US" dirty="0"/>
           </a:p>
@@ -4802,6 +4803,94 @@
             <a:fld id="{F7021451-1387-4CA6-816F-3879F97B5CBC}" type="slidenum">
               <a:rPr lang="en-US"/>
               <a:t>53</a:t>
+            </a:fld>
+            <a:endParaRPr lang="en-US"/>
+          </a:p>
+        </p:txBody>
+      </p:sp>
+    </p:spTree>
+    <p:extLst>
+      <p:ext uri="{BB962C8B-B14F-4D97-AF65-F5344CB8AC3E}">
+        <p14:creationId xmlns:p14="http://schemas.microsoft.com/office/powerpoint/2010/main" val="1024086991"/>
+      </p:ext>
+    </p:extLst>
+  </p:cSld>
+  <p:clrMapOvr>
+    <a:masterClrMapping/>
+  </p:clrMapOvr>
+</p:notes>
+</file>
+
+<file path=ppt/notesSlides/notesSlide54.xml><?xml version="1.0" encoding="utf-8"?>
+<p:notes xmlns:a="http://schemas.openxmlformats.org/drawingml/2006/main" xmlns:r="http://schemas.openxmlformats.org/officeDocument/2006/relationships" xmlns:p="http://schemas.openxmlformats.org/presentationml/2006/main">
+  <p:cSld>
+    <p:spTree>
+      <p:nvGrpSpPr>
+        <p:cNvPr id="1" name=""/>
+        <p:cNvGrpSpPr/>
+        <p:nvPr/>
+      </p:nvGrpSpPr>
+      <p:grpSpPr>
+        <a:xfrm>
+          <a:off x="0" y="0"/>
+          <a:ext cx="0" cy="0"/>
+          <a:chOff x="0" y="0"/>
+          <a:chExt cx="0" cy="0"/>
+        </a:xfrm>
+      </p:grpSpPr>
+      <p:sp>
+        <p:nvSpPr>
+          <p:cNvPr id="2" name="Slide Image Placeholder 1"/>
+          <p:cNvSpPr>
+            <a:spLocks noGrp="1" noRot="1" noChangeAspect="1"/>
+          </p:cNvSpPr>
+          <p:nvPr>
+            <p:ph type="sldImg"/>
+          </p:nvPr>
+        </p:nvSpPr>
+        <p:spPr/>
+      </p:sp>
+      <p:sp>
+        <p:nvSpPr>
+          <p:cNvPr id="3" name="Notes Placeholder 2"/>
+          <p:cNvSpPr>
+            <a:spLocks noGrp="1"/>
+          </p:cNvSpPr>
+          <p:nvPr>
+            <p:ph type="body" idx="1"/>
+          </p:nvPr>
+        </p:nvSpPr>
+        <p:spPr/>
+        <p:txBody>
+          <a:bodyPr/>
+          <a:lstStyle/>
+          <a:p>
+            <a:r>
+              <a:rPr lang="en-US" dirty="0"/>
+              <a:t>These are the references and picture credits used to prepare this lesson.</a:t>
+            </a:r>
+            <a:endParaRPr lang="en-US" dirty="0"/>
+          </a:p>
+        </p:txBody>
+      </p:sp>
+      <p:sp>
+        <p:nvSpPr>
+          <p:cNvPr id="4" name="Slide Number Placeholder 3"/>
+          <p:cNvSpPr>
+            <a:spLocks noGrp="1"/>
+          </p:cNvSpPr>
+          <p:nvPr>
+            <p:ph type="sldNum" sz="quarter" idx="10"/>
+          </p:nvPr>
+        </p:nvSpPr>
+        <p:spPr/>
+        <p:txBody>
+          <a:bodyPr/>
+          <a:lstStyle/>
+          <a:p>
+            <a:fld id="{F7021451-1387-4CA6-816F-3879F97B5CBC}" type="slidenum">
+              <a:rPr lang="en-US"/>
+              <a:t>54</a:t>
             </a:fld>
             <a:endParaRPr lang="en-US"/>
           </a:p>
@@ -14784,8 +14873,49 @@
         </p:nvSpPr>
         <p:spPr>
           <a:xfrm>
-            <a:off x="365760" y="1783080"/>
-            <a:ext cx="4846320" cy="4617720"/>
+            <a:off x="365760" y="1737360"/>
+            <a:ext cx="5120640" cy="457200"/>
+          </a:xfrm>
+          <a:prstGeom prst="rect">
+            <a:avLst/>
+          </a:prstGeom>
+          <a:noFill/>
+          <a:ln/>
+        </p:spPr>
+        <p:txBody>
+          <a:bodyPr wrap="square" lIns="0" tIns="0" rIns="0" bIns="0" rtlCol="0" anchor="ctr">
+            <a:normAutofit/>
+          </a:bodyPr>
+          <a:lstStyle/>
+          <a:p>
+            <a:pPr algn="l" indent="0" marL="0">
+              <a:buNone/>
+            </a:pPr>
+            <a:r>
+              <a:rPr lang="en-US" sz="3000" b="1" dirty="0">
+                <a:solidFill>
+                  <a:srgbClr val="990011"/>
+                </a:solidFill>
+                <a:latin typeface="Times New Roman" pitchFamily="34" charset="0"/>
+                <a:ea typeface="Times New Roman" pitchFamily="34" charset="-122"/>
+                <a:cs typeface="Times New Roman" pitchFamily="34" charset="-120"/>
+              </a:rPr>
+              <a:t>A) Main Rivers and Lakes</a:t>
+            </a:r>
+            <a:endParaRPr lang="en-US" sz="3000" dirty="0"/>
+          </a:p>
+        </p:txBody>
+      </p:sp>
+      <p:sp>
+        <p:nvSpPr>
+          <p:cNvPr id="5" name="Text 3"/>
+          <p:cNvSpPr/>
+          <p:nvPr/>
+        </p:nvSpPr>
+        <p:spPr>
+          <a:xfrm>
+            <a:off x="365760" y="2240280"/>
+            <a:ext cx="4846320" cy="4160520"/>
           </a:xfrm>
           <a:prstGeom prst="rect">
             <a:avLst/>
@@ -14812,7 +14942,7 @@
                 <a:ea typeface="Times New Roman" pitchFamily="34" charset="-122"/>
                 <a:cs typeface="Times New Roman" pitchFamily="34" charset="-120"/>
               </a:rPr>
-              <a:t>The main rivers and lakes of Africa and their importance are the following:</a:t>
+              <a:t>The main rivers and lakes of Africa are the following:</a:t>
             </a:r>
             <a:endParaRPr lang="en-US" sz="3600" dirty="0"/>
           </a:p>
@@ -14859,7 +14989,7 @@
       </p:sp>
       <p:pic>
         <p:nvPicPr>
-          <p:cNvPr id="5" name="Image 0" descr="/home/claude/f4/img/v2/africa_drainage_big.png">    </p:cNvPr>
+          <p:cNvPr id="6" name="Image 0" descr="/home/claude/f4/img/v2/africa_drainage_big.png">    </p:cNvPr>
           <p:cNvPicPr>
             <a:picLocks noChangeAspect="1"/>
           </p:cNvPicPr>
@@ -14883,7 +15013,7 @@
       </p:pic>
       <p:sp>
         <p:nvSpPr>
-          <p:cNvPr id="6" name="Text 3"/>
+          <p:cNvPr id="7" name="Text 4"/>
           <p:cNvSpPr/>
           <p:nvPr/>
         </p:nvSpPr>
@@ -15344,8 +15474,47 @@
         </p:nvSpPr>
         <p:spPr>
           <a:xfrm>
-            <a:off x="4069080" y="1783080"/>
-            <a:ext cx="7802575" cy="4663440"/>
+            <a:off x="4069080" y="1737360"/>
+            <a:ext cx="7802575" cy="457200"/>
+          </a:xfrm>
+          <a:prstGeom prst="rect">
+            <a:avLst/>
+          </a:prstGeom>
+          <a:noFill/>
+          <a:ln/>
+        </p:spPr>
+        <p:txBody>
+          <a:bodyPr wrap="square" lIns="0" tIns="0" rIns="0" bIns="0" rtlCol="0" anchor="ctr"/>
+          <a:lstStyle/>
+          <a:p>
+            <a:pPr algn="l" indent="0" marL="0">
+              <a:buNone/>
+            </a:pPr>
+            <a:r>
+              <a:rPr lang="en-US" sz="3200" b="1" dirty="0">
+                <a:solidFill>
+                  <a:srgbClr val="990011"/>
+                </a:solidFill>
+                <a:latin typeface="Times New Roman" pitchFamily="34" charset="0"/>
+                <a:ea typeface="Times New Roman" pitchFamily="34" charset="-122"/>
+                <a:cs typeface="Times New Roman" pitchFamily="34" charset="-120"/>
+              </a:rPr>
+              <a:t>A) Main Rivers and Lakes</a:t>
+            </a:r>
+            <a:endParaRPr lang="en-US" sz="3200" dirty="0"/>
+          </a:p>
+        </p:txBody>
+      </p:sp>
+      <p:sp>
+        <p:nvSpPr>
+          <p:cNvPr id="6" name="Text 3"/>
+          <p:cNvSpPr/>
+          <p:nvPr/>
+        </p:nvSpPr>
+        <p:spPr>
+          <a:xfrm>
+            <a:off x="4069080" y="2240280"/>
+            <a:ext cx="7802575" cy="4206240"/>
           </a:xfrm>
           <a:prstGeom prst="rect">
             <a:avLst/>
@@ -15412,7 +15581,7 @@
                 <a:ea typeface="Times New Roman" pitchFamily="34" charset="-122"/>
                 <a:cs typeface="Times New Roman" pitchFamily="34" charset="-120"/>
               </a:rPr>
-              <a:t>The Niger: </a:t>
+              <a:t>The Niger and the Zambezi: </a:t>
             </a:r>
             <a:pPr algn="l" marL="342900" indent="-342900">
               <a:spcAft>
@@ -15430,46 +15599,7 @@
                 <a:ea typeface="Times New Roman" pitchFamily="34" charset="-122"/>
                 <a:cs typeface="Times New Roman" pitchFamily="34" charset="-120"/>
               </a:rPr>
-              <a:t>It flows into the Gulf of Guinea, and the Benue joins it.</a:t>
-            </a:r>
-            <a:endParaRPr lang="en-US" sz="4000" dirty="0"/>
-          </a:p>
-          <a:p>
-            <a:pPr algn="l" marL="342900" indent="-342900">
-              <a:spcAft>
-                <a:spcPts val="800"/>
-              </a:spcAft>
-              <a:buSzPct val="100000"/>
-              <a:buChar char="•"/>
-            </a:pPr>
-            <a:r>
-              <a:rPr lang="en-US" sz="4000" b="1" dirty="0">
-                <a:solidFill>
-                  <a:srgbClr val="111111"/>
-                </a:solidFill>
-                <a:latin typeface="Times New Roman" pitchFamily="34" charset="0"/>
-                <a:ea typeface="Times New Roman" pitchFamily="34" charset="-122"/>
-                <a:cs typeface="Times New Roman" pitchFamily="34" charset="-120"/>
-              </a:rPr>
-              <a:t>The Zambezi: </a:t>
-            </a:r>
-            <a:pPr algn="l" marL="342900" indent="-342900">
-              <a:spcAft>
-                <a:spcPts val="800"/>
-              </a:spcAft>
-              <a:buSzPct val="100000"/>
-              <a:buChar char="•"/>
-            </a:pPr>
-            <a:r>
-              <a:rPr lang="en-US" sz="4000" dirty="0">
-                <a:solidFill>
-                  <a:srgbClr val="111111"/>
-                </a:solidFill>
-                <a:latin typeface="Times New Roman" pitchFamily="34" charset="0"/>
-                <a:ea typeface="Times New Roman" pitchFamily="34" charset="-122"/>
-                <a:cs typeface="Times New Roman" pitchFamily="34" charset="-120"/>
-              </a:rPr>
-              <a:t>It flows into the Indian Ocean.</a:t>
+              <a:t>The Niger flows into the Gulf of Guinea, and the Zambezi into the Indian Ocean.</a:t>
             </a:r>
             <a:endParaRPr lang="en-US" sz="4000" dirty="0"/>
           </a:p>
@@ -15636,8 +15766,49 @@
         </p:nvSpPr>
         <p:spPr>
           <a:xfrm>
-            <a:off x="365760" y="1783080"/>
-            <a:ext cx="4846320" cy="4617720"/>
+            <a:off x="365760" y="1737360"/>
+            <a:ext cx="5120640" cy="457200"/>
+          </a:xfrm>
+          <a:prstGeom prst="rect">
+            <a:avLst/>
+          </a:prstGeom>
+          <a:noFill/>
+          <a:ln/>
+        </p:spPr>
+        <p:txBody>
+          <a:bodyPr wrap="square" lIns="0" tIns="0" rIns="0" bIns="0" rtlCol="0" anchor="ctr">
+            <a:normAutofit/>
+          </a:bodyPr>
+          <a:lstStyle/>
+          <a:p>
+            <a:pPr algn="l" indent="0" marL="0">
+              <a:buNone/>
+            </a:pPr>
+            <a:r>
+              <a:rPr lang="en-US" sz="3000" b="1" dirty="0">
+                <a:solidFill>
+                  <a:srgbClr val="990011"/>
+                </a:solidFill>
+                <a:latin typeface="Times New Roman" pitchFamily="34" charset="0"/>
+                <a:ea typeface="Times New Roman" pitchFamily="34" charset="-122"/>
+                <a:cs typeface="Times New Roman" pitchFamily="34" charset="-120"/>
+              </a:rPr>
+              <a:t>A) Main Rivers and Lakes</a:t>
+            </a:r>
+            <a:endParaRPr lang="en-US" sz="3000" dirty="0"/>
+          </a:p>
+        </p:txBody>
+      </p:sp>
+      <p:sp>
+        <p:nvSpPr>
+          <p:cNvPr id="5" name="Text 3"/>
+          <p:cNvSpPr/>
+          <p:nvPr/>
+        </p:nvSpPr>
+        <p:spPr>
+          <a:xfrm>
+            <a:off x="365760" y="2240280"/>
+            <a:ext cx="4846320" cy="4160520"/>
           </a:xfrm>
           <a:prstGeom prst="rect">
             <a:avLst/>
@@ -15691,7 +15862,7 @@
       </p:sp>
       <p:pic>
         <p:nvPicPr>
-          <p:cNvPr id="5" name="Image 0" descr="/home/claude/f4/img/v2/f2t_lake_chad.jpg">    </p:cNvPr>
+          <p:cNvPr id="6" name="Image 0" descr="/home/claude/f4/img/v2/f2t_lake_chad.jpg">    </p:cNvPr>
           <p:cNvPicPr>
             <a:picLocks noChangeAspect="1"/>
           </p:cNvPicPr>
@@ -15715,7 +15886,7 @@
       </p:pic>
       <p:sp>
         <p:nvSpPr>
-          <p:cNvPr id="6" name="Text 3"/>
+          <p:cNvPr id="7" name="Text 4"/>
           <p:cNvSpPr/>
           <p:nvPr/>
         </p:nvSpPr>
@@ -15881,7 +16052,7 @@
         <p:spPr>
           <a:xfrm>
             <a:off x="0" y="658368"/>
-            <a:ext cx="5120640" cy="5833872"/>
+            <a:ext cx="1463040" cy="5833872"/>
           </a:xfrm>
           <a:prstGeom prst="rect">
             <a:avLst/>
@@ -15896,8 +16067,8 @@
         </p:nvSpPr>
         <p:spPr>
           <a:xfrm>
-            <a:off x="5349240" y="1005840"/>
-            <a:ext cx="6522415" cy="731520"/>
+            <a:off x="1691640" y="1005840"/>
+            <a:ext cx="10180015" cy="731520"/>
           </a:xfrm>
           <a:prstGeom prst="rect">
             <a:avLst/>
@@ -15937,8 +16108,8 @@
         </p:nvSpPr>
         <p:spPr>
           <a:xfrm>
-            <a:off x="5349240" y="1783080"/>
-            <a:ext cx="6522415" cy="4663440"/>
+            <a:off x="1691640" y="1737360"/>
+            <a:ext cx="10180015" cy="457200"/>
           </a:xfrm>
           <a:prstGeom prst="rect">
             <a:avLst/>
@@ -15947,8 +16118,67 @@
           <a:ln/>
         </p:spPr>
         <p:txBody>
+          <a:bodyPr wrap="square" lIns="0" tIns="0" rIns="0" bIns="0" rtlCol="0" anchor="ctr"/>
+          <a:lstStyle/>
+          <a:p>
+            <a:pPr algn="l" indent="0" marL="0">
+              <a:buNone/>
+            </a:pPr>
+            <a:r>
+              <a:rPr lang="en-US" sz="3200" b="1" dirty="0">
+                <a:solidFill>
+                  <a:srgbClr val="990011"/>
+                </a:solidFill>
+                <a:latin typeface="Times New Roman" pitchFamily="34" charset="0"/>
+                <a:ea typeface="Times New Roman" pitchFamily="34" charset="-122"/>
+                <a:cs typeface="Times New Roman" pitchFamily="34" charset="-120"/>
+              </a:rPr>
+              <a:t>B) Importance</a:t>
+            </a:r>
+            <a:endParaRPr lang="en-US" sz="3200" dirty="0"/>
+          </a:p>
+        </p:txBody>
+      </p:sp>
+      <p:sp>
+        <p:nvSpPr>
+          <p:cNvPr id="6" name="Text 3"/>
+          <p:cNvSpPr/>
+          <p:nvPr/>
+        </p:nvSpPr>
+        <p:spPr>
+          <a:xfrm>
+            <a:off x="1691640" y="2240280"/>
+            <a:ext cx="10180015" cy="4206240"/>
+          </a:xfrm>
+          <a:prstGeom prst="rect">
+            <a:avLst/>
+          </a:prstGeom>
+          <a:noFill/>
+          <a:ln/>
+        </p:spPr>
+        <p:txBody>
           <a:bodyPr wrap="square" lIns="0" tIns="0" rIns="0" bIns="0" rtlCol="0" anchor="t"/>
           <a:lstStyle/>
+          <a:p>
+            <a:pPr algn="l" indent="0" marL="0">
+              <a:spcAft>
+                <a:spcPts val="800"/>
+              </a:spcAft>
+              <a:buNone/>
+            </a:pPr>
+            <a:r>
+              <a:rPr lang="en-US" sz="4000" i="1" dirty="0">
+                <a:solidFill>
+                  <a:srgbClr val="111111"/>
+                </a:solidFill>
+                <a:latin typeface="Times New Roman" pitchFamily="34" charset="0"/>
+                <a:ea typeface="Times New Roman" pitchFamily="34" charset="-122"/>
+                <a:cs typeface="Times New Roman" pitchFamily="34" charset="-120"/>
+              </a:rPr>
+              <a:t>Rivers and lakes are important for the following reasons:</a:t>
+            </a:r>
+            <a:endParaRPr lang="en-US" sz="4000" dirty="0"/>
+          </a:p>
           <a:p>
             <a:pPr algn="l" marL="342900" indent="-342900">
               <a:spcAft>
@@ -15966,7 +16196,7 @@
                 <a:ea typeface="Times New Roman" pitchFamily="34" charset="-122"/>
                 <a:cs typeface="Times New Roman" pitchFamily="34" charset="-120"/>
               </a:rPr>
-              <a:t>Importance: </a:t>
+              <a:t>Water supply: </a:t>
             </a:r>
             <a:pPr algn="l" marL="342900" indent="-342900">
               <a:spcAft>
@@ -15984,7 +16214,85 @@
                 <a:ea typeface="Times New Roman" pitchFamily="34" charset="-122"/>
                 <a:cs typeface="Times New Roman" pitchFamily="34" charset="-120"/>
               </a:rPr>
-              <a:t>Water, fishing, transport, irrigation and electricity.</a:t>
+              <a:t>People drink and wash with river water.</a:t>
+            </a:r>
+            <a:endParaRPr lang="en-US" sz="4000" dirty="0"/>
+          </a:p>
+          <a:p>
+            <a:pPr algn="l" marL="342900" indent="-342900">
+              <a:spcAft>
+                <a:spcPts val="800"/>
+              </a:spcAft>
+              <a:buSzPct val="100000"/>
+              <a:buChar char="•"/>
+            </a:pPr>
+            <a:r>
+              <a:rPr lang="en-US" sz="4000" b="1" dirty="0">
+                <a:solidFill>
+                  <a:srgbClr val="111111"/>
+                </a:solidFill>
+                <a:latin typeface="Times New Roman" pitchFamily="34" charset="0"/>
+                <a:ea typeface="Times New Roman" pitchFamily="34" charset="-122"/>
+                <a:cs typeface="Times New Roman" pitchFamily="34" charset="-120"/>
+              </a:rPr>
+              <a:t>Fishing: </a:t>
+            </a:r>
+            <a:pPr algn="l" marL="342900" indent="-342900">
+              <a:spcAft>
+                <a:spcPts val="800"/>
+              </a:spcAft>
+              <a:buSzPct val="100000"/>
+              <a:buChar char="•"/>
+            </a:pPr>
+            <a:r>
+              <a:rPr lang="en-US" sz="4000" dirty="0">
+                <a:solidFill>
+                  <a:srgbClr val="111111"/>
+                </a:solidFill>
+                <a:latin typeface="Times New Roman" pitchFamily="34" charset="0"/>
+                <a:ea typeface="Times New Roman" pitchFamily="34" charset="-122"/>
+                <a:cs typeface="Times New Roman" pitchFamily="34" charset="-120"/>
+              </a:rPr>
+              <a:t>Rivers and lakes give fish.</a:t>
+            </a:r>
+            <a:endParaRPr lang="en-US" sz="4000" dirty="0"/>
+          </a:p>
+          <a:p>
+            <a:pPr algn="l" marL="342900" indent="-342900">
+              <a:spcAft>
+                <a:spcPts val="800"/>
+              </a:spcAft>
+              <a:buSzPct val="100000"/>
+              <a:buChar char="•"/>
+            </a:pPr>
+            <a:r>
+              <a:rPr lang="en-US" sz="4000" b="1" dirty="0">
+                <a:solidFill>
+                  <a:srgbClr val="111111"/>
+                </a:solidFill>
+                <a:latin typeface="Times New Roman" pitchFamily="34" charset="0"/>
+                <a:ea typeface="Times New Roman" pitchFamily="34" charset="-122"/>
+                <a:cs typeface="Times New Roman" pitchFamily="34" charset="-120"/>
+              </a:rPr>
+              <a:t>Transport: </a:t>
+            </a:r>
+            <a:pPr algn="l" marL="342900" indent="-342900">
+              <a:spcAft>
+                <a:spcPts val="800"/>
+              </a:spcAft>
+              <a:buSzPct val="100000"/>
+              <a:buChar char="•"/>
+            </a:pPr>
+            <a:r>
+              <a:rPr lang="en-US" sz="4000" dirty="0">
+                <a:solidFill>
+                  <a:srgbClr val="111111"/>
+                </a:solidFill>
+                <a:latin typeface="Times New Roman" pitchFamily="34" charset="0"/>
+                <a:ea typeface="Times New Roman" pitchFamily="34" charset="-122"/>
+                <a:cs typeface="Times New Roman" pitchFamily="34" charset="-120"/>
+              </a:rPr>
+              <a:t>Boats carry people and goods.</a:t>
             </a:r>
             <a:endParaRPr lang="en-US" sz="4000" dirty="0"/>
           </a:p>
@@ -16096,7 +16404,7 @@
                 <a:ea typeface="Calibri" pitchFamily="34" charset="-122"/>
                 <a:cs typeface="Calibri" pitchFamily="34" charset="-120"/>
               </a:rPr>
-              <a:t>FORMATIVE EVALUATION</a:t>
+              <a:t>BOARD SUMMARY</a:t>
             </a:r>
             <a:endParaRPr lang="en-US" sz="1400" dirty="0"/>
           </a:p>
@@ -16161,7 +16469,7 @@
                 <a:ea typeface="Times New Roman" pitchFamily="34" charset="-122"/>
                 <a:cs typeface="Times New Roman" pitchFamily="34" charset="-120"/>
               </a:rPr>
-              <a:t>Evaluation 1</a:t>
+              <a:t>2. Drainage</a:t>
             </a:r>
             <a:endParaRPr lang="en-US" sz="3600" dirty="0"/>
           </a:p>
@@ -16175,8 +16483,8 @@
         </p:nvSpPr>
         <p:spPr>
           <a:xfrm>
-            <a:off x="5349240" y="1783080"/>
-            <a:ext cx="6522415" cy="4663440"/>
+            <a:off x="5349240" y="1737360"/>
+            <a:ext cx="6522415" cy="457200"/>
           </a:xfrm>
           <a:prstGeom prst="rect">
             <a:avLst/>
@@ -16185,25 +16493,83 @@
           <a:ln/>
         </p:spPr>
         <p:txBody>
-          <a:bodyPr wrap="square" lIns="0" tIns="0" rIns="0" bIns="0" rtlCol="0" anchor="t"/>
+          <a:bodyPr wrap="square" lIns="0" tIns="0" rIns="0" bIns="0" rtlCol="0" anchor="ctr"/>
           <a:lstStyle/>
           <a:p>
             <a:pPr algn="l" indent="0" marL="0">
-              <a:spcAft>
-                <a:spcPts val="800"/>
-              </a:spcAft>
               <a:buNone/>
             </a:pPr>
             <a:r>
-              <a:rPr lang="en-US" sz="4000" dirty="0">
-                <a:solidFill>
-                  <a:srgbClr val="111111"/>
+              <a:rPr lang="en-US" sz="3200" b="1" dirty="0">
+                <a:solidFill>
+                  <a:srgbClr val="990011"/>
                 </a:solidFill>
                 <a:latin typeface="Times New Roman" pitchFamily="34" charset="0"/>
                 <a:ea typeface="Times New Roman" pitchFamily="34" charset="-122"/>
                 <a:cs typeface="Times New Roman" pitchFamily="34" charset="-120"/>
               </a:rPr>
-              <a:t>Which vegetation covers most of Africa?</a:t>
+              <a:t>B) Importance (continued)</a:t>
+            </a:r>
+            <a:endParaRPr lang="en-US" sz="3200" dirty="0"/>
+          </a:p>
+        </p:txBody>
+      </p:sp>
+      <p:sp>
+        <p:nvSpPr>
+          <p:cNvPr id="6" name="Text 3"/>
+          <p:cNvSpPr/>
+          <p:nvPr/>
+        </p:nvSpPr>
+        <p:spPr>
+          <a:xfrm>
+            <a:off x="5349240" y="2240280"/>
+            <a:ext cx="6522415" cy="4206240"/>
+          </a:xfrm>
+          <a:prstGeom prst="rect">
+            <a:avLst/>
+          </a:prstGeom>
+          <a:noFill/>
+          <a:ln/>
+        </p:spPr>
+        <p:txBody>
+          <a:bodyPr wrap="square" lIns="0" tIns="0" rIns="0" bIns="0" rtlCol="0" anchor="t"/>
+          <a:lstStyle/>
+          <a:p>
+            <a:pPr algn="l" marL="342900" indent="-342900">
+              <a:spcAft>
+                <a:spcPts val="800"/>
+              </a:spcAft>
+              <a:buSzPct val="100000"/>
+              <a:buChar char="•"/>
+            </a:pPr>
+            <a:r>
+              <a:rPr lang="en-US" sz="4000" b="1" dirty="0">
+                <a:solidFill>
+                  <a:srgbClr val="111111"/>
+                </a:solidFill>
+                <a:latin typeface="Times New Roman" pitchFamily="34" charset="0"/>
+                <a:ea typeface="Times New Roman" pitchFamily="34" charset="-122"/>
+                <a:cs typeface="Times New Roman" pitchFamily="34" charset="-120"/>
+              </a:rPr>
+              <a:t>Irrigation and electricity: </a:t>
+            </a:r>
+            <a:pPr algn="l" marL="342900" indent="-342900">
+              <a:spcAft>
+                <a:spcPts val="800"/>
+              </a:spcAft>
+              <a:buSzPct val="100000"/>
+              <a:buChar char="•"/>
+            </a:pPr>
+            <a:r>
+              <a:rPr lang="en-US" sz="4000" dirty="0">
+                <a:solidFill>
+                  <a:srgbClr val="111111"/>
+                </a:solidFill>
+                <a:latin typeface="Times New Roman" pitchFamily="34" charset="0"/>
+                <a:ea typeface="Times New Roman" pitchFamily="34" charset="-122"/>
+                <a:cs typeface="Times New Roman" pitchFamily="34" charset="-120"/>
+              </a:rPr>
+              <a:t>Dams water crops and produce electricity.</a:t>
             </a:r>
             <a:endParaRPr lang="en-US" sz="4000" dirty="0"/>
           </a:p>
@@ -16380,7 +16746,7 @@
                 <a:ea typeface="Times New Roman" pitchFamily="34" charset="-122"/>
                 <a:cs typeface="Times New Roman" pitchFamily="34" charset="-120"/>
               </a:rPr>
-              <a:t>Expected Answer</a:t>
+              <a:t>Evaluation 1</a:t>
             </a:r>
             <a:endParaRPr lang="en-US" sz="3600" dirty="0"/>
           </a:p>
@@ -16422,7 +16788,7 @@
                 <a:ea typeface="Times New Roman" pitchFamily="34" charset="-122"/>
                 <a:cs typeface="Times New Roman" pitchFamily="34" charset="-120"/>
               </a:rPr>
-              <a:t>The savanna.</a:t>
+              <a:t>Which vegetation covers most of Africa?</a:t>
             </a:r>
             <a:endParaRPr lang="en-US" sz="4000" dirty="0"/>
           </a:p>
@@ -16599,7 +16965,7 @@
                 <a:ea typeface="Times New Roman" pitchFamily="34" charset="-122"/>
                 <a:cs typeface="Times New Roman" pitchFamily="34" charset="-120"/>
               </a:rPr>
-              <a:t>Evaluation 2</a:t>
+              <a:t>Expected Answer</a:t>
             </a:r>
             <a:endParaRPr lang="en-US" sz="3600" dirty="0"/>
           </a:p>
@@ -16641,7 +17007,7 @@
                 <a:ea typeface="Times New Roman" pitchFamily="34" charset="-122"/>
                 <a:cs typeface="Times New Roman" pitchFamily="34" charset="-120"/>
               </a:rPr>
-              <a:t>The Benue is a tributary of which river?</a:t>
+              <a:t>The savanna.</a:t>
             </a:r>
             <a:endParaRPr lang="en-US" sz="4000" dirty="0"/>
           </a:p>
@@ -16818,7 +17184,7 @@
                 <a:ea typeface="Times New Roman" pitchFamily="34" charset="-122"/>
                 <a:cs typeface="Times New Roman" pitchFamily="34" charset="-120"/>
               </a:rPr>
-              <a:t>Expected Answer</a:t>
+              <a:t>Evaluation 2</a:t>
             </a:r>
             <a:endParaRPr lang="en-US" sz="3600" dirty="0"/>
           </a:p>
@@ -16860,7 +17226,7 @@
                 <a:ea typeface="Times New Roman" pitchFamily="34" charset="-122"/>
                 <a:cs typeface="Times New Roman" pitchFamily="34" charset="-120"/>
               </a:rPr>
-              <a:t>The Niger.</a:t>
+              <a:t>The Benue is a tributary of which river?</a:t>
             </a:r>
             <a:endParaRPr lang="en-US" sz="4000" dirty="0"/>
           </a:p>
@@ -16972,7 +17338,7 @@
                 <a:ea typeface="Calibri" pitchFamily="34" charset="-122"/>
                 <a:cs typeface="Calibri" pitchFamily="34" charset="-120"/>
               </a:rPr>
-              <a:t>REMEDIATION</a:t>
+              <a:t>FORMATIVE EVALUATION</a:t>
             </a:r>
             <a:endParaRPr lang="en-US" sz="1400" dirty="0"/>
           </a:p>
@@ -16995,7 +17361,7 @@
         <p:spPr>
           <a:xfrm>
             <a:off x="0" y="658368"/>
-            <a:ext cx="1463040" cy="5833872"/>
+            <a:ext cx="5120640" cy="5833872"/>
           </a:xfrm>
           <a:prstGeom prst="rect">
             <a:avLst/>
@@ -17010,8 +17376,8 @@
         </p:nvSpPr>
         <p:spPr>
           <a:xfrm>
-            <a:off x="1691640" y="1005840"/>
-            <a:ext cx="10180015" cy="731520"/>
+            <a:off x="5349240" y="1005840"/>
+            <a:ext cx="6522415" cy="731520"/>
           </a:xfrm>
           <a:prstGeom prst="rect">
             <a:avLst/>
@@ -17037,7 +17403,7 @@
                 <a:ea typeface="Times New Roman" pitchFamily="34" charset="-122"/>
                 <a:cs typeface="Times New Roman" pitchFamily="34" charset="-120"/>
               </a:rPr>
-              <a:t>Remediation</a:t>
+              <a:t>Expected Answer</a:t>
             </a:r>
             <a:endParaRPr lang="en-US" sz="3600" dirty="0"/>
           </a:p>
@@ -17051,8 +17417,8 @@
         </p:nvSpPr>
         <p:spPr>
           <a:xfrm>
-            <a:off x="1691640" y="1783080"/>
-            <a:ext cx="10180015" cy="4663440"/>
+            <a:off x="5349240" y="1783080"/>
+            <a:ext cx="6522415" cy="4663440"/>
           </a:xfrm>
           <a:prstGeom prst="rect">
             <a:avLst/>
@@ -17071,7 +17437,7 @@
               <a:buNone/>
             </a:pPr>
             <a:r>
-              <a:rPr lang="en-US" sz="4000" b="1" dirty="0">
+              <a:rPr lang="en-US" sz="4000" dirty="0">
                 <a:solidFill>
                   <a:srgbClr val="111111"/>
                 </a:solidFill>
@@ -17079,73 +17445,7 @@
                 <a:ea typeface="Times New Roman" pitchFamily="34" charset="-122"/>
                 <a:cs typeface="Times New Roman" pitchFamily="34" charset="-120"/>
               </a:rPr>
-              <a:t>Fill in the blanks:</a:t>
-            </a:r>
-            <a:endParaRPr lang="en-US" sz="4000" dirty="0"/>
-          </a:p>
-          <a:p>
-            <a:pPr algn="l" marL="342900" indent="-342900">
-              <a:spcAft>
-                <a:spcPts val="800"/>
-              </a:spcAft>
-              <a:buSzPct val="100000"/>
-              <a:buFont typeface="+mj-lt"/>
-              <a:buAutoNum type="arabicPeriod" startAt="1"/>
-            </a:pPr>
-            <a:r>
-              <a:rPr lang="en-US" sz="4000" dirty="0">
-                <a:solidFill>
-                  <a:srgbClr val="111111"/>
-                </a:solidFill>
-                <a:latin typeface="Times New Roman" pitchFamily="34" charset="0"/>
-                <a:ea typeface="Times New Roman" pitchFamily="34" charset="-122"/>
-                <a:cs typeface="Times New Roman" pitchFamily="34" charset="-120"/>
-              </a:rPr>
-              <a:t>The longest river of Africa is the ______.</a:t>
-            </a:r>
-            <a:endParaRPr lang="en-US" sz="4000" dirty="0"/>
-          </a:p>
-          <a:p>
-            <a:pPr algn="l" marL="342900" indent="-342900">
-              <a:spcAft>
-                <a:spcPts val="800"/>
-              </a:spcAft>
-              <a:buSzPct val="100000"/>
-              <a:buFont typeface="+mj-lt"/>
-              <a:buAutoNum type="arabicPeriod" startAt="1"/>
-            </a:pPr>
-            <a:r>
-              <a:rPr lang="en-US" sz="4000" dirty="0">
-                <a:solidFill>
-                  <a:srgbClr val="111111"/>
-                </a:solidFill>
-                <a:latin typeface="Times New Roman" pitchFamily="34" charset="0"/>
-                <a:ea typeface="Times New Roman" pitchFamily="34" charset="-122"/>
-                <a:cs typeface="Times New Roman" pitchFamily="34" charset="-120"/>
-              </a:rPr>
-              <a:t>A river that joins a bigger river is a ______.</a:t>
-            </a:r>
-            <a:endParaRPr lang="en-US" sz="4000" dirty="0"/>
-          </a:p>
-          <a:p>
-            <a:pPr algn="l" marL="342900" indent="-342900">
-              <a:spcAft>
-                <a:spcPts val="800"/>
-              </a:spcAft>
-              <a:buSzPct val="100000"/>
-              <a:buFont typeface="+mj-lt"/>
-              <a:buAutoNum type="arabicPeriod" startAt="1"/>
-            </a:pPr>
-            <a:r>
-              <a:rPr lang="en-US" sz="4000" dirty="0">
-                <a:solidFill>
-                  <a:srgbClr val="111111"/>
-                </a:solidFill>
-                <a:latin typeface="Times New Roman" pitchFamily="34" charset="0"/>
-                <a:ea typeface="Times New Roman" pitchFamily="34" charset="-122"/>
-                <a:cs typeface="Times New Roman" pitchFamily="34" charset="-120"/>
-              </a:rPr>
-              <a:t>The lake north of Cameroon that is shrinking is Lake ______.</a:t>
+              <a:t>The Niger.</a:t>
             </a:r>
             <a:endParaRPr lang="en-US" sz="4000" dirty="0"/>
           </a:p>
@@ -17257,7 +17557,7 @@
                 <a:ea typeface="Calibri" pitchFamily="34" charset="-122"/>
                 <a:cs typeface="Calibri" pitchFamily="34" charset="-120"/>
               </a:rPr>
-              <a:t>HOMEWORK</a:t>
+              <a:t>REMEDIATION</a:t>
             </a:r>
             <a:endParaRPr lang="en-US" sz="1400" dirty="0"/>
           </a:p>
@@ -17280,7 +17580,7 @@
         <p:spPr>
           <a:xfrm>
             <a:off x="0" y="658368"/>
-            <a:ext cx="5120640" cy="5833872"/>
+            <a:ext cx="1463040" cy="5833872"/>
           </a:xfrm>
           <a:prstGeom prst="rect">
             <a:avLst/>
@@ -17295,8 +17595,8 @@
         </p:nvSpPr>
         <p:spPr>
           <a:xfrm>
-            <a:off x="5349240" y="1005840"/>
-            <a:ext cx="6522415" cy="731520"/>
+            <a:off x="1691640" y="1005840"/>
+            <a:ext cx="10180015" cy="731520"/>
           </a:xfrm>
           <a:prstGeom prst="rect">
             <a:avLst/>
@@ -17322,7 +17622,7 @@
                 <a:ea typeface="Times New Roman" pitchFamily="34" charset="-122"/>
                 <a:cs typeface="Times New Roman" pitchFamily="34" charset="-120"/>
               </a:rPr>
-              <a:t>Homework</a:t>
+              <a:t>Remediation</a:t>
             </a:r>
             <a:endParaRPr lang="en-US" sz="3600" dirty="0"/>
           </a:p>
@@ -17336,8 +17636,8 @@
         </p:nvSpPr>
         <p:spPr>
           <a:xfrm>
-            <a:off x="5349240" y="1783080"/>
-            <a:ext cx="6522415" cy="4663440"/>
+            <a:off x="1691640" y="1783080"/>
+            <a:ext cx="10180015" cy="4663440"/>
           </a:xfrm>
           <a:prstGeom prst="rect">
             <a:avLst/>
@@ -17356,7 +17656,7 @@
               <a:buNone/>
             </a:pPr>
             <a:r>
-              <a:rPr lang="en-US" sz="4000" dirty="0">
+              <a:rPr lang="en-US" sz="4000" b="1" dirty="0">
                 <a:solidFill>
                   <a:srgbClr val="111111"/>
                 </a:solidFill>
@@ -17364,7 +17664,73 @@
                 <a:ea typeface="Times New Roman" pitchFamily="34" charset="-122"/>
                 <a:cs typeface="Times New Roman" pitchFamily="34" charset="-120"/>
               </a:rPr>
-              <a:t>Name the three vegetation zones of Africa that we studied.</a:t>
+              <a:t>Fill in the blanks:</a:t>
+            </a:r>
+            <a:endParaRPr lang="en-US" sz="4000" dirty="0"/>
+          </a:p>
+          <a:p>
+            <a:pPr algn="l" marL="342900" indent="-342900">
+              <a:spcAft>
+                <a:spcPts val="800"/>
+              </a:spcAft>
+              <a:buSzPct val="100000"/>
+              <a:buFont typeface="+mj-lt"/>
+              <a:buAutoNum type="arabicPeriod" startAt="1"/>
+            </a:pPr>
+            <a:r>
+              <a:rPr lang="en-US" sz="4000" dirty="0">
+                <a:solidFill>
+                  <a:srgbClr val="111111"/>
+                </a:solidFill>
+                <a:latin typeface="Times New Roman" pitchFamily="34" charset="0"/>
+                <a:ea typeface="Times New Roman" pitchFamily="34" charset="-122"/>
+                <a:cs typeface="Times New Roman" pitchFamily="34" charset="-120"/>
+              </a:rPr>
+              <a:t>The longest river of Africa is the ______.</a:t>
+            </a:r>
+            <a:endParaRPr lang="en-US" sz="4000" dirty="0"/>
+          </a:p>
+          <a:p>
+            <a:pPr algn="l" marL="342900" indent="-342900">
+              <a:spcAft>
+                <a:spcPts val="800"/>
+              </a:spcAft>
+              <a:buSzPct val="100000"/>
+              <a:buFont typeface="+mj-lt"/>
+              <a:buAutoNum type="arabicPeriod" startAt="1"/>
+            </a:pPr>
+            <a:r>
+              <a:rPr lang="en-US" sz="4000" dirty="0">
+                <a:solidFill>
+                  <a:srgbClr val="111111"/>
+                </a:solidFill>
+                <a:latin typeface="Times New Roman" pitchFamily="34" charset="0"/>
+                <a:ea typeface="Times New Roman" pitchFamily="34" charset="-122"/>
+                <a:cs typeface="Times New Roman" pitchFamily="34" charset="-120"/>
+              </a:rPr>
+              <a:t>A river that joins a bigger river is a ______.</a:t>
+            </a:r>
+            <a:endParaRPr lang="en-US" sz="4000" dirty="0"/>
+          </a:p>
+          <a:p>
+            <a:pPr algn="l" marL="342900" indent="-342900">
+              <a:spcAft>
+                <a:spcPts val="800"/>
+              </a:spcAft>
+              <a:buSzPct val="100000"/>
+              <a:buFont typeface="+mj-lt"/>
+              <a:buAutoNum type="arabicPeriod" startAt="1"/>
+            </a:pPr>
+            <a:r>
+              <a:rPr lang="en-US" sz="4000" dirty="0">
+                <a:solidFill>
+                  <a:srgbClr val="111111"/>
+                </a:solidFill>
+                <a:latin typeface="Times New Roman" pitchFamily="34" charset="0"/>
+                <a:ea typeface="Times New Roman" pitchFamily="34" charset="-122"/>
+                <a:cs typeface="Times New Roman" pitchFamily="34" charset="-120"/>
+              </a:rPr>
+              <a:t>The lake north of Cameroon that is shrinking is Lake ______.</a:t>
             </a:r>
             <a:endParaRPr lang="en-US" sz="4000" dirty="0"/>
           </a:p>
@@ -17476,6 +17842,444 @@
                 <a:ea typeface="Calibri" pitchFamily="34" charset="-122"/>
                 <a:cs typeface="Calibri" pitchFamily="34" charset="-120"/>
               </a:rPr>
+              <a:t>HOMEWORK</a:t>
+            </a:r>
+            <a:endParaRPr lang="en-US" sz="1400" dirty="0"/>
+          </a:p>
+        </p:txBody>
+      </p:sp>
+      <p:pic>
+        <p:nvPicPr>
+          <p:cNvPr id="3" name="Image 0" descr="/home/claude/f4/img/minesec_sheet.png">    </p:cNvPr>
+          <p:cNvPicPr>
+            <a:picLocks noChangeAspect="1"/>
+          </p:cNvPicPr>
+          <p:nvPr/>
+        </p:nvPicPr>
+        <p:blipFill>
+          <a:blip r:embed="rId1"/>
+          <a:stretch>
+            <a:fillRect/>
+          </a:stretch>
+        </p:blipFill>
+        <p:spPr>
+          <a:xfrm>
+            <a:off x="0" y="658368"/>
+            <a:ext cx="5120640" cy="5833872"/>
+          </a:xfrm>
+          <a:prstGeom prst="rect">
+            <a:avLst/>
+          </a:prstGeom>
+        </p:spPr>
+      </p:pic>
+      <p:sp>
+        <p:nvSpPr>
+          <p:cNvPr id="4" name="Text 1"/>
+          <p:cNvSpPr/>
+          <p:nvPr/>
+        </p:nvSpPr>
+        <p:spPr>
+          <a:xfrm>
+            <a:off x="5349240" y="1005840"/>
+            <a:ext cx="6522415" cy="731520"/>
+          </a:xfrm>
+          <a:prstGeom prst="rect">
+            <a:avLst/>
+          </a:prstGeom>
+          <a:noFill/>
+          <a:ln/>
+        </p:spPr>
+        <p:txBody>
+          <a:bodyPr wrap="square" lIns="0" tIns="0" rIns="0" bIns="0" rtlCol="0" anchor="ctr">
+            <a:normAutofit/>
+          </a:bodyPr>
+          <a:lstStyle/>
+          <a:p>
+            <a:pPr algn="ctr" indent="0" marL="0">
+              <a:buNone/>
+            </a:pPr>
+            <a:r>
+              <a:rPr lang="en-US" sz="3600" b="1" dirty="0">
+                <a:solidFill>
+                  <a:srgbClr val="990011"/>
+                </a:solidFill>
+                <a:latin typeface="Times New Roman" pitchFamily="34" charset="0"/>
+                <a:ea typeface="Times New Roman" pitchFamily="34" charset="-122"/>
+                <a:cs typeface="Times New Roman" pitchFamily="34" charset="-120"/>
+              </a:rPr>
+              <a:t>Homework</a:t>
+            </a:r>
+            <a:endParaRPr lang="en-US" sz="3600" dirty="0"/>
+          </a:p>
+        </p:txBody>
+      </p:sp>
+      <p:sp>
+        <p:nvSpPr>
+          <p:cNvPr id="5" name="Text 2"/>
+          <p:cNvSpPr/>
+          <p:nvPr/>
+        </p:nvSpPr>
+        <p:spPr>
+          <a:xfrm>
+            <a:off x="5349240" y="1783080"/>
+            <a:ext cx="6522415" cy="4663440"/>
+          </a:xfrm>
+          <a:prstGeom prst="rect">
+            <a:avLst/>
+          </a:prstGeom>
+          <a:noFill/>
+          <a:ln/>
+        </p:spPr>
+        <p:txBody>
+          <a:bodyPr wrap="square" lIns="0" tIns="0" rIns="0" bIns="0" rtlCol="0" anchor="t"/>
+          <a:lstStyle/>
+          <a:p>
+            <a:pPr algn="l" indent="0" marL="0">
+              <a:spcAft>
+                <a:spcPts val="800"/>
+              </a:spcAft>
+              <a:buNone/>
+            </a:pPr>
+            <a:r>
+              <a:rPr lang="en-US" sz="4000" dirty="0">
+                <a:solidFill>
+                  <a:srgbClr val="111111"/>
+                </a:solidFill>
+                <a:latin typeface="Times New Roman" pitchFamily="34" charset="0"/>
+                <a:ea typeface="Times New Roman" pitchFamily="34" charset="-122"/>
+                <a:cs typeface="Times New Roman" pitchFamily="34" charset="-120"/>
+              </a:rPr>
+              <a:t>Name the three vegetation zones of Africa that we studied.</a:t>
+            </a:r>
+            <a:endParaRPr lang="en-US" sz="4000" dirty="0"/>
+          </a:p>
+        </p:txBody>
+      </p:sp>
+      <p:sp>
+        <p:nvSpPr>
+          <p:cNvPr id="25" name="Slide Number Placeholder 0"/>
+          <p:cNvSpPr>
+            <a:spLocks noGrp="1"/>
+          </p:cNvSpPr>
+          <p:nvPr>
+            <p:ph type="sldNum" sz="quarter" idx="4294967295"/>
+          </p:nvPr>
+        </p:nvSpPr>
+        <p:spPr>
+          <a:xfrm>
+            <a:off x="27432" y="91440"/>
+            <a:ext cx="585216" cy="475488"/>
+          </a:xfrm>
+          <a:prstGeom prst="rect">
+            <a:avLst/>
+          </a:prstGeom>
+          <a:extLst>
+            <a:ext uri="{C572A759-6A51-4108-AA02-DFA0A04FC94B}">
+              <ma14:wrappingTextBoxFlag xmlns:ma14="http://schemas.microsoft.com/office/mac/drawingml/2011/main" val="0"/>
+            </a:ext>
+          </a:extLst>
+        </p:spPr>
+        <p:txBody>
+          <a:bodyPr/>
+          <a:lstStyle>
+            <a:lvl1pPr>
+              <a:defRPr sz="2000">
+                <a:solidFill>
+                  <a:srgbClr val="FFFFFF"/>
+                </a:solidFill>
+                <a:latin typeface="Calibri"/>
+                <a:ea typeface="Calibri"/>
+                <a:cs typeface="Calibri"/>
+              </a:defRPr>
+            </a:lvl1pPr>
+          </a:lstStyle>
+          <a:p>
+            <a:pPr algn="ctr"/>
+            <a:fld id="{F7021451-1387-4CA6-816F-3879F97B5CBC}" type="slidenum">
+              <a:rPr b="1" lang="en-US"/>
+              <a:t>49</a:t>
+            </a:fld>
+            <a:endParaRPr lang="en-US"/>
+          </a:p>
+        </p:txBody>
+      </p:sp>
+    </p:spTree>
+  </p:cSld>
+  <p:clrMapOvr>
+    <a:masterClrMapping/>
+  </p:clrMapOvr>
+</p:sld>
+</file>
+
+<file path=ppt/slides/slide5.xml><?xml version="1.0" encoding="utf-8"?>
+<p:sld xmlns:a="http://schemas.openxmlformats.org/drawingml/2006/main" xmlns:r="http://schemas.openxmlformats.org/officeDocument/2006/relationships" xmlns:p="http://schemas.openxmlformats.org/presentationml/2006/main">
+  <p:cSld name="Slide 5">
+    <p:spTree>
+      <p:nvGrpSpPr>
+        <p:cNvPr id="1" name=""/>
+        <p:cNvGrpSpPr/>
+        <p:nvPr/>
+      </p:nvGrpSpPr>
+      <p:grpSpPr>
+        <a:xfrm>
+          <a:off x="0" y="0"/>
+          <a:ext cx="0" cy="0"/>
+          <a:chOff x="0" y="0"/>
+          <a:chExt cx="0" cy="0"/>
+        </a:xfrm>
+      </p:grpSpPr>
+      <p:sp>
+        <p:nvSpPr>
+          <p:cNvPr id="2" name="Text 0"/>
+          <p:cNvSpPr/>
+          <p:nvPr/>
+        </p:nvSpPr>
+        <p:spPr>
+          <a:xfrm>
+            <a:off x="457200" y="713232"/>
+            <a:ext cx="11368735" cy="274320"/>
+          </a:xfrm>
+          <a:prstGeom prst="rect">
+            <a:avLst/>
+          </a:prstGeom>
+          <a:noFill/>
+          <a:ln/>
+        </p:spPr>
+        <p:txBody>
+          <a:bodyPr wrap="square" lIns="0" tIns="0" rIns="0" bIns="0" rtlCol="0" anchor="ctr"/>
+          <a:lstStyle/>
+          <a:p>
+            <a:pPr algn="r" indent="0" marL="0">
+              <a:buNone/>
+            </a:pPr>
+            <a:r>
+              <a:rPr lang="en-US" sz="1400" b="1" dirty="0">
+                <a:solidFill>
+                  <a:srgbClr val="1C3F6E"/>
+                </a:solidFill>
+                <a:latin typeface="Calibri" pitchFamily="34" charset="0"/>
+                <a:ea typeface="Calibri" pitchFamily="34" charset="-122"/>
+                <a:cs typeface="Calibri" pitchFamily="34" charset="-120"/>
+              </a:rPr>
+              <a:t>HOMEWORK CORRECTION</a:t>
+            </a:r>
+            <a:endParaRPr lang="en-US" sz="1400" dirty="0"/>
+          </a:p>
+        </p:txBody>
+      </p:sp>
+      <p:pic>
+        <p:nvPicPr>
+          <p:cNvPr id="3" name="Image 0" descr="/home/claude/f4/img/minesec_sheet.png">    </p:cNvPr>
+          <p:cNvPicPr>
+            <a:picLocks noChangeAspect="1"/>
+          </p:cNvPicPr>
+          <p:nvPr/>
+        </p:nvPicPr>
+        <p:blipFill>
+          <a:blip r:embed="rId1"/>
+          <a:stretch>
+            <a:fillRect/>
+          </a:stretch>
+        </p:blipFill>
+        <p:spPr>
+          <a:xfrm>
+            <a:off x="0" y="658368"/>
+            <a:ext cx="5120640" cy="5833872"/>
+          </a:xfrm>
+          <a:prstGeom prst="rect">
+            <a:avLst/>
+          </a:prstGeom>
+        </p:spPr>
+      </p:pic>
+      <p:sp>
+        <p:nvSpPr>
+          <p:cNvPr id="4" name="Text 1"/>
+          <p:cNvSpPr/>
+          <p:nvPr/>
+        </p:nvSpPr>
+        <p:spPr>
+          <a:xfrm>
+            <a:off x="5349240" y="1005840"/>
+            <a:ext cx="6522415" cy="731520"/>
+          </a:xfrm>
+          <a:prstGeom prst="rect">
+            <a:avLst/>
+          </a:prstGeom>
+          <a:noFill/>
+          <a:ln/>
+        </p:spPr>
+        <p:txBody>
+          <a:bodyPr wrap="square" lIns="0" tIns="0" rIns="0" bIns="0" rtlCol="0" anchor="ctr">
+            <a:normAutofit/>
+          </a:bodyPr>
+          <a:lstStyle/>
+          <a:p>
+            <a:pPr algn="ctr" indent="0" marL="0">
+              <a:buNone/>
+            </a:pPr>
+            <a:r>
+              <a:rPr lang="en-US" sz="3600" b="1" dirty="0">
+                <a:solidFill>
+                  <a:srgbClr val="990011"/>
+                </a:solidFill>
+                <a:latin typeface="Times New Roman" pitchFamily="34" charset="0"/>
+                <a:ea typeface="Times New Roman" pitchFamily="34" charset="-122"/>
+                <a:cs typeface="Times New Roman" pitchFamily="34" charset="-120"/>
+              </a:rPr>
+              <a:t>Correction: Possible Answer</a:t>
+            </a:r>
+            <a:endParaRPr lang="en-US" sz="3600" dirty="0"/>
+          </a:p>
+        </p:txBody>
+      </p:sp>
+      <p:sp>
+        <p:nvSpPr>
+          <p:cNvPr id="5" name="Text 2"/>
+          <p:cNvSpPr/>
+          <p:nvPr/>
+        </p:nvSpPr>
+        <p:spPr>
+          <a:xfrm>
+            <a:off x="5349240" y="1783080"/>
+            <a:ext cx="6522415" cy="4663440"/>
+          </a:xfrm>
+          <a:prstGeom prst="rect">
+            <a:avLst/>
+          </a:prstGeom>
+          <a:noFill/>
+          <a:ln/>
+        </p:spPr>
+        <p:txBody>
+          <a:bodyPr wrap="square" lIns="0" tIns="0" rIns="0" bIns="0" rtlCol="0" anchor="t"/>
+          <a:lstStyle/>
+          <a:p>
+            <a:pPr algn="l" indent="0" marL="0">
+              <a:spcAft>
+                <a:spcPts val="800"/>
+              </a:spcAft>
+              <a:buNone/>
+            </a:pPr>
+            <a:r>
+              <a:rPr lang="en-US" sz="4000" dirty="0">
+                <a:solidFill>
+                  <a:srgbClr val="111111"/>
+                </a:solidFill>
+                <a:latin typeface="Times New Roman" pitchFamily="34" charset="0"/>
+                <a:ea typeface="Times New Roman" pitchFamily="34" charset="-122"/>
+                <a:cs typeface="Times New Roman" pitchFamily="34" charset="-120"/>
+              </a:rPr>
+              <a:t>The Nile, the Congo and the Niger (also the Zambezi).</a:t>
+            </a:r>
+            <a:endParaRPr lang="en-US" sz="4000" dirty="0"/>
+          </a:p>
+        </p:txBody>
+      </p:sp>
+      <p:sp>
+        <p:nvSpPr>
+          <p:cNvPr id="25" name="Slide Number Placeholder 0"/>
+          <p:cNvSpPr>
+            <a:spLocks noGrp="1"/>
+          </p:cNvSpPr>
+          <p:nvPr>
+            <p:ph type="sldNum" sz="quarter" idx="4294967295"/>
+          </p:nvPr>
+        </p:nvSpPr>
+        <p:spPr>
+          <a:xfrm>
+            <a:off x="27432" y="91440"/>
+            <a:ext cx="585216" cy="475488"/>
+          </a:xfrm>
+          <a:prstGeom prst="rect">
+            <a:avLst/>
+          </a:prstGeom>
+          <a:extLst>
+            <a:ext uri="{C572A759-6A51-4108-AA02-DFA0A04FC94B}">
+              <ma14:wrappingTextBoxFlag xmlns:ma14="http://schemas.microsoft.com/office/mac/drawingml/2011/main" val="0"/>
+            </a:ext>
+          </a:extLst>
+        </p:spPr>
+        <p:txBody>
+          <a:bodyPr/>
+          <a:lstStyle>
+            <a:lvl1pPr>
+              <a:defRPr sz="2000">
+                <a:solidFill>
+                  <a:srgbClr val="FFFFFF"/>
+                </a:solidFill>
+                <a:latin typeface="Calibri"/>
+                <a:ea typeface="Calibri"/>
+                <a:cs typeface="Calibri"/>
+              </a:defRPr>
+            </a:lvl1pPr>
+          </a:lstStyle>
+          <a:p>
+            <a:pPr algn="ctr"/>
+            <a:fld id="{F7021451-1387-4CA6-816F-3879F97B5CBC}" type="slidenum">
+              <a:rPr b="1" lang="en-US"/>
+              <a:t>5</a:t>
+            </a:fld>
+            <a:endParaRPr lang="en-US"/>
+          </a:p>
+        </p:txBody>
+      </p:sp>
+    </p:spTree>
+  </p:cSld>
+  <p:clrMapOvr>
+    <a:masterClrMapping/>
+  </p:clrMapOvr>
+</p:sld>
+</file>
+
+<file path=ppt/slides/slide50.xml><?xml version="1.0" encoding="utf-8"?>
+<p:sld xmlns:a="http://schemas.openxmlformats.org/drawingml/2006/main" xmlns:r="http://schemas.openxmlformats.org/officeDocument/2006/relationships" xmlns:p="http://schemas.openxmlformats.org/presentationml/2006/main">
+  <p:cSld name="Slide 50">
+    <p:spTree>
+      <p:nvGrpSpPr>
+        <p:cNvPr id="1" name=""/>
+        <p:cNvGrpSpPr/>
+        <p:nvPr/>
+      </p:nvGrpSpPr>
+      <p:grpSpPr>
+        <a:xfrm>
+          <a:off x="0" y="0"/>
+          <a:ext cx="0" cy="0"/>
+          <a:chOff x="0" y="0"/>
+          <a:chExt cx="0" cy="0"/>
+        </a:xfrm>
+      </p:grpSpPr>
+      <p:sp>
+        <p:nvSpPr>
+          <p:cNvPr id="2" name="Text 0"/>
+          <p:cNvSpPr/>
+          <p:nvPr/>
+        </p:nvSpPr>
+        <p:spPr>
+          <a:xfrm>
+            <a:off x="457200" y="713232"/>
+            <a:ext cx="11368735" cy="274320"/>
+          </a:xfrm>
+          <a:prstGeom prst="rect">
+            <a:avLst/>
+          </a:prstGeom>
+          <a:noFill/>
+          <a:ln/>
+        </p:spPr>
+        <p:txBody>
+          <a:bodyPr wrap="square" lIns="0" tIns="0" rIns="0" bIns="0" rtlCol="0" anchor="ctr"/>
+          <a:lstStyle/>
+          <a:p>
+            <a:pPr algn="r" indent="0" marL="0">
+              <a:buNone/>
+            </a:pPr>
+            <a:r>
+              <a:rPr lang="en-US" sz="1400" b="1" dirty="0">
+                <a:solidFill>
+                  <a:srgbClr val="1C3F6E"/>
+                </a:solidFill>
+                <a:latin typeface="Calibri" pitchFamily="34" charset="0"/>
+                <a:ea typeface="Calibri" pitchFamily="34" charset="-122"/>
+                <a:cs typeface="Calibri" pitchFamily="34" charset="-120"/>
+              </a:rPr>
               <a:t>BILINGUAL GAME</a:t>
             </a:r>
             <a:endParaRPr lang="en-US" sz="1400" dirty="0"/>
@@ -17523,7 +18327,7 @@
       </p:sp>
       <p:graphicFrame>
         <p:nvGraphicFramePr>
-          <p:cNvPr id="50" name="Table 0"/>
+          <p:cNvPr id="51" name="Table 0"/>
           <p:cNvGraphicFramePr>
             <a:graphicFrameLocks noGrp="1"/>
           </p:cNvGraphicFramePr>
@@ -18835,7 +19639,7 @@
             <a:pPr algn="ctr"/>
             <a:fld id="{F7021451-1387-4CA6-816F-3879F97B5CBC}" type="slidenum">
               <a:rPr b="1" lang="en-US"/>
-              <a:t>49</a:t>
+              <a:t>50</a:t>
             </a:fld>
             <a:endParaRPr lang="en-US"/>
           </a:p>
@@ -18849,9 +19653,9 @@
 </p:sld>
 </file>
 
-<file path=ppt/slides/slide5.xml><?xml version="1.0" encoding="utf-8"?>
+<file path=ppt/slides/slide51.xml><?xml version="1.0" encoding="utf-8"?>
 <p:sld xmlns:a="http://schemas.openxmlformats.org/drawingml/2006/main" xmlns:r="http://schemas.openxmlformats.org/officeDocument/2006/relationships" xmlns:p="http://schemas.openxmlformats.org/presentationml/2006/main">
-  <p:cSld name="Slide 5">
+  <p:cSld name="Slide 51">
     <p:spTree>
       <p:nvGrpSpPr>
         <p:cNvPr id="1" name=""/>
@@ -18899,225 +19703,6 @@
                 <a:ea typeface="Calibri" pitchFamily="34" charset="-122"/>
                 <a:cs typeface="Calibri" pitchFamily="34" charset="-120"/>
               </a:rPr>
-              <a:t>HOMEWORK CORRECTION</a:t>
-            </a:r>
-            <a:endParaRPr lang="en-US" sz="1400" dirty="0"/>
-          </a:p>
-        </p:txBody>
-      </p:sp>
-      <p:pic>
-        <p:nvPicPr>
-          <p:cNvPr id="3" name="Image 0" descr="/home/claude/f4/img/minesec_sheet.png">    </p:cNvPr>
-          <p:cNvPicPr>
-            <a:picLocks noChangeAspect="1"/>
-          </p:cNvPicPr>
-          <p:nvPr/>
-        </p:nvPicPr>
-        <p:blipFill>
-          <a:blip r:embed="rId1"/>
-          <a:stretch>
-            <a:fillRect/>
-          </a:stretch>
-        </p:blipFill>
-        <p:spPr>
-          <a:xfrm>
-            <a:off x="0" y="658368"/>
-            <a:ext cx="5120640" cy="5833872"/>
-          </a:xfrm>
-          <a:prstGeom prst="rect">
-            <a:avLst/>
-          </a:prstGeom>
-        </p:spPr>
-      </p:pic>
-      <p:sp>
-        <p:nvSpPr>
-          <p:cNvPr id="4" name="Text 1"/>
-          <p:cNvSpPr/>
-          <p:nvPr/>
-        </p:nvSpPr>
-        <p:spPr>
-          <a:xfrm>
-            <a:off x="5349240" y="1005840"/>
-            <a:ext cx="6522415" cy="731520"/>
-          </a:xfrm>
-          <a:prstGeom prst="rect">
-            <a:avLst/>
-          </a:prstGeom>
-          <a:noFill/>
-          <a:ln/>
-        </p:spPr>
-        <p:txBody>
-          <a:bodyPr wrap="square" lIns="0" tIns="0" rIns="0" bIns="0" rtlCol="0" anchor="ctr">
-            <a:normAutofit/>
-          </a:bodyPr>
-          <a:lstStyle/>
-          <a:p>
-            <a:pPr algn="ctr" indent="0" marL="0">
-              <a:buNone/>
-            </a:pPr>
-            <a:r>
-              <a:rPr lang="en-US" sz="3600" b="1" dirty="0">
-                <a:solidFill>
-                  <a:srgbClr val="990011"/>
-                </a:solidFill>
-                <a:latin typeface="Times New Roman" pitchFamily="34" charset="0"/>
-                <a:ea typeface="Times New Roman" pitchFamily="34" charset="-122"/>
-                <a:cs typeface="Times New Roman" pitchFamily="34" charset="-120"/>
-              </a:rPr>
-              <a:t>Correction: Possible Answer</a:t>
-            </a:r>
-            <a:endParaRPr lang="en-US" sz="3600" dirty="0"/>
-          </a:p>
-        </p:txBody>
-      </p:sp>
-      <p:sp>
-        <p:nvSpPr>
-          <p:cNvPr id="5" name="Text 2"/>
-          <p:cNvSpPr/>
-          <p:nvPr/>
-        </p:nvSpPr>
-        <p:spPr>
-          <a:xfrm>
-            <a:off x="5349240" y="1783080"/>
-            <a:ext cx="6522415" cy="4663440"/>
-          </a:xfrm>
-          <a:prstGeom prst="rect">
-            <a:avLst/>
-          </a:prstGeom>
-          <a:noFill/>
-          <a:ln/>
-        </p:spPr>
-        <p:txBody>
-          <a:bodyPr wrap="square" lIns="0" tIns="0" rIns="0" bIns="0" rtlCol="0" anchor="t"/>
-          <a:lstStyle/>
-          <a:p>
-            <a:pPr algn="l" indent="0" marL="0">
-              <a:spcAft>
-                <a:spcPts val="800"/>
-              </a:spcAft>
-              <a:buNone/>
-            </a:pPr>
-            <a:r>
-              <a:rPr lang="en-US" sz="4000" dirty="0">
-                <a:solidFill>
-                  <a:srgbClr val="111111"/>
-                </a:solidFill>
-                <a:latin typeface="Times New Roman" pitchFamily="34" charset="0"/>
-                <a:ea typeface="Times New Roman" pitchFamily="34" charset="-122"/>
-                <a:cs typeface="Times New Roman" pitchFamily="34" charset="-120"/>
-              </a:rPr>
-              <a:t>The Nile, the Congo and the Niger (also the Zambezi).</a:t>
-            </a:r>
-            <a:endParaRPr lang="en-US" sz="4000" dirty="0"/>
-          </a:p>
-        </p:txBody>
-      </p:sp>
-      <p:sp>
-        <p:nvSpPr>
-          <p:cNvPr id="25" name="Slide Number Placeholder 0"/>
-          <p:cNvSpPr>
-            <a:spLocks noGrp="1"/>
-          </p:cNvSpPr>
-          <p:nvPr>
-            <p:ph type="sldNum" sz="quarter" idx="4294967295"/>
-          </p:nvPr>
-        </p:nvSpPr>
-        <p:spPr>
-          <a:xfrm>
-            <a:off x="27432" y="91440"/>
-            <a:ext cx="585216" cy="475488"/>
-          </a:xfrm>
-          <a:prstGeom prst="rect">
-            <a:avLst/>
-          </a:prstGeom>
-          <a:extLst>
-            <a:ext uri="{C572A759-6A51-4108-AA02-DFA0A04FC94B}">
-              <ma14:wrappingTextBoxFlag xmlns:ma14="http://schemas.microsoft.com/office/mac/drawingml/2011/main" val="0"/>
-            </a:ext>
-          </a:extLst>
-        </p:spPr>
-        <p:txBody>
-          <a:bodyPr/>
-          <a:lstStyle>
-            <a:lvl1pPr>
-              <a:defRPr sz="2000">
-                <a:solidFill>
-                  <a:srgbClr val="FFFFFF"/>
-                </a:solidFill>
-                <a:latin typeface="Calibri"/>
-                <a:ea typeface="Calibri"/>
-                <a:cs typeface="Calibri"/>
-              </a:defRPr>
-            </a:lvl1pPr>
-          </a:lstStyle>
-          <a:p>
-            <a:pPr algn="ctr"/>
-            <a:fld id="{F7021451-1387-4CA6-816F-3879F97B5CBC}" type="slidenum">
-              <a:rPr b="1" lang="en-US"/>
-              <a:t>5</a:t>
-            </a:fld>
-            <a:endParaRPr lang="en-US"/>
-          </a:p>
-        </p:txBody>
-      </p:sp>
-    </p:spTree>
-  </p:cSld>
-  <p:clrMapOvr>
-    <a:masterClrMapping/>
-  </p:clrMapOvr>
-</p:sld>
-</file>
-
-<file path=ppt/slides/slide50.xml><?xml version="1.0" encoding="utf-8"?>
-<p:sld xmlns:a="http://schemas.openxmlformats.org/drawingml/2006/main" xmlns:r="http://schemas.openxmlformats.org/officeDocument/2006/relationships" xmlns:p="http://schemas.openxmlformats.org/presentationml/2006/main">
-  <p:cSld name="Slide 50">
-    <p:spTree>
-      <p:nvGrpSpPr>
-        <p:cNvPr id="1" name=""/>
-        <p:cNvGrpSpPr/>
-        <p:nvPr/>
-      </p:nvGrpSpPr>
-      <p:grpSpPr>
-        <a:xfrm>
-          <a:off x="0" y="0"/>
-          <a:ext cx="0" cy="0"/>
-          <a:chOff x="0" y="0"/>
-          <a:chExt cx="0" cy="0"/>
-        </a:xfrm>
-      </p:grpSpPr>
-      <p:sp>
-        <p:nvSpPr>
-          <p:cNvPr id="2" name="Text 0"/>
-          <p:cNvSpPr/>
-          <p:nvPr/>
-        </p:nvSpPr>
-        <p:spPr>
-          <a:xfrm>
-            <a:off x="457200" y="713232"/>
-            <a:ext cx="11368735" cy="274320"/>
-          </a:xfrm>
-          <a:prstGeom prst="rect">
-            <a:avLst/>
-          </a:prstGeom>
-          <a:noFill/>
-          <a:ln/>
-        </p:spPr>
-        <p:txBody>
-          <a:bodyPr wrap="square" lIns="0" tIns="0" rIns="0" bIns="0" rtlCol="0" anchor="ctr"/>
-          <a:lstStyle/>
-          <a:p>
-            <a:pPr algn="r" indent="0" marL="0">
-              <a:buNone/>
-            </a:pPr>
-            <a:r>
-              <a:rPr lang="en-US" sz="1400" b="1" dirty="0">
-                <a:solidFill>
-                  <a:srgbClr val="1C3F6E"/>
-                </a:solidFill>
-                <a:latin typeface="Calibri" pitchFamily="34" charset="0"/>
-                <a:ea typeface="Calibri" pitchFamily="34" charset="-122"/>
-                <a:cs typeface="Calibri" pitchFamily="34" charset="-120"/>
-              </a:rPr>
               <a:t>LOGBOOK</a:t>
             </a:r>
             <a:endParaRPr lang="en-US" sz="1400" dirty="0"/>
@@ -19165,7 +19750,7 @@
       </p:sp>
       <p:graphicFrame>
         <p:nvGraphicFramePr>
-          <p:cNvPr id="51" name="Table 0"/>
+          <p:cNvPr id="52" name="Table 0"/>
           <p:cNvGraphicFramePr>
             <a:graphicFrameLocks noGrp="1"/>
           </p:cNvGraphicFramePr>
@@ -19787,7 +20372,7 @@
             <a:pPr algn="ctr"/>
             <a:fld id="{F7021451-1387-4CA6-816F-3879F97B5CBC}" type="slidenum">
               <a:rPr b="1" lang="en-US"/>
-              <a:t>50</a:t>
+              <a:t>51</a:t>
             </a:fld>
             <a:endParaRPr lang="en-US"/>
           </a:p>
@@ -19801,9 +20386,9 @@
 </p:sld>
 </file>
 
-<file path=ppt/slides/slide51.xml><?xml version="1.0" encoding="utf-8"?>
+<file path=ppt/slides/slide52.xml><?xml version="1.0" encoding="utf-8"?>
 <p:sld xmlns:a="http://schemas.openxmlformats.org/drawingml/2006/main" xmlns:r="http://schemas.openxmlformats.org/officeDocument/2006/relationships" xmlns:p="http://schemas.openxmlformats.org/presentationml/2006/main">
-  <p:cSld name="Slide 51">
+  <p:cSld name="Slide 52">
     <p:spTree>
       <p:nvGrpSpPr>
         <p:cNvPr id="1" name=""/>
@@ -19898,7 +20483,7 @@
       </p:sp>
       <p:graphicFrame>
         <p:nvGraphicFramePr>
-          <p:cNvPr id="52" name="Table 0"/>
+          <p:cNvPr id="53" name="Table 0"/>
           <p:cNvGraphicFramePr>
             <a:graphicFrameLocks noGrp="1"/>
           </p:cNvGraphicFramePr>
@@ -20008,7 +20593,7 @@
                           <a:ea typeface="Calibri" pitchFamily="34" charset="-122"/>
                           <a:cs typeface="Calibri" pitchFamily="34" charset="-120"/>
                         </a:rPr>
-                        <a:t>DEFINITIONS; Vegetation; Drainage.</a:t>
+                        <a:t>DEFINITIONS; Vegetation; Main Rivers and Lakes; Importance.</a:t>
                       </a:r>
                       <a:endParaRPr lang="en-US" sz="1600" dirty="0">
                         <a:latin typeface="Calibri" charset="0"/>
@@ -20658,331 +21243,6 @@
             <a:pPr algn="ctr"/>
             <a:fld id="{F7021451-1387-4CA6-816F-3879F97B5CBC}" type="slidenum">
               <a:rPr b="1" lang="en-US"/>
-              <a:t>51</a:t>
-            </a:fld>
-            <a:endParaRPr lang="en-US"/>
-          </a:p>
-        </p:txBody>
-      </p:sp>
-    </p:spTree>
-  </p:cSld>
-  <p:clrMapOvr>
-    <a:masterClrMapping/>
-  </p:clrMapOvr>
-</p:sld>
-</file>
-
-<file path=ppt/slides/slide52.xml><?xml version="1.0" encoding="utf-8"?>
-<p:sld xmlns:a="http://schemas.openxmlformats.org/drawingml/2006/main" xmlns:r="http://schemas.openxmlformats.org/officeDocument/2006/relationships" xmlns:p="http://schemas.openxmlformats.org/presentationml/2006/main">
-  <p:cSld name="Slide 52">
-    <p:spTree>
-      <p:nvGrpSpPr>
-        <p:cNvPr id="1" name=""/>
-        <p:cNvGrpSpPr/>
-        <p:nvPr/>
-      </p:nvGrpSpPr>
-      <p:grpSpPr>
-        <a:xfrm>
-          <a:off x="0" y="0"/>
-          <a:ext cx="0" cy="0"/>
-          <a:chOff x="0" y="0"/>
-          <a:chExt cx="0" cy="0"/>
-        </a:xfrm>
-      </p:grpSpPr>
-      <p:sp>
-        <p:nvSpPr>
-          <p:cNvPr id="2" name="Text 0"/>
-          <p:cNvSpPr/>
-          <p:nvPr/>
-        </p:nvSpPr>
-        <p:spPr>
-          <a:xfrm>
-            <a:off x="457200" y="713232"/>
-            <a:ext cx="11368735" cy="274320"/>
-          </a:xfrm>
-          <a:prstGeom prst="rect">
-            <a:avLst/>
-          </a:prstGeom>
-          <a:noFill/>
-          <a:ln/>
-        </p:spPr>
-        <p:txBody>
-          <a:bodyPr wrap="square" lIns="0" tIns="0" rIns="0" bIns="0" rtlCol="0" anchor="ctr"/>
-          <a:lstStyle/>
-          <a:p>
-            <a:pPr algn="r" indent="0" marL="0">
-              <a:buNone/>
-            </a:pPr>
-            <a:r>
-              <a:rPr lang="en-US" sz="1400" b="1" dirty="0">
-                <a:solidFill>
-                  <a:srgbClr val="1C3F6E"/>
-                </a:solidFill>
-                <a:latin typeface="Calibri" pitchFamily="34" charset="0"/>
-                <a:ea typeface="Calibri" pitchFamily="34" charset="-122"/>
-                <a:cs typeface="Calibri" pitchFamily="34" charset="-120"/>
-              </a:rPr>
-              <a:t>TEACHER'S NOTE</a:t>
-            </a:r>
-            <a:endParaRPr lang="en-US" sz="1400" dirty="0"/>
-          </a:p>
-        </p:txBody>
-      </p:sp>
-      <p:pic>
-        <p:nvPicPr>
-          <p:cNvPr id="3" name="Image 0" descr="/home/claude/f4/img/minesec_sheet.png">    </p:cNvPr>
-          <p:cNvPicPr>
-            <a:picLocks noChangeAspect="1"/>
-          </p:cNvPicPr>
-          <p:nvPr/>
-        </p:nvPicPr>
-        <p:blipFill>
-          <a:blip r:embed="rId1"/>
-          <a:stretch>
-            <a:fillRect/>
-          </a:stretch>
-        </p:blipFill>
-        <p:spPr>
-          <a:xfrm>
-            <a:off x="0" y="658368"/>
-            <a:ext cx="3840480" cy="5833872"/>
-          </a:xfrm>
-          <a:prstGeom prst="rect">
-            <a:avLst/>
-          </a:prstGeom>
-        </p:spPr>
-      </p:pic>
-      <p:sp>
-        <p:nvSpPr>
-          <p:cNvPr id="4" name="Text 1"/>
-          <p:cNvSpPr/>
-          <p:nvPr/>
-        </p:nvSpPr>
-        <p:spPr>
-          <a:xfrm>
-            <a:off x="4069080" y="1005840"/>
-            <a:ext cx="7802575" cy="731520"/>
-          </a:xfrm>
-          <a:prstGeom prst="rect">
-            <a:avLst/>
-          </a:prstGeom>
-          <a:noFill/>
-          <a:ln/>
-        </p:spPr>
-        <p:txBody>
-          <a:bodyPr wrap="square" lIns="0" tIns="0" rIns="0" bIns="0" rtlCol="0" anchor="ctr">
-            <a:normAutofit/>
-          </a:bodyPr>
-          <a:lstStyle/>
-          <a:p>
-            <a:pPr algn="ctr" indent="0" marL="0">
-              <a:buNone/>
-            </a:pPr>
-            <a:r>
-              <a:rPr lang="en-US" sz="3600" b="1" dirty="0">
-                <a:solidFill>
-                  <a:srgbClr val="990011"/>
-                </a:solidFill>
-                <a:latin typeface="Times New Roman" pitchFamily="34" charset="0"/>
-                <a:ea typeface="Times New Roman" pitchFamily="34" charset="-122"/>
-                <a:cs typeface="Times New Roman" pitchFamily="34" charset="-120"/>
-              </a:rPr>
-              <a:t>Teacher's Note</a:t>
-            </a:r>
-            <a:endParaRPr lang="en-US" sz="3600" dirty="0"/>
-          </a:p>
-        </p:txBody>
-      </p:sp>
-      <p:sp>
-        <p:nvSpPr>
-          <p:cNvPr id="5" name="Text 2"/>
-          <p:cNvSpPr/>
-          <p:nvPr/>
-        </p:nvSpPr>
-        <p:spPr>
-          <a:xfrm>
-            <a:off x="4069080" y="1783080"/>
-            <a:ext cx="7802575" cy="4663440"/>
-          </a:xfrm>
-          <a:prstGeom prst="rect">
-            <a:avLst/>
-          </a:prstGeom>
-          <a:noFill/>
-          <a:ln/>
-        </p:spPr>
-        <p:txBody>
-          <a:bodyPr wrap="square" lIns="0" tIns="0" rIns="0" bIns="0" rtlCol="0" anchor="t"/>
-          <a:lstStyle/>
-          <a:p>
-            <a:pPr algn="l" marL="342900" indent="-342900">
-              <a:spcAft>
-                <a:spcPts val="800"/>
-              </a:spcAft>
-              <a:buSzPct val="100000"/>
-              <a:buChar char="•"/>
-            </a:pPr>
-            <a:r>
-              <a:rPr lang="en-US" sz="2000" dirty="0">
-                <a:solidFill>
-                  <a:srgbClr val="111111"/>
-                </a:solidFill>
-                <a:latin typeface="Calibri" pitchFamily="34" charset="0"/>
-                <a:ea typeface="Calibri" pitchFamily="34" charset="-122"/>
-                <a:cs typeface="Calibri" pitchFamily="34" charset="-120"/>
-              </a:rPr>
-              <a:t>Timing: Homework correction, plan, objectives 8 min | Recall, situation, action 10 min | 5 activities 30 min | Board summary (copying) 30 min | Evaluation, remediation 10 min | Homework, next lesson 5 min | Logbook 7 min</a:t>
-            </a:r>
-            <a:endParaRPr lang="en-US" sz="2000" dirty="0"/>
-          </a:p>
-          <a:p>
-            <a:pPr algn="l" marL="342900" indent="-342900">
-              <a:spcAft>
-                <a:spcPts val="800"/>
-              </a:spcAft>
-              <a:buSzPct val="100000"/>
-              <a:buChar char="•"/>
-            </a:pPr>
-            <a:r>
-              <a:rPr lang="en-US" sz="2000" dirty="0">
-                <a:solidFill>
-                  <a:srgbClr val="111111"/>
-                </a:solidFill>
-                <a:latin typeface="Calibri" pitchFamily="34" charset="0"/>
-                <a:ea typeface="Calibri" pitchFamily="34" charset="-122"/>
-                <a:cs typeface="Calibri" pitchFamily="34" charset="-120"/>
-              </a:rPr>
-              <a:t>Without the projector (Activity 1): draw vegetation belts.</a:t>
-            </a:r>
-            <a:endParaRPr lang="en-US" sz="2000" dirty="0"/>
-          </a:p>
-          <a:p>
-            <a:pPr algn="l" marL="342900" indent="-342900">
-              <a:spcAft>
-                <a:spcPts val="800"/>
-              </a:spcAft>
-              <a:buSzPct val="100000"/>
-              <a:buChar char="•"/>
-            </a:pPr>
-            <a:r>
-              <a:rPr lang="en-US" sz="2000" dirty="0">
-                <a:solidFill>
-                  <a:srgbClr val="111111"/>
-                </a:solidFill>
-                <a:latin typeface="Calibri" pitchFamily="34" charset="0"/>
-                <a:ea typeface="Calibri" pitchFamily="34" charset="-122"/>
-                <a:cs typeface="Calibri" pitchFamily="34" charset="-120"/>
-              </a:rPr>
-              <a:t>Without the projector (Activity 2): describe the forest of the South.</a:t>
-            </a:r>
-            <a:endParaRPr lang="en-US" sz="2000" dirty="0"/>
-          </a:p>
-          <a:p>
-            <a:pPr algn="l" marL="342900" indent="-342900">
-              <a:spcAft>
-                <a:spcPts val="800"/>
-              </a:spcAft>
-              <a:buSzPct val="100000"/>
-              <a:buChar char="•"/>
-            </a:pPr>
-            <a:r>
-              <a:rPr lang="en-US" sz="2000" dirty="0">
-                <a:solidFill>
-                  <a:srgbClr val="111111"/>
-                </a:solidFill>
-                <a:latin typeface="Calibri" pitchFamily="34" charset="0"/>
-                <a:ea typeface="Calibri" pitchFamily="34" charset="-122"/>
-                <a:cs typeface="Calibri" pitchFamily="34" charset="-120"/>
-              </a:rPr>
-              <a:t>Without the projector (Activity 3): draw rivers on a map.</a:t>
-            </a:r>
-            <a:endParaRPr lang="en-US" sz="2000" dirty="0"/>
-          </a:p>
-          <a:p>
-            <a:pPr algn="l" marL="342900" indent="-342900">
-              <a:spcAft>
-                <a:spcPts val="800"/>
-              </a:spcAft>
-              <a:buSzPct val="100000"/>
-              <a:buChar char="•"/>
-            </a:pPr>
-            <a:r>
-              <a:rPr lang="en-US" sz="2000" dirty="0">
-                <a:solidFill>
-                  <a:srgbClr val="111111"/>
-                </a:solidFill>
-                <a:latin typeface="Calibri" pitchFamily="34" charset="0"/>
-                <a:ea typeface="Calibri" pitchFamily="34" charset="-122"/>
-                <a:cs typeface="Calibri" pitchFamily="34" charset="-120"/>
-              </a:rPr>
-              <a:t>Without the projector (Activity 4): describe the Benue.</a:t>
-            </a:r>
-            <a:endParaRPr lang="en-US" sz="2000" dirty="0"/>
-          </a:p>
-          <a:p>
-            <a:pPr algn="l" marL="342900" indent="-342900">
-              <a:spcAft>
-                <a:spcPts val="800"/>
-              </a:spcAft>
-              <a:buSzPct val="100000"/>
-              <a:buChar char="•"/>
-            </a:pPr>
-            <a:r>
-              <a:rPr lang="en-US" sz="2000" dirty="0">
-                <a:solidFill>
-                  <a:srgbClr val="111111"/>
-                </a:solidFill>
-                <a:latin typeface="Calibri" pitchFamily="34" charset="0"/>
-                <a:ea typeface="Calibri" pitchFamily="34" charset="-122"/>
-                <a:cs typeface="Calibri" pitchFamily="34" charset="-120"/>
-              </a:rPr>
-              <a:t>Without the projector (Activity 5): show Lake Chad on a map.</a:t>
-            </a:r>
-            <a:endParaRPr lang="en-US" sz="2000" dirty="0"/>
-          </a:p>
-        </p:txBody>
-      </p:sp>
-      <p:sp>
-        <p:nvSpPr>
-          <p:cNvPr id="25" name="Slide Number Placeholder 0"/>
-          <p:cNvSpPr>
-            <a:spLocks noGrp="1"/>
-          </p:cNvSpPr>
-          <p:nvPr>
-            <p:ph type="sldNum" sz="quarter" idx="4294967295"/>
-          </p:nvPr>
-        </p:nvSpPr>
-        <p:spPr>
-          <a:xfrm>
-            <a:off x="27432" y="91440"/>
-            <a:ext cx="585216" cy="475488"/>
-          </a:xfrm>
-          <a:prstGeom prst="rect">
-            <a:avLst/>
-          </a:prstGeom>
-          <a:extLst>
-            <a:ext uri="{C572A759-6A51-4108-AA02-DFA0A04FC94B}">
-              <ma14:wrappingTextBoxFlag xmlns:ma14="http://schemas.microsoft.com/office/mac/drawingml/2011/main" val="0"/>
-            </a:ext>
-          </a:extLst>
-        </p:spPr>
-        <p:txBody>
-          <a:bodyPr/>
-          <a:lstStyle>
-            <a:lvl1pPr>
-              <a:defRPr sz="2000">
-                <a:solidFill>
-                  <a:srgbClr val="FFFFFF"/>
-                </a:solidFill>
-                <a:latin typeface="Calibri"/>
-                <a:ea typeface="Calibri"/>
-                <a:cs typeface="Calibri"/>
-              </a:defRPr>
-            </a:lvl1pPr>
-          </a:lstStyle>
-          <a:p>
-            <a:pPr algn="ctr"/>
-            <a:fld id="{F7021451-1387-4CA6-816F-3879F97B5CBC}" type="slidenum">
-              <a:rPr b="1" lang="en-US"/>
               <a:t>52</a:t>
             </a:fld>
             <a:endParaRPr lang="en-US"/>
@@ -21047,7 +21307,7 @@
                 <a:ea typeface="Calibri" pitchFamily="34" charset="-122"/>
                 <a:cs typeface="Calibri" pitchFamily="34" charset="-120"/>
               </a:rPr>
-              <a:t>REFERENCES</a:t>
+              <a:t>TEACHER'S NOTE</a:t>
             </a:r>
             <a:endParaRPr lang="en-US" sz="1400" dirty="0"/>
           </a:p>
@@ -21070,7 +21330,7 @@
         <p:spPr>
           <a:xfrm>
             <a:off x="0" y="658368"/>
-            <a:ext cx="5120640" cy="5833872"/>
+            <a:ext cx="3840480" cy="5833872"/>
           </a:xfrm>
           <a:prstGeom prst="rect">
             <a:avLst/>
@@ -21085,8 +21345,8 @@
         </p:nvSpPr>
         <p:spPr>
           <a:xfrm>
-            <a:off x="5349240" y="1005840"/>
-            <a:ext cx="6522415" cy="731520"/>
+            <a:off x="4069080" y="1005840"/>
+            <a:ext cx="7802575" cy="731520"/>
           </a:xfrm>
           <a:prstGeom prst="rect">
             <a:avLst/>
@@ -21112,7 +21372,7 @@
                 <a:ea typeface="Times New Roman" pitchFamily="34" charset="-122"/>
                 <a:cs typeface="Times New Roman" pitchFamily="34" charset="-120"/>
               </a:rPr>
-              <a:t>References</a:t>
+              <a:t>Teacher's Note</a:t>
             </a:r>
             <a:endParaRPr lang="en-US" sz="3600" dirty="0"/>
           </a:p>
@@ -21126,8 +21386,8 @@
         </p:nvSpPr>
         <p:spPr>
           <a:xfrm>
-            <a:off x="5349240" y="1783080"/>
-            <a:ext cx="6522415" cy="4663440"/>
+            <a:off x="4069080" y="1783080"/>
+            <a:ext cx="7802575" cy="4663440"/>
           </a:xfrm>
           <a:prstGeom prst="rect">
             <a:avLst/>
@@ -21147,7 +21407,7 @@
               <a:buChar char="•"/>
             </a:pPr>
             <a:r>
-              <a:rPr lang="en-US" sz="1800" dirty="0">
+              <a:rPr lang="en-US" sz="2000" dirty="0">
                 <a:solidFill>
                   <a:srgbClr val="111111"/>
                 </a:solidFill>
@@ -21155,9 +21415,9 @@
                 <a:ea typeface="Calibri" pitchFamily="34" charset="-122"/>
                 <a:cs typeface="Calibri" pitchFamily="34" charset="-120"/>
               </a:rPr>
-              <a:t>Harmonised Progression Sheet, Economic Geography (5051), Form 2.</a:t>
-            </a:r>
-            <a:endParaRPr lang="en-US" sz="1800" dirty="0"/>
+              <a:t>Timing: Homework correction, plan, objectives 8 min | Recall, situation, action 10 min | 5 activities 30 min | Board summary (copying) 30 min | Evaluation, remediation 10 min | Homework, next lesson 5 min | Logbook 7 min</a:t>
+            </a:r>
+            <a:endParaRPr lang="en-US" sz="2000" dirty="0"/>
           </a:p>
           <a:p>
             <a:pPr algn="l" marL="342900" indent="-342900">
@@ -21168,7 +21428,7 @@
               <a:buChar char="•"/>
             </a:pPr>
             <a:r>
-              <a:rPr lang="en-US" sz="1800" dirty="0">
+              <a:rPr lang="en-US" sz="2000" dirty="0">
                 <a:solidFill>
                   <a:srgbClr val="111111"/>
                 </a:solidFill>
@@ -21176,9 +21436,9 @@
                 <a:ea typeface="Calibri" pitchFamily="34" charset="-122"/>
                 <a:cs typeface="Calibri" pitchFamily="34" charset="-120"/>
               </a:rPr>
-              <a:t>Photo, Activity 2: “Amazon 11” by CIAT International Center for Tropical Agriculture, CC BY-SA 2.0, via Flickr (https://www.flickr.com/photos/38476503@N08/5641587148)</a:t>
-            </a:r>
-            <a:endParaRPr lang="en-US" sz="1800" dirty="0"/>
+              <a:t>Without the projector (Activity 1): draw vegetation belts.</a:t>
+            </a:r>
+            <a:endParaRPr lang="en-US" sz="2000" dirty="0"/>
           </a:p>
           <a:p>
             <a:pPr algn="l" marL="342900" indent="-342900">
@@ -21189,7 +21449,7 @@
               <a:buChar char="•"/>
             </a:pPr>
             <a:r>
-              <a:rPr lang="en-US" sz="1800" dirty="0">
+              <a:rPr lang="en-US" sz="2000" dirty="0">
                 <a:solidFill>
                   <a:srgbClr val="111111"/>
                 </a:solidFill>
@@ -21197,9 +21457,9 @@
                 <a:ea typeface="Calibri" pitchFamily="34" charset="-122"/>
                 <a:cs typeface="Calibri" pitchFamily="34" charset="-120"/>
               </a:rPr>
-              <a:t>Photo, Activity 4: “Niamey, Niger” by LenDog64, CC BY-ND 2.0, via Flickr (https://www.flickr.com/photos/45968460@N03/4422209893)</a:t>
-            </a:r>
-            <a:endParaRPr lang="en-US" sz="1800" dirty="0"/>
+              <a:t>Without the projector (Activity 2): describe the forest of the South.</a:t>
+            </a:r>
+            <a:endParaRPr lang="en-US" sz="2000" dirty="0"/>
           </a:p>
           <a:p>
             <a:pPr algn="l" marL="342900" indent="-342900">
@@ -21210,7 +21470,7 @@
               <a:buChar char="•"/>
             </a:pPr>
             <a:r>
-              <a:rPr lang="en-US" sz="1800" dirty="0">
+              <a:rPr lang="en-US" sz="2000" dirty="0">
                 <a:solidFill>
                   <a:srgbClr val="111111"/>
                 </a:solidFill>
@@ -21218,9 +21478,9 @@
                 <a:ea typeface="Calibri" pitchFamily="34" charset="-122"/>
                 <a:cs typeface="Calibri" pitchFamily="34" charset="-120"/>
               </a:rPr>
-              <a:t>Photo, Activity 5: “Lake Chad: almost gone” by GRIDArendal, CC BY-NC-SA 2.0, via Flickr (https://www.flickr.com/photos/148768555@N05/32323646926)</a:t>
-            </a:r>
-            <a:endParaRPr lang="en-US" sz="1800" dirty="0"/>
+              <a:t>Without the projector (Activity 3): draw rivers on a map.</a:t>
+            </a:r>
+            <a:endParaRPr lang="en-US" sz="2000" dirty="0"/>
           </a:p>
           <a:p>
             <a:pPr algn="l" marL="342900" indent="-342900">
@@ -21231,7 +21491,7 @@
               <a:buChar char="•"/>
             </a:pPr>
             <a:r>
-              <a:rPr lang="en-US" sz="1800" dirty="0">
+              <a:rPr lang="en-US" sz="2000" dirty="0">
                 <a:solidFill>
                   <a:srgbClr val="111111"/>
                 </a:solidFill>
@@ -21239,9 +21499,30 @@
                 <a:ea typeface="Calibri" pitchFamily="34" charset="-122"/>
                 <a:cs typeface="Calibri" pitchFamily="34" charset="-120"/>
               </a:rPr>
-              <a:t>Diagrams and animations: drawn for this lesson (Geography Department).</a:t>
-            </a:r>
-            <a:endParaRPr lang="en-US" sz="1800" dirty="0"/>
+              <a:t>Without the projector (Activity 4): describe the Benue.</a:t>
+            </a:r>
+            <a:endParaRPr lang="en-US" sz="2000" dirty="0"/>
+          </a:p>
+          <a:p>
+            <a:pPr algn="l" marL="342900" indent="-342900">
+              <a:spcAft>
+                <a:spcPts val="800"/>
+              </a:spcAft>
+              <a:buSzPct val="100000"/>
+              <a:buChar char="•"/>
+            </a:pPr>
+            <a:r>
+              <a:rPr lang="en-US" sz="2000" dirty="0">
+                <a:solidFill>
+                  <a:srgbClr val="111111"/>
+                </a:solidFill>
+                <a:latin typeface="Calibri" pitchFamily="34" charset="0"/>
+                <a:ea typeface="Calibri" pitchFamily="34" charset="-122"/>
+                <a:cs typeface="Calibri" pitchFamily="34" charset="-120"/>
+              </a:rPr>
+              <a:t>Without the projector (Activity 5): show Lake Chad on a map.</a:t>
+            </a:r>
+            <a:endParaRPr lang="en-US" sz="2000" dirty="0"/>
           </a:p>
         </p:txBody>
       </p:sp>
@@ -21288,6 +21569,310 @@
             <a:fld id="{F7021451-1387-4CA6-816F-3879F97B5CBC}" type="slidenum">
               <a:rPr b="1" lang="en-US"/>
               <a:t>53</a:t>
+            </a:fld>
+            <a:endParaRPr lang="en-US"/>
+          </a:p>
+        </p:txBody>
+      </p:sp>
+    </p:spTree>
+  </p:cSld>
+  <p:clrMapOvr>
+    <a:masterClrMapping/>
+  </p:clrMapOvr>
+</p:sld>
+</file>
+
+<file path=ppt/slides/slide54.xml><?xml version="1.0" encoding="utf-8"?>
+<p:sld xmlns:a="http://schemas.openxmlformats.org/drawingml/2006/main" xmlns:r="http://schemas.openxmlformats.org/officeDocument/2006/relationships" xmlns:p="http://schemas.openxmlformats.org/presentationml/2006/main">
+  <p:cSld name="Slide 54">
+    <p:spTree>
+      <p:nvGrpSpPr>
+        <p:cNvPr id="1" name=""/>
+        <p:cNvGrpSpPr/>
+        <p:nvPr/>
+      </p:nvGrpSpPr>
+      <p:grpSpPr>
+        <a:xfrm>
+          <a:off x="0" y="0"/>
+          <a:ext cx="0" cy="0"/>
+          <a:chOff x="0" y="0"/>
+          <a:chExt cx="0" cy="0"/>
+        </a:xfrm>
+      </p:grpSpPr>
+      <p:sp>
+        <p:nvSpPr>
+          <p:cNvPr id="2" name="Text 0"/>
+          <p:cNvSpPr/>
+          <p:nvPr/>
+        </p:nvSpPr>
+        <p:spPr>
+          <a:xfrm>
+            <a:off x="457200" y="713232"/>
+            <a:ext cx="11368735" cy="274320"/>
+          </a:xfrm>
+          <a:prstGeom prst="rect">
+            <a:avLst/>
+          </a:prstGeom>
+          <a:noFill/>
+          <a:ln/>
+        </p:spPr>
+        <p:txBody>
+          <a:bodyPr wrap="square" lIns="0" tIns="0" rIns="0" bIns="0" rtlCol="0" anchor="ctr"/>
+          <a:lstStyle/>
+          <a:p>
+            <a:pPr algn="r" indent="0" marL="0">
+              <a:buNone/>
+            </a:pPr>
+            <a:r>
+              <a:rPr lang="en-US" sz="1400" b="1" dirty="0">
+                <a:solidFill>
+                  <a:srgbClr val="1C3F6E"/>
+                </a:solidFill>
+                <a:latin typeface="Calibri" pitchFamily="34" charset="0"/>
+                <a:ea typeface="Calibri" pitchFamily="34" charset="-122"/>
+                <a:cs typeface="Calibri" pitchFamily="34" charset="-120"/>
+              </a:rPr>
+              <a:t>REFERENCES</a:t>
+            </a:r>
+            <a:endParaRPr lang="en-US" sz="1400" dirty="0"/>
+          </a:p>
+        </p:txBody>
+      </p:sp>
+      <p:pic>
+        <p:nvPicPr>
+          <p:cNvPr id="3" name="Image 0" descr="/home/claude/f4/img/minesec_sheet.png">    </p:cNvPr>
+          <p:cNvPicPr>
+            <a:picLocks noChangeAspect="1"/>
+          </p:cNvPicPr>
+          <p:nvPr/>
+        </p:nvPicPr>
+        <p:blipFill>
+          <a:blip r:embed="rId1"/>
+          <a:stretch>
+            <a:fillRect/>
+          </a:stretch>
+        </p:blipFill>
+        <p:spPr>
+          <a:xfrm>
+            <a:off x="0" y="658368"/>
+            <a:ext cx="5120640" cy="5833872"/>
+          </a:xfrm>
+          <a:prstGeom prst="rect">
+            <a:avLst/>
+          </a:prstGeom>
+        </p:spPr>
+      </p:pic>
+      <p:sp>
+        <p:nvSpPr>
+          <p:cNvPr id="4" name="Text 1"/>
+          <p:cNvSpPr/>
+          <p:nvPr/>
+        </p:nvSpPr>
+        <p:spPr>
+          <a:xfrm>
+            <a:off x="5349240" y="1005840"/>
+            <a:ext cx="6522415" cy="731520"/>
+          </a:xfrm>
+          <a:prstGeom prst="rect">
+            <a:avLst/>
+          </a:prstGeom>
+          <a:noFill/>
+          <a:ln/>
+        </p:spPr>
+        <p:txBody>
+          <a:bodyPr wrap="square" lIns="0" tIns="0" rIns="0" bIns="0" rtlCol="0" anchor="ctr">
+            <a:normAutofit/>
+          </a:bodyPr>
+          <a:lstStyle/>
+          <a:p>
+            <a:pPr algn="ctr" indent="0" marL="0">
+              <a:buNone/>
+            </a:pPr>
+            <a:r>
+              <a:rPr lang="en-US" sz="3600" b="1" dirty="0">
+                <a:solidFill>
+                  <a:srgbClr val="990011"/>
+                </a:solidFill>
+                <a:latin typeface="Times New Roman" pitchFamily="34" charset="0"/>
+                <a:ea typeface="Times New Roman" pitchFamily="34" charset="-122"/>
+                <a:cs typeface="Times New Roman" pitchFamily="34" charset="-120"/>
+              </a:rPr>
+              <a:t>References</a:t>
+            </a:r>
+            <a:endParaRPr lang="en-US" sz="3600" dirty="0"/>
+          </a:p>
+        </p:txBody>
+      </p:sp>
+      <p:sp>
+        <p:nvSpPr>
+          <p:cNvPr id="5" name="Text 2"/>
+          <p:cNvSpPr/>
+          <p:nvPr/>
+        </p:nvSpPr>
+        <p:spPr>
+          <a:xfrm>
+            <a:off x="5349240" y="1783080"/>
+            <a:ext cx="6522415" cy="4663440"/>
+          </a:xfrm>
+          <a:prstGeom prst="rect">
+            <a:avLst/>
+          </a:prstGeom>
+          <a:noFill/>
+          <a:ln/>
+        </p:spPr>
+        <p:txBody>
+          <a:bodyPr wrap="square" lIns="0" tIns="0" rIns="0" bIns="0" rtlCol="0" anchor="t"/>
+          <a:lstStyle/>
+          <a:p>
+            <a:pPr algn="l" marL="342900" indent="-342900">
+              <a:spcAft>
+                <a:spcPts val="800"/>
+              </a:spcAft>
+              <a:buSzPct val="100000"/>
+              <a:buChar char="•"/>
+            </a:pPr>
+            <a:r>
+              <a:rPr lang="en-US" sz="1800" dirty="0">
+                <a:solidFill>
+                  <a:srgbClr val="111111"/>
+                </a:solidFill>
+                <a:latin typeface="Calibri" pitchFamily="34" charset="0"/>
+                <a:ea typeface="Calibri" pitchFamily="34" charset="-122"/>
+                <a:cs typeface="Calibri" pitchFamily="34" charset="-120"/>
+              </a:rPr>
+              <a:t>Harmonised Progression Sheet, Economic Geography (5051), Form 2.</a:t>
+            </a:r>
+            <a:endParaRPr lang="en-US" sz="1800" dirty="0"/>
+          </a:p>
+          <a:p>
+            <a:pPr algn="l" marL="342900" indent="-342900">
+              <a:spcAft>
+                <a:spcPts val="800"/>
+              </a:spcAft>
+              <a:buSzPct val="100000"/>
+              <a:buChar char="•"/>
+            </a:pPr>
+            <a:r>
+              <a:rPr lang="en-US" sz="1800" dirty="0">
+                <a:solidFill>
+                  <a:srgbClr val="111111"/>
+                </a:solidFill>
+                <a:latin typeface="Calibri" pitchFamily="34" charset="0"/>
+                <a:ea typeface="Calibri" pitchFamily="34" charset="-122"/>
+                <a:cs typeface="Calibri" pitchFamily="34" charset="-120"/>
+              </a:rPr>
+              <a:t>Photo, Activity 2: “Amazon 11” by CIAT International Center for Tropical Agriculture, CC BY-SA 2.0, via Flickr (https://www.flickr.com/photos/38476503@N08/5641587148)</a:t>
+            </a:r>
+            <a:endParaRPr lang="en-US" sz="1800" dirty="0"/>
+          </a:p>
+          <a:p>
+            <a:pPr algn="l" marL="342900" indent="-342900">
+              <a:spcAft>
+                <a:spcPts val="800"/>
+              </a:spcAft>
+              <a:buSzPct val="100000"/>
+              <a:buChar char="•"/>
+            </a:pPr>
+            <a:r>
+              <a:rPr lang="en-US" sz="1800" dirty="0">
+                <a:solidFill>
+                  <a:srgbClr val="111111"/>
+                </a:solidFill>
+                <a:latin typeface="Calibri" pitchFamily="34" charset="0"/>
+                <a:ea typeface="Calibri" pitchFamily="34" charset="-122"/>
+                <a:cs typeface="Calibri" pitchFamily="34" charset="-120"/>
+              </a:rPr>
+              <a:t>Photo, Activity 4: “Niamey, Niger” by LenDog64, CC BY-ND 2.0, via Flickr (https://www.flickr.com/photos/45968460@N03/4422209893)</a:t>
+            </a:r>
+            <a:endParaRPr lang="en-US" sz="1800" dirty="0"/>
+          </a:p>
+          <a:p>
+            <a:pPr algn="l" marL="342900" indent="-342900">
+              <a:spcAft>
+                <a:spcPts val="800"/>
+              </a:spcAft>
+              <a:buSzPct val="100000"/>
+              <a:buChar char="•"/>
+            </a:pPr>
+            <a:r>
+              <a:rPr lang="en-US" sz="1800" dirty="0">
+                <a:solidFill>
+                  <a:srgbClr val="111111"/>
+                </a:solidFill>
+                <a:latin typeface="Calibri" pitchFamily="34" charset="0"/>
+                <a:ea typeface="Calibri" pitchFamily="34" charset="-122"/>
+                <a:cs typeface="Calibri" pitchFamily="34" charset="-120"/>
+              </a:rPr>
+              <a:t>Photo, Activity 5: “Lake Chad: almost gone” by GRIDArendal, CC BY-NC-SA 2.0, via Flickr (https://www.flickr.com/photos/148768555@N05/32323646926)</a:t>
+            </a:r>
+            <a:endParaRPr lang="en-US" sz="1800" dirty="0"/>
+          </a:p>
+          <a:p>
+            <a:pPr algn="l" marL="342900" indent="-342900">
+              <a:spcAft>
+                <a:spcPts val="800"/>
+              </a:spcAft>
+              <a:buSzPct val="100000"/>
+              <a:buChar char="•"/>
+            </a:pPr>
+            <a:r>
+              <a:rPr lang="en-US" sz="1800" dirty="0">
+                <a:solidFill>
+                  <a:srgbClr val="111111"/>
+                </a:solidFill>
+                <a:latin typeface="Calibri" pitchFamily="34" charset="0"/>
+                <a:ea typeface="Calibri" pitchFamily="34" charset="-122"/>
+                <a:cs typeface="Calibri" pitchFamily="34" charset="-120"/>
+              </a:rPr>
+              <a:t>Diagrams and animations: drawn for this lesson (Geography Department).</a:t>
+            </a:r>
+            <a:endParaRPr lang="en-US" sz="1800" dirty="0"/>
+          </a:p>
+        </p:txBody>
+      </p:sp>
+      <p:sp>
+        <p:nvSpPr>
+          <p:cNvPr id="25" name="Slide Number Placeholder 0"/>
+          <p:cNvSpPr>
+            <a:spLocks noGrp="1"/>
+          </p:cNvSpPr>
+          <p:nvPr>
+            <p:ph type="sldNum" sz="quarter" idx="4294967295"/>
+          </p:nvPr>
+        </p:nvSpPr>
+        <p:spPr>
+          <a:xfrm>
+            <a:off x="27432" y="91440"/>
+            <a:ext cx="585216" cy="475488"/>
+          </a:xfrm>
+          <a:prstGeom prst="rect">
+            <a:avLst/>
+          </a:prstGeom>
+          <a:extLst>
+            <a:ext uri="{C572A759-6A51-4108-AA02-DFA0A04FC94B}">
+              <ma14:wrappingTextBoxFlag xmlns:ma14="http://schemas.microsoft.com/office/mac/drawingml/2011/main" val="0"/>
+            </a:ext>
+          </a:extLst>
+        </p:spPr>
+        <p:txBody>
+          <a:bodyPr/>
+          <a:lstStyle>
+            <a:lvl1pPr>
+              <a:defRPr sz="2000">
+                <a:solidFill>
+                  <a:srgbClr val="FFFFFF"/>
+                </a:solidFill>
+                <a:latin typeface="Calibri"/>
+                <a:ea typeface="Calibri"/>
+                <a:cs typeface="Calibri"/>
+              </a:defRPr>
+            </a:lvl1pPr>
+          </a:lstStyle>
+          <a:p>
+            <a:pPr algn="ctr"/>
+            <a:fld id="{F7021451-1387-4CA6-816F-3879F97B5CBC}" type="slidenum">
+              <a:rPr b="1" lang="en-US"/>
+              <a:t>54</a:t>
             </a:fld>
             <a:endParaRPr lang="en-US"/>
           </a:p>
